--- a/docs/TraceGuard-Executive.pptx
+++ b/docs/TraceGuard-Executive.pptx
@@ -5077,7 +5077,7 @@
         <p:spPr>
           <a:xfrm>
             <a:off x="566928" y="2697480"/>
-            <a:ext cx="10972800" cy="502920"/>
+            <a:ext cx="5806440" cy="548640"/>
           </a:xfrm>
           <a:prstGeom prst="rect">
             <a:avLst/>
@@ -5093,7 +5093,7 @@
               <a:buNone/>
             </a:pPr>
             <a:r>
-              <a:rPr lang="en-US" sz="1500" b="1" dirty="0">
+              <a:rPr lang="en-US" sz="1450" b="1" dirty="0">
                 <a:solidFill>
                   <a:srgbClr val="2563EB"/>
                 </a:solidFill>
@@ -5107,7 +5107,7 @@
               <a:buNone/>
             </a:pPr>
             <a:r>
-              <a:rPr lang="en-US" sz="1500" dirty="0">
+              <a:rPr lang="en-US" sz="1450" dirty="0">
                 <a:solidFill>
                   <a:srgbClr val="5B6B85"/>
                 </a:solidFill>
@@ -5117,7 +5117,7 @@
               </a:rPr>
               <a:t>Per API, see exactly what changed since the previous release.</a:t>
             </a:r>
-            <a:endParaRPr lang="en-US" sz="1500" dirty="0"/>
+            <a:endParaRPr lang="en-US" sz="1450" dirty="0"/>
           </a:p>
         </p:txBody>
       </p:sp>
@@ -5129,8 +5129,8 @@
         </p:nvSpPr>
         <p:spPr>
           <a:xfrm>
-            <a:off x="566928" y="3337560"/>
-            <a:ext cx="10972800" cy="502920"/>
+            <a:off x="566928" y="3355848"/>
+            <a:ext cx="5806440" cy="548640"/>
           </a:xfrm>
           <a:prstGeom prst="rect">
             <a:avLst/>
@@ -5146,7 +5146,7 @@
               <a:buNone/>
             </a:pPr>
             <a:r>
-              <a:rPr lang="en-US" sz="1500" b="1" dirty="0">
+              <a:rPr lang="en-US" sz="1450" b="1" dirty="0">
                 <a:solidFill>
                   <a:srgbClr val="2563EB"/>
                 </a:solidFill>
@@ -5160,7 +5160,7 @@
               <a:buNone/>
             </a:pPr>
             <a:r>
-              <a:rPr lang="en-US" sz="1500" dirty="0">
+              <a:rPr lang="en-US" sz="1450" dirty="0">
                 <a:solidFill>
                   <a:srgbClr val="5B6B85"/>
                 </a:solidFill>
@@ -5170,7 +5170,7 @@
               </a:rPr>
               <a:t>New and Changed are highlighted — so QA targets only what needs testing.</a:t>
             </a:r>
-            <a:endParaRPr lang="en-US" sz="1500" dirty="0"/>
+            <a:endParaRPr lang="en-US" sz="1450" dirty="0"/>
           </a:p>
         </p:txBody>
       </p:sp>
@@ -5182,8 +5182,8 @@
         </p:nvSpPr>
         <p:spPr>
           <a:xfrm>
-            <a:off x="566928" y="3977640"/>
-            <a:ext cx="10972800" cy="502920"/>
+            <a:off x="566928" y="4014216"/>
+            <a:ext cx="5806440" cy="548640"/>
           </a:xfrm>
           <a:prstGeom prst="rect">
             <a:avLst/>
@@ -5199,7 +5199,7 @@
               <a:buNone/>
             </a:pPr>
             <a:r>
-              <a:rPr lang="en-US" sz="1500" b="1" dirty="0">
+              <a:rPr lang="en-US" sz="1450" b="1" dirty="0">
                 <a:solidFill>
                   <a:srgbClr val="2563EB"/>
                 </a:solidFill>
@@ -5213,7 +5213,7 @@
               <a:buNone/>
             </a:pPr>
             <a:r>
-              <a:rPr lang="en-US" sz="1500" dirty="0">
+              <a:rPr lang="en-US" sz="1450" dirty="0">
                 <a:solidFill>
                   <a:srgbClr val="5B6B85"/>
                 </a:solidFill>
@@ -5223,7 +5223,7 @@
               </a:rPr>
               <a:t>Payload changes — request fields added or removed — are surfaced automatically.</a:t>
             </a:r>
-            <a:endParaRPr lang="en-US" sz="1500" dirty="0"/>
+            <a:endParaRPr lang="en-US" sz="1450" dirty="0"/>
           </a:p>
         </p:txBody>
       </p:sp>
@@ -5235,8 +5235,8 @@
         </p:nvSpPr>
         <p:spPr>
           <a:xfrm>
-            <a:off x="566928" y="4617720"/>
-            <a:ext cx="10972800" cy="502920"/>
+            <a:off x="566928" y="4672584"/>
+            <a:ext cx="5806440" cy="548640"/>
           </a:xfrm>
           <a:prstGeom prst="rect">
             <a:avLst/>
@@ -5252,7 +5252,7 @@
               <a:buNone/>
             </a:pPr>
             <a:r>
-              <a:rPr lang="en-US" sz="1500" b="1" dirty="0">
+              <a:rPr lang="en-US" sz="1450" b="1" dirty="0">
                 <a:solidFill>
                   <a:srgbClr val="2563EB"/>
                 </a:solidFill>
@@ -5266,7 +5266,7 @@
               <a:buNone/>
             </a:pPr>
             <a:r>
-              <a:rPr lang="en-US" sz="1500" dirty="0">
+              <a:rPr lang="en-US" sz="1450" dirty="0">
                 <a:solidFill>
                   <a:srgbClr val="5B6B85"/>
                 </a:solidFill>
@@ -5276,7 +5276,364 @@
               </a:rPr>
               <a:t>An element-level view shows precisely what differs, not just that it differs.</a:t>
             </a:r>
-            <a:endParaRPr lang="en-US" sz="1500" dirty="0"/>
+            <a:endParaRPr lang="en-US" sz="1450" dirty="0"/>
+          </a:p>
+        </p:txBody>
+      </p:sp>
+      <p:sp>
+        <p:nvSpPr>
+          <p:cNvPr id="14" name="Shape 12"/>
+          <p:cNvSpPr/>
+          <p:nvPr/>
+        </p:nvSpPr>
+        <p:spPr>
+          <a:xfrm>
+            <a:off x="6720840" y="2468880"/>
+            <a:ext cx="4901184" cy="2514600"/>
+          </a:xfrm>
+          <a:prstGeom prst="roundRect">
+            <a:avLst>
+              <a:gd name="adj" fmla="val 2182"/>
+            </a:avLst>
+          </a:prstGeom>
+          <a:solidFill>
+            <a:srgbClr val="FFFFFF"/>
+          </a:solidFill>
+          <a:ln w="12700">
+            <a:solidFill>
+              <a:srgbClr val="D7E0EE"/>
+            </a:solidFill>
+            <a:prstDash val="solid"/>
+          </a:ln>
+          <a:effectLst>
+            <a:outerShdw sx="100000" sy="100000" kx="0" ky="0" algn="bl" rotWithShape="0" blurRad="152400" dist="25400" dir="5400000">
+              <a:srgbClr val="0B1020">
+                <a:alpha val="9000"/>
+              </a:srgbClr>
+            </a:outerShdw>
+          </a:effectLst>
+        </p:spPr>
+      </p:sp>
+      <p:sp>
+        <p:nvSpPr>
+          <p:cNvPr id="15" name="Text 13"/>
+          <p:cNvSpPr/>
+          <p:nvPr/>
+        </p:nvSpPr>
+        <p:spPr>
+          <a:xfrm>
+            <a:off x="7013448" y="2706624"/>
+            <a:ext cx="2980944" cy="320040"/>
+          </a:xfrm>
+          <a:prstGeom prst="rect">
+            <a:avLst/>
+          </a:prstGeom>
+          <a:noFill/>
+          <a:ln/>
+        </p:spPr>
+        <p:txBody>
+          <a:bodyPr wrap="square" rtlCol="0" anchor="ctr"/>
+          <a:lstStyle/>
+          <a:p>
+            <a:pPr indent="0" marL="0">
+              <a:buNone/>
+            </a:pPr>
+            <a:r>
+              <a:rPr lang="en-US" sz="1400" b="1" dirty="0">
+                <a:solidFill>
+                  <a:srgbClr val="17233B"/>
+                </a:solidFill>
+                <a:latin typeface="Calibri" pitchFamily="34" charset="0"/>
+                <a:ea typeface="Calibri" pitchFamily="34" charset="-122"/>
+                <a:cs typeface="Calibri" pitchFamily="34" charset="-120"/>
+              </a:rPr>
+              <a:t>POST /transfer/submit</a:t>
+            </a:r>
+            <a:endParaRPr lang="en-US" sz="1400" dirty="0"/>
+          </a:p>
+        </p:txBody>
+      </p:sp>
+      <p:sp>
+        <p:nvSpPr>
+          <p:cNvPr id="16" name="Text 14"/>
+          <p:cNvSpPr/>
+          <p:nvPr/>
+        </p:nvSpPr>
+        <p:spPr>
+          <a:xfrm>
+            <a:off x="9930384" y="2743200"/>
+            <a:ext cx="1417320" cy="274320"/>
+          </a:xfrm>
+          <a:prstGeom prst="rect">
+            <a:avLst/>
+          </a:prstGeom>
+          <a:noFill/>
+          <a:ln/>
+        </p:spPr>
+        <p:txBody>
+          <a:bodyPr wrap="square" rtlCol="0" anchor="ctr"/>
+          <a:lstStyle/>
+          <a:p>
+            <a:pPr algn="r" indent="0" marL="0">
+              <a:buNone/>
+            </a:pPr>
+            <a:r>
+              <a:rPr lang="en-US" sz="1100" dirty="0">
+                <a:solidFill>
+                  <a:srgbClr val="64748B"/>
+                </a:solidFill>
+                <a:latin typeface="Calibri" pitchFamily="34" charset="0"/>
+                <a:ea typeface="Calibri" pitchFamily="34" charset="-122"/>
+                <a:cs typeface="Calibri" pitchFamily="34" charset="-120"/>
+              </a:rPr>
+              <a:t>9.14 → 9.18</a:t>
+            </a:r>
+            <a:endParaRPr lang="en-US" sz="1100" dirty="0"/>
+          </a:p>
+        </p:txBody>
+      </p:sp>
+      <p:sp>
+        <p:nvSpPr>
+          <p:cNvPr id="17" name="Shape 15"/>
+          <p:cNvSpPr/>
+          <p:nvPr/>
+        </p:nvSpPr>
+        <p:spPr>
+          <a:xfrm>
+            <a:off x="7013448" y="3127248"/>
+            <a:ext cx="992124" cy="384048"/>
+          </a:xfrm>
+          <a:prstGeom prst="roundRect">
+            <a:avLst>
+              <a:gd name="adj" fmla="val 50000"/>
+            </a:avLst>
+          </a:prstGeom>
+          <a:solidFill>
+            <a:srgbClr val="FEF3C7"/>
+          </a:solidFill>
+          <a:ln/>
+        </p:spPr>
+      </p:sp>
+      <p:sp>
+        <p:nvSpPr>
+          <p:cNvPr id="18" name="Text 16"/>
+          <p:cNvSpPr/>
+          <p:nvPr/>
+        </p:nvSpPr>
+        <p:spPr>
+          <a:xfrm>
+            <a:off x="7013448" y="3127248"/>
+            <a:ext cx="992124" cy="384048"/>
+          </a:xfrm>
+          <a:prstGeom prst="rect">
+            <a:avLst/>
+          </a:prstGeom>
+          <a:noFill/>
+          <a:ln/>
+        </p:spPr>
+        <p:txBody>
+          <a:bodyPr wrap="square" rtlCol="0" anchor="ctr"/>
+          <a:lstStyle/>
+          <a:p>
+            <a:pPr algn="ctr" indent="0" marL="0">
+              <a:buNone/>
+            </a:pPr>
+            <a:r>
+              <a:rPr lang="en-US" sz="1300" b="1" dirty="0">
+                <a:solidFill>
+                  <a:srgbClr val="B45309"/>
+                </a:solidFill>
+                <a:latin typeface="Calibri" pitchFamily="34" charset="0"/>
+                <a:ea typeface="Calibri" pitchFamily="34" charset="-122"/>
+                <a:cs typeface="Calibri" pitchFamily="34" charset="-120"/>
+              </a:rPr>
+              <a:t>Changed</a:t>
+            </a:r>
+            <a:endParaRPr lang="en-US" sz="1300" dirty="0"/>
+          </a:p>
+        </p:txBody>
+      </p:sp>
+      <p:sp>
+        <p:nvSpPr>
+          <p:cNvPr id="19" name="Text 17"/>
+          <p:cNvSpPr/>
+          <p:nvPr/>
+        </p:nvSpPr>
+        <p:spPr>
+          <a:xfrm>
+            <a:off x="7031736" y="3657600"/>
+            <a:ext cx="4352544" cy="274320"/>
+          </a:xfrm>
+          <a:prstGeom prst="rect">
+            <a:avLst/>
+          </a:prstGeom>
+          <a:noFill/>
+          <a:ln/>
+        </p:spPr>
+        <p:txBody>
+          <a:bodyPr wrap="square" rtlCol="0" anchor="ctr"/>
+          <a:lstStyle/>
+          <a:p>
+            <a:pPr indent="0" marL="0">
+              <a:buNone/>
+            </a:pPr>
+            <a:r>
+              <a:rPr lang="en-US" sz="1250" dirty="0">
+                <a:solidFill>
+                  <a:srgbClr val="B45309"/>
+                </a:solidFill>
+                <a:latin typeface="Calibri" pitchFamily="34" charset="0"/>
+                <a:ea typeface="Calibri" pitchFamily="34" charset="-122"/>
+                <a:cs typeface="Calibri" pitchFamily="34" charset="-120"/>
+              </a:rPr>
+              <a:t>Backend service   2.2 → 2.3</a:t>
+            </a:r>
+            <a:endParaRPr lang="en-US" sz="1250" dirty="0"/>
+          </a:p>
+        </p:txBody>
+      </p:sp>
+      <p:sp>
+        <p:nvSpPr>
+          <p:cNvPr id="20" name="Text 18"/>
+          <p:cNvSpPr/>
+          <p:nvPr/>
+        </p:nvSpPr>
+        <p:spPr>
+          <a:xfrm>
+            <a:off x="7031736" y="4041648"/>
+            <a:ext cx="1828800" cy="256032"/>
+          </a:xfrm>
+          <a:prstGeom prst="rect">
+            <a:avLst/>
+          </a:prstGeom>
+          <a:noFill/>
+          <a:ln/>
+        </p:spPr>
+        <p:txBody>
+          <a:bodyPr wrap="square" rtlCol="0" anchor="ctr"/>
+          <a:lstStyle/>
+          <a:p>
+            <a:pPr indent="0" marL="0">
+              <a:buNone/>
+            </a:pPr>
+            <a:r>
+              <a:rPr lang="en-US" sz="1150" b="1" dirty="0">
+                <a:solidFill>
+                  <a:srgbClr val="17233B"/>
+                </a:solidFill>
+                <a:latin typeface="Calibri" pitchFamily="34" charset="0"/>
+                <a:ea typeface="Calibri" pitchFamily="34" charset="-122"/>
+                <a:cs typeface="Calibri" pitchFamily="34" charset="-120"/>
+              </a:rPr>
+              <a:t>Payload</a:t>
+            </a:r>
+            <a:endParaRPr lang="en-US" sz="1150" dirty="0"/>
+          </a:p>
+        </p:txBody>
+      </p:sp>
+      <p:sp>
+        <p:nvSpPr>
+          <p:cNvPr id="21" name="Text 19"/>
+          <p:cNvSpPr/>
+          <p:nvPr/>
+        </p:nvSpPr>
+        <p:spPr>
+          <a:xfrm>
+            <a:off x="7031736" y="4315968"/>
+            <a:ext cx="4352544" cy="274320"/>
+          </a:xfrm>
+          <a:prstGeom prst="rect">
+            <a:avLst/>
+          </a:prstGeom>
+          <a:noFill/>
+          <a:ln/>
+        </p:spPr>
+        <p:txBody>
+          <a:bodyPr wrap="square" rtlCol="0" anchor="ctr"/>
+          <a:lstStyle/>
+          <a:p>
+            <a:pPr indent="0" marL="0">
+              <a:buNone/>
+            </a:pPr>
+            <a:r>
+              <a:rPr lang="en-US" sz="1250" b="1" dirty="0">
+                <a:solidFill>
+                  <a:srgbClr val="16A34A"/>
+                </a:solidFill>
+                <a:latin typeface="Calibri" pitchFamily="34" charset="0"/>
+                <a:ea typeface="Calibri" pitchFamily="34" charset="-122"/>
+                <a:cs typeface="Calibri" pitchFamily="34" charset="-120"/>
+              </a:rPr>
+              <a:t>+ feeCode</a:t>
+            </a:r>
+            <a:pPr indent="0" marL="0">
+              <a:buNone/>
+            </a:pPr>
+            <a:r>
+              <a:rPr lang="en-US" sz="1250" dirty="0">
+                <a:solidFill>
+                  <a:srgbClr val="000000"/>
+                </a:solidFill>
+                <a:latin typeface="Calibri" pitchFamily="34" charset="0"/>
+                <a:ea typeface="Calibri" pitchFamily="34" charset="-122"/>
+                <a:cs typeface="Calibri" pitchFamily="34" charset="-120"/>
+              </a:rPr>
+              <a:t>        </a:t>
+            </a:r>
+            <a:pPr indent="0" marL="0">
+              <a:buNone/>
+            </a:pPr>
+            <a:r>
+              <a:rPr lang="en-US" sz="1250" b="1" dirty="0">
+                <a:solidFill>
+                  <a:srgbClr val="B91C1C"/>
+                </a:solidFill>
+                <a:latin typeface="Calibri" pitchFamily="34" charset="0"/>
+                <a:ea typeface="Calibri" pitchFamily="34" charset="-122"/>
+                <a:cs typeface="Calibri" pitchFamily="34" charset="-120"/>
+              </a:rPr>
+              <a:t>− legacyRef</a:t>
+            </a:r>
+            <a:endParaRPr lang="en-US" sz="1250" dirty="0"/>
+          </a:p>
+        </p:txBody>
+      </p:sp>
+      <p:sp>
+        <p:nvSpPr>
+          <p:cNvPr id="22" name="Text 20"/>
+          <p:cNvSpPr/>
+          <p:nvPr/>
+        </p:nvSpPr>
+        <p:spPr>
+          <a:xfrm>
+            <a:off x="10433304" y="4709160"/>
+            <a:ext cx="914400" cy="219456"/>
+          </a:xfrm>
+          <a:prstGeom prst="rect">
+            <a:avLst/>
+          </a:prstGeom>
+          <a:noFill/>
+          <a:ln/>
+        </p:spPr>
+        <p:txBody>
+          <a:bodyPr wrap="square" rtlCol="0" anchor="ctr"/>
+          <a:lstStyle/>
+          <a:p>
+            <a:pPr algn="r" indent="0" marL="0">
+              <a:buNone/>
+            </a:pPr>
+            <a:r>
+              <a:rPr lang="en-US" sz="900" i="1" dirty="0">
+                <a:solidFill>
+                  <a:srgbClr val="9AA5B5"/>
+                </a:solidFill>
+                <a:latin typeface="Calibri" pitchFamily="34" charset="0"/>
+                <a:ea typeface="Calibri" pitchFamily="34" charset="-122"/>
+                <a:cs typeface="Calibri" pitchFamily="34" charset="-120"/>
+              </a:rPr>
+              <a:t>Sample</a:t>
+            </a:r>
+            <a:endParaRPr lang="en-US" sz="900" dirty="0"/>
           </a:p>
         </p:txBody>
       </p:sp>
@@ -5669,7 +6026,7 @@
                 <a:ea typeface="Calibri" pitchFamily="34" charset="-122"/>
                 <a:cs typeface="Calibri" pitchFamily="34" charset="-120"/>
               </a:rPr>
-              <a:t>ONE REPORT, EVERY MODULE</a:t>
+              <a:t>PROOF IT WAS TESTED</a:t>
             </a:r>
             <a:endParaRPr lang="en-US" sz="1200" dirty="0"/>
           </a:p>
@@ -5708,7 +6065,7 @@
                 <a:ea typeface="Calibri" pitchFamily="34" charset="-122"/>
                 <a:cs typeface="Calibri" pitchFamily="34" charset="-120"/>
               </a:rPr>
-              <a:t>Proof the whole release was tested</a:t>
+              <a:t>One report validates the whole release was tested</a:t>
             </a:r>
             <a:endParaRPr lang="en-US" sz="3000" dirty="0"/>
           </a:p>
@@ -5722,12 +6079,12 @@
         </p:nvSpPr>
         <p:spPr>
           <a:xfrm>
-            <a:off x="566928" y="2103120"/>
-            <a:ext cx="3502152" cy="1554480"/>
+            <a:off x="566928" y="1737360"/>
+            <a:ext cx="11055096" cy="3703320"/>
           </a:xfrm>
           <a:prstGeom prst="roundRect">
             <a:avLst>
-              <a:gd name="adj" fmla="val 5294"/>
+              <a:gd name="adj" fmla="val 1235"/>
             </a:avLst>
           </a:prstGeom>
           <a:solidFill>
@@ -5739,40 +6096,125 @@
             </a:solidFill>
             <a:prstDash val="solid"/>
           </a:ln>
-        </p:spPr>
-      </p:sp>
-      <p:sp>
-        <p:nvSpPr>
-          <p:cNvPr id="5" name="Shape 3"/>
-          <p:cNvSpPr/>
-          <p:nvPr/>
-        </p:nvSpPr>
-        <p:spPr>
-          <a:xfrm>
-            <a:off x="841248" y="2331720"/>
-            <a:ext cx="800100" cy="384048"/>
+          <a:effectLst>
+            <a:outerShdw sx="100000" sy="100000" kx="0" ky="0" algn="bl" rotWithShape="0" blurRad="177800" dist="38100" dir="5400000">
+              <a:srgbClr val="0B1020">
+                <a:alpha val="10000"/>
+              </a:srgbClr>
+            </a:outerShdw>
+          </a:effectLst>
+        </p:spPr>
+      </p:sp>
+      <p:sp>
+        <p:nvSpPr>
+          <p:cNvPr id="5" name="Text 3"/>
+          <p:cNvSpPr/>
+          <p:nvPr/>
+        </p:nvSpPr>
+        <p:spPr>
+          <a:xfrm>
+            <a:off x="877824" y="1938528"/>
+            <a:ext cx="5486400" cy="320040"/>
+          </a:xfrm>
+          <a:prstGeom prst="rect">
+            <a:avLst/>
+          </a:prstGeom>
+          <a:noFill/>
+          <a:ln/>
+        </p:spPr>
+        <p:txBody>
+          <a:bodyPr wrap="square" rtlCol="0" anchor="ctr"/>
+          <a:lstStyle/>
+          <a:p>
+            <a:pPr indent="0" marL="0">
+              <a:buNone/>
+            </a:pPr>
+            <a:r>
+              <a:rPr lang="en-US" sz="1500" b="1" dirty="0">
+                <a:solidFill>
+                  <a:srgbClr val="17233B"/>
+                </a:solidFill>
+                <a:latin typeface="Calibri" pitchFamily="34" charset="0"/>
+                <a:ea typeface="Calibri" pitchFamily="34" charset="-122"/>
+                <a:cs typeface="Calibri" pitchFamily="34" charset="-120"/>
+              </a:rPr>
+              <a:t>Release Test Report</a:t>
+            </a:r>
+            <a:endParaRPr lang="en-US" sz="1500" dirty="0"/>
+          </a:p>
+        </p:txBody>
+      </p:sp>
+      <p:sp>
+        <p:nvSpPr>
+          <p:cNvPr id="6" name="Text 4"/>
+          <p:cNvSpPr/>
+          <p:nvPr/>
+        </p:nvSpPr>
+        <p:spPr>
+          <a:xfrm>
+            <a:off x="6501384" y="1984248"/>
+            <a:ext cx="4846320" cy="274320"/>
+          </a:xfrm>
+          <a:prstGeom prst="rect">
+            <a:avLst/>
+          </a:prstGeom>
+          <a:noFill/>
+          <a:ln/>
+        </p:spPr>
+        <p:txBody>
+          <a:bodyPr wrap="square" rtlCol="0" anchor="ctr"/>
+          <a:lstStyle/>
+          <a:p>
+            <a:pPr algn="r" indent="0" marL="0">
+              <a:buNone/>
+            </a:pPr>
+            <a:r>
+              <a:rPr lang="en-US" sz="1100" dirty="0">
+                <a:solidFill>
+                  <a:srgbClr val="5B6B85"/>
+                </a:solidFill>
+                <a:latin typeface="Calibri" pitchFamily="34" charset="0"/>
+                <a:ea typeface="Calibri" pitchFamily="34" charset="-122"/>
+                <a:cs typeface="Calibri" pitchFamily="34" charset="-120"/>
+              </a:rPr>
+              <a:t>Mighty  ·  release 9.18  ·  SG  ·  5 modules</a:t>
+            </a:r>
+            <a:endParaRPr lang="en-US" sz="1100" dirty="0"/>
+          </a:p>
+        </p:txBody>
+      </p:sp>
+      <p:sp>
+        <p:nvSpPr>
+          <p:cNvPr id="7" name="Shape 5"/>
+          <p:cNvSpPr/>
+          <p:nvPr/>
+        </p:nvSpPr>
+        <p:spPr>
+          <a:xfrm>
+            <a:off x="877824" y="2377440"/>
+            <a:ext cx="1417320" cy="658368"/>
           </a:xfrm>
           <a:prstGeom prst="roundRect">
             <a:avLst>
-              <a:gd name="adj" fmla="val 50000"/>
+              <a:gd name="adj" fmla="val 8333"/>
             </a:avLst>
           </a:prstGeom>
           <a:solidFill>
-            <a:srgbClr val="DCFCE7"/>
+            <a:srgbClr val="F5F8FD"/>
           </a:solidFill>
           <a:ln/>
         </p:spPr>
       </p:sp>
       <p:sp>
         <p:nvSpPr>
-          <p:cNvPr id="6" name="Text 4"/>
-          <p:cNvSpPr/>
-          <p:nvPr/>
-        </p:nvSpPr>
-        <p:spPr>
-          <a:xfrm>
-            <a:off x="841248" y="2331720"/>
-            <a:ext cx="800100" cy="384048"/>
+          <p:cNvPr id="8" name="Text 6"/>
+          <p:cNvSpPr/>
+          <p:nvPr/>
+        </p:nvSpPr>
+        <p:spPr>
+          <a:xfrm>
+            <a:off x="1024128" y="2432304"/>
+            <a:ext cx="1188720" cy="384048"/>
           </a:xfrm>
           <a:prstGeom prst="rect">
             <a:avLst/>
@@ -5784,50 +6226,50 @@
           <a:bodyPr wrap="square" rtlCol="0" anchor="ctr"/>
           <a:lstStyle/>
           <a:p>
-            <a:pPr algn="ctr" indent="0" marL="0">
-              <a:buNone/>
-            </a:pPr>
-            <a:r>
-              <a:rPr lang="en-US" sz="1300" b="1" dirty="0">
-                <a:solidFill>
-                  <a:srgbClr val="16A34A"/>
-                </a:solidFill>
-                <a:latin typeface="Calibri" pitchFamily="34" charset="0"/>
-                <a:ea typeface="Calibri" pitchFamily="34" charset="-122"/>
-                <a:cs typeface="Calibri" pitchFamily="34" charset="-120"/>
-              </a:rPr>
-              <a:t>Ready</a:t>
-            </a:r>
-            <a:endParaRPr lang="en-US" sz="1300" dirty="0"/>
-          </a:p>
-        </p:txBody>
-      </p:sp>
-      <p:sp>
-        <p:nvSpPr>
-          <p:cNvPr id="7" name="Text 5"/>
-          <p:cNvSpPr/>
-          <p:nvPr/>
-        </p:nvSpPr>
-        <p:spPr>
-          <a:xfrm>
-            <a:off x="841248" y="2880360"/>
-            <a:ext cx="2953512" cy="640080"/>
-          </a:xfrm>
-          <a:prstGeom prst="rect">
-            <a:avLst/>
-          </a:prstGeom>
-          <a:noFill/>
-          <a:ln/>
-        </p:spPr>
-        <p:txBody>
-          <a:bodyPr wrap="square" rtlCol="0" anchor="t"/>
-          <a:lstStyle/>
-          <a:p>
             <a:pPr indent="0" marL="0">
               <a:buNone/>
             </a:pPr>
             <a:r>
-              <a:rPr lang="en-US" sz="1350" dirty="0">
+              <a:rPr lang="en-US" sz="1900" b="1" dirty="0">
+                <a:solidFill>
+                  <a:srgbClr val="64748B"/>
+                </a:solidFill>
+                <a:latin typeface="Calibri" pitchFamily="34" charset="0"/>
+                <a:ea typeface="Calibri" pitchFamily="34" charset="-122"/>
+                <a:cs typeface="Calibri" pitchFamily="34" charset="-120"/>
+              </a:rPr>
+              <a:t>62</a:t>
+            </a:r>
+            <a:endParaRPr lang="en-US" sz="1900" dirty="0"/>
+          </a:p>
+        </p:txBody>
+      </p:sp>
+      <p:sp>
+        <p:nvSpPr>
+          <p:cNvPr id="9" name="Text 7"/>
+          <p:cNvSpPr/>
+          <p:nvPr/>
+        </p:nvSpPr>
+        <p:spPr>
+          <a:xfrm>
+            <a:off x="1024128" y="2779776"/>
+            <a:ext cx="1234440" cy="219456"/>
+          </a:xfrm>
+          <a:prstGeom prst="rect">
+            <a:avLst/>
+          </a:prstGeom>
+          <a:noFill/>
+          <a:ln/>
+        </p:spPr>
+        <p:txBody>
+          <a:bodyPr wrap="square" rtlCol="0" anchor="ctr"/>
+          <a:lstStyle/>
+          <a:p>
+            <a:pPr indent="0" marL="0">
+              <a:buNone/>
+            </a:pPr>
+            <a:r>
+              <a:rPr lang="en-US" sz="950" dirty="0">
                 <a:solidFill>
                   <a:srgbClr val="5B6B85"/>
                 </a:solidFill>
@@ -5835,71 +6277,144 @@
                 <a:ea typeface="Calibri" pitchFamily="34" charset="-122"/>
                 <a:cs typeface="Calibri" pitchFamily="34" charset="-120"/>
               </a:rPr>
-              <a:t>Fully tested, no issues</a:t>
-            </a:r>
-            <a:endParaRPr lang="en-US" sz="1350" dirty="0"/>
-          </a:p>
-        </p:txBody>
-      </p:sp>
-      <p:sp>
-        <p:nvSpPr>
-          <p:cNvPr id="8" name="Shape 6"/>
-          <p:cNvSpPr/>
-          <p:nvPr/>
-        </p:nvSpPr>
-        <p:spPr>
-          <a:xfrm>
-            <a:off x="4343400" y="2103120"/>
-            <a:ext cx="3502152" cy="1554480"/>
+              <a:t>Total APIs</a:t>
+            </a:r>
+            <a:endParaRPr lang="en-US" sz="950" dirty="0"/>
+          </a:p>
+        </p:txBody>
+      </p:sp>
+      <p:sp>
+        <p:nvSpPr>
+          <p:cNvPr id="10" name="Shape 8"/>
+          <p:cNvSpPr/>
+          <p:nvPr/>
+        </p:nvSpPr>
+        <p:spPr>
+          <a:xfrm>
+            <a:off x="2450592" y="2377440"/>
+            <a:ext cx="1417320" cy="658368"/>
           </a:xfrm>
           <a:prstGeom prst="roundRect">
             <a:avLst>
-              <a:gd name="adj" fmla="val 5294"/>
+              <a:gd name="adj" fmla="val 8333"/>
             </a:avLst>
           </a:prstGeom>
           <a:solidFill>
-            <a:srgbClr val="FFFFFF"/>
+            <a:srgbClr val="F5F8FD"/>
           </a:solidFill>
-          <a:ln w="12700">
-            <a:solidFill>
-              <a:srgbClr val="D7E0EE"/>
-            </a:solidFill>
-            <a:prstDash val="solid"/>
-          </a:ln>
-        </p:spPr>
-      </p:sp>
-      <p:sp>
-        <p:nvSpPr>
-          <p:cNvPr id="9" name="Shape 7"/>
-          <p:cNvSpPr/>
-          <p:nvPr/>
-        </p:nvSpPr>
-        <p:spPr>
-          <a:xfrm>
-            <a:off x="4617720" y="2331720"/>
-            <a:ext cx="896112" cy="384048"/>
+          <a:ln/>
+        </p:spPr>
+      </p:sp>
+      <p:sp>
+        <p:nvSpPr>
+          <p:cNvPr id="11" name="Text 9"/>
+          <p:cNvSpPr/>
+          <p:nvPr/>
+        </p:nvSpPr>
+        <p:spPr>
+          <a:xfrm>
+            <a:off x="2596896" y="2432304"/>
+            <a:ext cx="1188720" cy="384048"/>
+          </a:xfrm>
+          <a:prstGeom prst="rect">
+            <a:avLst/>
+          </a:prstGeom>
+          <a:noFill/>
+          <a:ln/>
+        </p:spPr>
+        <p:txBody>
+          <a:bodyPr wrap="square" rtlCol="0" anchor="ctr"/>
+          <a:lstStyle/>
+          <a:p>
+            <a:pPr indent="0" marL="0">
+              <a:buNone/>
+            </a:pPr>
+            <a:r>
+              <a:rPr lang="en-US" sz="1900" b="1" dirty="0">
+                <a:solidFill>
+                  <a:srgbClr val="16A34A"/>
+                </a:solidFill>
+                <a:latin typeface="Calibri" pitchFamily="34" charset="0"/>
+                <a:ea typeface="Calibri" pitchFamily="34" charset="-122"/>
+                <a:cs typeface="Calibri" pitchFamily="34" charset="-120"/>
+              </a:rPr>
+              <a:t>41</a:t>
+            </a:r>
+            <a:endParaRPr lang="en-US" sz="1900" dirty="0"/>
+          </a:p>
+        </p:txBody>
+      </p:sp>
+      <p:sp>
+        <p:nvSpPr>
+          <p:cNvPr id="12" name="Text 10"/>
+          <p:cNvSpPr/>
+          <p:nvPr/>
+        </p:nvSpPr>
+        <p:spPr>
+          <a:xfrm>
+            <a:off x="2596896" y="2779776"/>
+            <a:ext cx="1234440" cy="219456"/>
+          </a:xfrm>
+          <a:prstGeom prst="rect">
+            <a:avLst/>
+          </a:prstGeom>
+          <a:noFill/>
+          <a:ln/>
+        </p:spPr>
+        <p:txBody>
+          <a:bodyPr wrap="square" rtlCol="0" anchor="ctr"/>
+          <a:lstStyle/>
+          <a:p>
+            <a:pPr indent="0" marL="0">
+              <a:buNone/>
+            </a:pPr>
+            <a:r>
+              <a:rPr lang="en-US" sz="950" dirty="0">
+                <a:solidFill>
+                  <a:srgbClr val="5B6B85"/>
+                </a:solidFill>
+                <a:latin typeface="Calibri" pitchFamily="34" charset="0"/>
+                <a:ea typeface="Calibri" pitchFamily="34" charset="-122"/>
+                <a:cs typeface="Calibri" pitchFamily="34" charset="-120"/>
+              </a:rPr>
+              <a:t>Passed</a:t>
+            </a:r>
+            <a:endParaRPr lang="en-US" sz="950" dirty="0"/>
+          </a:p>
+        </p:txBody>
+      </p:sp>
+      <p:sp>
+        <p:nvSpPr>
+          <p:cNvPr id="13" name="Shape 11"/>
+          <p:cNvSpPr/>
+          <p:nvPr/>
+        </p:nvSpPr>
+        <p:spPr>
+          <a:xfrm>
+            <a:off x="4023360" y="2377440"/>
+            <a:ext cx="1417320" cy="658368"/>
           </a:xfrm>
           <a:prstGeom prst="roundRect">
             <a:avLst>
-              <a:gd name="adj" fmla="val 50000"/>
+              <a:gd name="adj" fmla="val 8333"/>
             </a:avLst>
           </a:prstGeom>
           <a:solidFill>
-            <a:srgbClr val="FEF3C7"/>
+            <a:srgbClr val="F5F8FD"/>
           </a:solidFill>
           <a:ln/>
         </p:spPr>
       </p:sp>
       <p:sp>
         <p:nvSpPr>
-          <p:cNvPr id="10" name="Text 8"/>
-          <p:cNvSpPr/>
-          <p:nvPr/>
-        </p:nvSpPr>
-        <p:spPr>
-          <a:xfrm>
-            <a:off x="4617720" y="2331720"/>
-            <a:ext cx="896112" cy="384048"/>
+          <p:cNvPr id="14" name="Text 12"/>
+          <p:cNvSpPr/>
+          <p:nvPr/>
+        </p:nvSpPr>
+        <p:spPr>
+          <a:xfrm>
+            <a:off x="4169664" y="2432304"/>
+            <a:ext cx="1188720" cy="384048"/>
           </a:xfrm>
           <a:prstGeom prst="rect">
             <a:avLst/>
@@ -5911,50 +6426,50 @@
           <a:bodyPr wrap="square" rtlCol="0" anchor="ctr"/>
           <a:lstStyle/>
           <a:p>
-            <a:pPr algn="ctr" indent="0" marL="0">
-              <a:buNone/>
-            </a:pPr>
-            <a:r>
-              <a:rPr lang="en-US" sz="1300" b="1" dirty="0">
-                <a:solidFill>
-                  <a:srgbClr val="B45309"/>
-                </a:solidFill>
-                <a:latin typeface="Calibri" pitchFamily="34" charset="0"/>
-                <a:ea typeface="Calibri" pitchFamily="34" charset="-122"/>
-                <a:cs typeface="Calibri" pitchFamily="34" charset="-120"/>
-              </a:rPr>
-              <a:t>Review</a:t>
-            </a:r>
-            <a:endParaRPr lang="en-US" sz="1300" dirty="0"/>
-          </a:p>
-        </p:txBody>
-      </p:sp>
-      <p:sp>
-        <p:nvSpPr>
-          <p:cNvPr id="11" name="Text 9"/>
-          <p:cNvSpPr/>
-          <p:nvPr/>
-        </p:nvSpPr>
-        <p:spPr>
-          <a:xfrm>
-            <a:off x="4617720" y="2880360"/>
-            <a:ext cx="2953512" cy="640080"/>
-          </a:xfrm>
-          <a:prstGeom prst="rect">
-            <a:avLst/>
-          </a:prstGeom>
-          <a:noFill/>
-          <a:ln/>
-        </p:spPr>
-        <p:txBody>
-          <a:bodyPr wrap="square" rtlCol="0" anchor="t"/>
-          <a:lstStyle/>
-          <a:p>
             <a:pPr indent="0" marL="0">
               <a:buNone/>
             </a:pPr>
             <a:r>
-              <a:rPr lang="en-US" sz="1350" dirty="0">
+              <a:rPr lang="en-US" sz="1900" b="1" dirty="0">
+                <a:solidFill>
+                  <a:srgbClr val="B91C1C"/>
+                </a:solidFill>
+                <a:latin typeface="Calibri" pitchFamily="34" charset="0"/>
+                <a:ea typeface="Calibri" pitchFamily="34" charset="-122"/>
+                <a:cs typeface="Calibri" pitchFamily="34" charset="-120"/>
+              </a:rPr>
+              <a:t>21</a:t>
+            </a:r>
+            <a:endParaRPr lang="en-US" sz="1900" dirty="0"/>
+          </a:p>
+        </p:txBody>
+      </p:sp>
+      <p:sp>
+        <p:nvSpPr>
+          <p:cNvPr id="15" name="Text 13"/>
+          <p:cNvSpPr/>
+          <p:nvPr/>
+        </p:nvSpPr>
+        <p:spPr>
+          <a:xfrm>
+            <a:off x="4169664" y="2779776"/>
+            <a:ext cx="1234440" cy="219456"/>
+          </a:xfrm>
+          <a:prstGeom prst="rect">
+            <a:avLst/>
+          </a:prstGeom>
+          <a:noFill/>
+          <a:ln/>
+        </p:spPr>
+        <p:txBody>
+          <a:bodyPr wrap="square" rtlCol="0" anchor="ctr"/>
+          <a:lstStyle/>
+          <a:p>
+            <a:pPr indent="0" marL="0">
+              <a:buNone/>
+            </a:pPr>
+            <a:r>
+              <a:rPr lang="en-US" sz="950" dirty="0">
                 <a:solidFill>
                   <a:srgbClr val="5B6B85"/>
                 </a:solidFill>
@@ -5962,71 +6477,44 @@
                 <a:ea typeface="Calibri" pitchFamily="34" charset="-122"/>
                 <a:cs typeface="Calibri" pitchFamily="34" charset="-120"/>
               </a:rPr>
-              <a:t>Untested APIs to check</a:t>
-            </a:r>
-            <a:endParaRPr lang="en-US" sz="1350" dirty="0"/>
-          </a:p>
-        </p:txBody>
-      </p:sp>
-      <p:sp>
-        <p:nvSpPr>
-          <p:cNvPr id="12" name="Shape 10"/>
-          <p:cNvSpPr/>
-          <p:nvPr/>
-        </p:nvSpPr>
-        <p:spPr>
-          <a:xfrm>
-            <a:off x="8119872" y="2103120"/>
-            <a:ext cx="3502152" cy="1554480"/>
+              <a:t>Not tested</a:t>
+            </a:r>
+            <a:endParaRPr lang="en-US" sz="950" dirty="0"/>
+          </a:p>
+        </p:txBody>
+      </p:sp>
+      <p:sp>
+        <p:nvSpPr>
+          <p:cNvPr id="16" name="Shape 14"/>
+          <p:cNvSpPr/>
+          <p:nvPr/>
+        </p:nvSpPr>
+        <p:spPr>
+          <a:xfrm>
+            <a:off x="5596128" y="2377440"/>
+            <a:ext cx="1417320" cy="658368"/>
           </a:xfrm>
           <a:prstGeom prst="roundRect">
             <a:avLst>
-              <a:gd name="adj" fmla="val 5294"/>
+              <a:gd name="adj" fmla="val 8333"/>
             </a:avLst>
           </a:prstGeom>
           <a:solidFill>
-            <a:srgbClr val="FFFFFF"/>
+            <a:srgbClr val="F5F8FD"/>
           </a:solidFill>
-          <a:ln w="12700">
-            <a:solidFill>
-              <a:srgbClr val="D7E0EE"/>
-            </a:solidFill>
-            <a:prstDash val="solid"/>
-          </a:ln>
-        </p:spPr>
-      </p:sp>
-      <p:sp>
-        <p:nvSpPr>
-          <p:cNvPr id="13" name="Shape 11"/>
-          <p:cNvSpPr/>
-          <p:nvPr/>
-        </p:nvSpPr>
-        <p:spPr>
-          <a:xfrm>
-            <a:off x="8394192" y="2331720"/>
-            <a:ext cx="992124" cy="384048"/>
-          </a:xfrm>
-          <a:prstGeom prst="roundRect">
-            <a:avLst>
-              <a:gd name="adj" fmla="val 50000"/>
-            </a:avLst>
-          </a:prstGeom>
-          <a:solidFill>
-            <a:srgbClr val="FEE2E2"/>
-          </a:solidFill>
-          <a:ln/>
-        </p:spPr>
-      </p:sp>
-      <p:sp>
-        <p:nvSpPr>
-          <p:cNvPr id="14" name="Text 12"/>
-          <p:cNvSpPr/>
-          <p:nvPr/>
-        </p:nvSpPr>
-        <p:spPr>
-          <a:xfrm>
-            <a:off x="8394192" y="2331720"/>
-            <a:ext cx="992124" cy="384048"/>
+          <a:ln/>
+        </p:spPr>
+      </p:sp>
+      <p:sp>
+        <p:nvSpPr>
+          <p:cNvPr id="17" name="Text 15"/>
+          <p:cNvSpPr/>
+          <p:nvPr/>
+        </p:nvSpPr>
+        <p:spPr>
+          <a:xfrm>
+            <a:off x="5742432" y="2432304"/>
+            <a:ext cx="1188720" cy="384048"/>
           </a:xfrm>
           <a:prstGeom prst="rect">
             <a:avLst/>
@@ -6038,50 +6526,50 @@
           <a:bodyPr wrap="square" rtlCol="0" anchor="ctr"/>
           <a:lstStyle/>
           <a:p>
-            <a:pPr algn="ctr" indent="0" marL="0">
-              <a:buNone/>
-            </a:pPr>
-            <a:r>
-              <a:rPr lang="en-US" sz="1300" b="1" dirty="0">
-                <a:solidFill>
-                  <a:srgbClr val="B91C1C"/>
-                </a:solidFill>
-                <a:latin typeface="Calibri" pitchFamily="34" charset="0"/>
-                <a:ea typeface="Calibri" pitchFamily="34" charset="-122"/>
-                <a:cs typeface="Calibri" pitchFamily="34" charset="-120"/>
-              </a:rPr>
-              <a:t>At risk</a:t>
-            </a:r>
-            <a:endParaRPr lang="en-US" sz="1300" dirty="0"/>
-          </a:p>
-        </p:txBody>
-      </p:sp>
-      <p:sp>
-        <p:nvSpPr>
-          <p:cNvPr id="15" name="Text 13"/>
-          <p:cNvSpPr/>
-          <p:nvPr/>
-        </p:nvSpPr>
-        <p:spPr>
-          <a:xfrm>
-            <a:off x="8394192" y="2880360"/>
-            <a:ext cx="2953512" cy="640080"/>
-          </a:xfrm>
-          <a:prstGeom prst="rect">
-            <a:avLst/>
-          </a:prstGeom>
-          <a:noFill/>
-          <a:ln/>
-        </p:spPr>
-        <p:txBody>
-          <a:bodyPr wrap="square" rtlCol="0" anchor="t"/>
-          <a:lstStyle/>
-          <a:p>
             <a:pPr indent="0" marL="0">
               <a:buNone/>
             </a:pPr>
             <a:r>
-              <a:rPr lang="en-US" sz="1350" dirty="0">
+              <a:rPr lang="en-US" sz="1900" b="1" dirty="0">
+                <a:solidFill>
+                  <a:srgbClr val="B45309"/>
+                </a:solidFill>
+                <a:latin typeface="Calibri" pitchFamily="34" charset="0"/>
+                <a:ea typeface="Calibri" pitchFamily="34" charset="-122"/>
+                <a:cs typeface="Calibri" pitchFamily="34" charset="-120"/>
+              </a:rPr>
+              <a:t>2</a:t>
+            </a:r>
+            <a:endParaRPr lang="en-US" sz="1900" dirty="0"/>
+          </a:p>
+        </p:txBody>
+      </p:sp>
+      <p:sp>
+        <p:nvSpPr>
+          <p:cNvPr id="18" name="Text 16"/>
+          <p:cNvSpPr/>
+          <p:nvPr/>
+        </p:nvSpPr>
+        <p:spPr>
+          <a:xfrm>
+            <a:off x="5742432" y="2779776"/>
+            <a:ext cx="1234440" cy="219456"/>
+          </a:xfrm>
+          <a:prstGeom prst="rect">
+            <a:avLst/>
+          </a:prstGeom>
+          <a:noFill/>
+          <a:ln/>
+        </p:spPr>
+        <p:txBody>
+          <a:bodyPr wrap="square" rtlCol="0" anchor="ctr"/>
+          <a:lstStyle/>
+          <a:p>
+            <a:pPr indent="0" marL="0">
+              <a:buNone/>
+            </a:pPr>
+            <a:r>
+              <a:rPr lang="en-US" sz="950" dirty="0">
                 <a:solidFill>
                   <a:srgbClr val="5B6B85"/>
                 </a:solidFill>
@@ -6089,22 +6577,2441 @@
                 <a:ea typeface="Calibri" pitchFamily="34" charset="-122"/>
                 <a:cs typeface="Calibri" pitchFamily="34" charset="-120"/>
               </a:rPr>
-              <a:t>Has failures or gaps</a:t>
-            </a:r>
-            <a:endParaRPr lang="en-US" sz="1350" dirty="0"/>
-          </a:p>
-        </p:txBody>
-      </p:sp>
-      <p:sp>
-        <p:nvSpPr>
-          <p:cNvPr id="16" name="Text 14"/>
-          <p:cNvSpPr/>
-          <p:nvPr/>
-        </p:nvSpPr>
-        <p:spPr>
-          <a:xfrm>
-            <a:off x="566928" y="3977640"/>
-            <a:ext cx="10972800" cy="457200"/>
+              <a:t>Issues</a:t>
+            </a:r>
+            <a:endParaRPr lang="en-US" sz="950" dirty="0"/>
+          </a:p>
+        </p:txBody>
+      </p:sp>
+      <p:graphicFrame>
+        <p:nvGraphicFramePr>
+          <p:cNvPr id="9" name="Table 0"/>
+          <p:cNvGraphicFramePr>
+            <a:graphicFrameLocks noGrp="1"/>
+          </p:cNvGraphicFramePr>
+          <p:nvPr>
+            <p:extLst>
+              <p:ext uri="{D42A27DB-BD31-4B8C-83A1-F6EECF244321}">
+                <p14:modId xmlns:p14="http://schemas.microsoft.com/office/powerpoint/2010/main" val="1579011935"/>
+              </p:ext>
+            </p:extLst>
+          </p:nvPr>
+        </p:nvGraphicFramePr>
+        <p:xfrm>
+          <a:off x="877824" y="3218688"/>
+          <a:ext cx="10433304" cy="914400"/>
+        </p:xfrm>
+        <a:graphic>
+          <a:graphicData uri="http://schemas.openxmlformats.org/drawingml/2006/table">
+            <a:tbl>
+              <a:tblPr/>
+              <a:tblGrid>
+                <a:gridCol w="3108960"/>
+                <a:gridCol w="1051560"/>
+                <a:gridCol w="1234440"/>
+                <a:gridCol w="1417320"/>
+                <a:gridCol w="1097280"/>
+                <a:gridCol w="2523744"/>
+              </a:tblGrid>
+              <a:tr h="329184">
+                <a:tc>
+                  <a:txBody>
+                    <a:bodyPr/>
+                    <a:lstStyle/>
+                    <a:p>
+                      <a:pPr algn="l" indent="0" marL="0">
+                        <a:buNone/>
+                      </a:pPr>
+                      <a:r>
+                        <a:rPr lang="en-US" sz="1050" b="1" dirty="0">
+                          <a:solidFill>
+                            <a:srgbClr val="475569"/>
+                          </a:solidFill>
+                          <a:latin typeface="Calibri" pitchFamily="34" charset="0"/>
+                          <a:ea typeface="Calibri" pitchFamily="34" charset="-122"/>
+                          <a:cs typeface="Calibri" pitchFamily="34" charset="-120"/>
+                        </a:rPr>
+                        <a:t>Module</a:t>
+                      </a:r>
+                      <a:endParaRPr lang="en-US" sz="1050" dirty="0">
+                        <a:latin typeface="Calibri" charset="0"/>
+                        <a:ea typeface="Calibri" charset="0"/>
+                        <a:cs typeface="Calibri" charset="0"/>
+                      </a:endParaRPr>
+                    </a:p>
+                  </a:txBody>
+                  <a:tcPr marL="91440" marR="91440" marT="45720" marB="45720" anchor="ctr">
+                    <a:lnL w="6350" cap="flat" cmpd="sng" algn="ctr">
+                      <a:solidFill>
+                        <a:srgbClr val="E9EEF5"/>
+                      </a:solidFill>
+                      <a:prstDash val="solid"/>
+                      <a:round/>
+                      <a:headEnd type="none" w="med" len="med"/>
+                      <a:tailEnd type="none" w="med" len="med"/>
+                    </a:lnL>
+                    <a:lnR w="6350" cap="flat" cmpd="sng" algn="ctr">
+                      <a:solidFill>
+                        <a:srgbClr val="E9EEF5"/>
+                      </a:solidFill>
+                      <a:prstDash val="solid"/>
+                      <a:round/>
+                      <a:headEnd type="none" w="med" len="med"/>
+                      <a:tailEnd type="none" w="med" len="med"/>
+                    </a:lnR>
+                    <a:lnT w="6350" cap="flat" cmpd="sng" algn="ctr">
+                      <a:solidFill>
+                        <a:srgbClr val="E9EEF5"/>
+                      </a:solidFill>
+                      <a:prstDash val="solid"/>
+                      <a:round/>
+                      <a:headEnd type="none" w="med" len="med"/>
+                      <a:tailEnd type="none" w="med" len="med"/>
+                    </a:lnT>
+                    <a:lnB w="6350" cap="flat" cmpd="sng" algn="ctr">
+                      <a:solidFill>
+                        <a:srgbClr val="E9EEF5"/>
+                      </a:solidFill>
+                      <a:prstDash val="solid"/>
+                      <a:round/>
+                      <a:headEnd type="none" w="med" len="med"/>
+                      <a:tailEnd type="none" w="med" len="med"/>
+                    </a:lnB>
+                    <a:solidFill>
+                      <a:srgbClr val="F1F5FB"/>
+                    </a:solidFill>
+                  </a:tcPr>
+                </a:tc>
+                <a:tc>
+                  <a:txBody>
+                    <a:bodyPr/>
+                    <a:lstStyle/>
+                    <a:p>
+                      <a:pPr algn="ctr" indent="0" marL="0">
+                        <a:buNone/>
+                      </a:pPr>
+                      <a:r>
+                        <a:rPr lang="en-US" sz="1050" b="1" dirty="0">
+                          <a:solidFill>
+                            <a:srgbClr val="475569"/>
+                          </a:solidFill>
+                          <a:latin typeface="Calibri" pitchFamily="34" charset="0"/>
+                          <a:ea typeface="Calibri" pitchFamily="34" charset="-122"/>
+                          <a:cs typeface="Calibri" pitchFamily="34" charset="-120"/>
+                        </a:rPr>
+                        <a:t>APIs</a:t>
+                      </a:r>
+                      <a:endParaRPr lang="en-US" sz="1050" dirty="0">
+                        <a:latin typeface="Calibri" charset="0"/>
+                        <a:ea typeface="Calibri" charset="0"/>
+                        <a:cs typeface="Calibri" charset="0"/>
+                      </a:endParaRPr>
+                    </a:p>
+                  </a:txBody>
+                  <a:tcPr marL="91440" marR="91440" marT="45720" marB="45720" anchor="ctr">
+                    <a:lnL w="6350" cap="flat" cmpd="sng" algn="ctr">
+                      <a:solidFill>
+                        <a:srgbClr val="E9EEF5"/>
+                      </a:solidFill>
+                      <a:prstDash val="solid"/>
+                      <a:round/>
+                      <a:headEnd type="none" w="med" len="med"/>
+                      <a:tailEnd type="none" w="med" len="med"/>
+                    </a:lnL>
+                    <a:lnR w="6350" cap="flat" cmpd="sng" algn="ctr">
+                      <a:solidFill>
+                        <a:srgbClr val="E9EEF5"/>
+                      </a:solidFill>
+                      <a:prstDash val="solid"/>
+                      <a:round/>
+                      <a:headEnd type="none" w="med" len="med"/>
+                      <a:tailEnd type="none" w="med" len="med"/>
+                    </a:lnR>
+                    <a:lnT w="6350" cap="flat" cmpd="sng" algn="ctr">
+                      <a:solidFill>
+                        <a:srgbClr val="E9EEF5"/>
+                      </a:solidFill>
+                      <a:prstDash val="solid"/>
+                      <a:round/>
+                      <a:headEnd type="none" w="med" len="med"/>
+                      <a:tailEnd type="none" w="med" len="med"/>
+                    </a:lnT>
+                    <a:lnB w="6350" cap="flat" cmpd="sng" algn="ctr">
+                      <a:solidFill>
+                        <a:srgbClr val="E9EEF5"/>
+                      </a:solidFill>
+                      <a:prstDash val="solid"/>
+                      <a:round/>
+                      <a:headEnd type="none" w="med" len="med"/>
+                      <a:tailEnd type="none" w="med" len="med"/>
+                    </a:lnB>
+                    <a:solidFill>
+                      <a:srgbClr val="F1F5FB"/>
+                    </a:solidFill>
+                  </a:tcPr>
+                </a:tc>
+                <a:tc>
+                  <a:txBody>
+                    <a:bodyPr/>
+                    <a:lstStyle/>
+                    <a:p>
+                      <a:pPr algn="ctr" indent="0" marL="0">
+                        <a:buNone/>
+                      </a:pPr>
+                      <a:r>
+                        <a:rPr lang="en-US" sz="1050" b="1" dirty="0">
+                          <a:solidFill>
+                            <a:srgbClr val="475569"/>
+                          </a:solidFill>
+                          <a:latin typeface="Calibri" pitchFamily="34" charset="0"/>
+                          <a:ea typeface="Calibri" pitchFamily="34" charset="-122"/>
+                          <a:cs typeface="Calibri" pitchFamily="34" charset="-120"/>
+                        </a:rPr>
+                        <a:t>Passed</a:t>
+                      </a:r>
+                      <a:endParaRPr lang="en-US" sz="1050" dirty="0">
+                        <a:latin typeface="Calibri" charset="0"/>
+                        <a:ea typeface="Calibri" charset="0"/>
+                        <a:cs typeface="Calibri" charset="0"/>
+                      </a:endParaRPr>
+                    </a:p>
+                  </a:txBody>
+                  <a:tcPr marL="91440" marR="91440" marT="45720" marB="45720" anchor="ctr">
+                    <a:lnL w="6350" cap="flat" cmpd="sng" algn="ctr">
+                      <a:solidFill>
+                        <a:srgbClr val="E9EEF5"/>
+                      </a:solidFill>
+                      <a:prstDash val="solid"/>
+                      <a:round/>
+                      <a:headEnd type="none" w="med" len="med"/>
+                      <a:tailEnd type="none" w="med" len="med"/>
+                    </a:lnL>
+                    <a:lnR w="6350" cap="flat" cmpd="sng" algn="ctr">
+                      <a:solidFill>
+                        <a:srgbClr val="E9EEF5"/>
+                      </a:solidFill>
+                      <a:prstDash val="solid"/>
+                      <a:round/>
+                      <a:headEnd type="none" w="med" len="med"/>
+                      <a:tailEnd type="none" w="med" len="med"/>
+                    </a:lnR>
+                    <a:lnT w="6350" cap="flat" cmpd="sng" algn="ctr">
+                      <a:solidFill>
+                        <a:srgbClr val="E9EEF5"/>
+                      </a:solidFill>
+                      <a:prstDash val="solid"/>
+                      <a:round/>
+                      <a:headEnd type="none" w="med" len="med"/>
+                      <a:tailEnd type="none" w="med" len="med"/>
+                    </a:lnT>
+                    <a:lnB w="6350" cap="flat" cmpd="sng" algn="ctr">
+                      <a:solidFill>
+                        <a:srgbClr val="E9EEF5"/>
+                      </a:solidFill>
+                      <a:prstDash val="solid"/>
+                      <a:round/>
+                      <a:headEnd type="none" w="med" len="med"/>
+                      <a:tailEnd type="none" w="med" len="med"/>
+                    </a:lnB>
+                    <a:solidFill>
+                      <a:srgbClr val="F1F5FB"/>
+                    </a:solidFill>
+                  </a:tcPr>
+                </a:tc>
+                <a:tc>
+                  <a:txBody>
+                    <a:bodyPr/>
+                    <a:lstStyle/>
+                    <a:p>
+                      <a:pPr algn="ctr" indent="0" marL="0">
+                        <a:buNone/>
+                      </a:pPr>
+                      <a:r>
+                        <a:rPr lang="en-US" sz="1050" b="1" dirty="0">
+                          <a:solidFill>
+                            <a:srgbClr val="475569"/>
+                          </a:solidFill>
+                          <a:latin typeface="Calibri" pitchFamily="34" charset="0"/>
+                          <a:ea typeface="Calibri" pitchFamily="34" charset="-122"/>
+                          <a:cs typeface="Calibri" pitchFamily="34" charset="-120"/>
+                        </a:rPr>
+                        <a:t>Not tested</a:t>
+                      </a:r>
+                      <a:endParaRPr lang="en-US" sz="1050" dirty="0">
+                        <a:latin typeface="Calibri" charset="0"/>
+                        <a:ea typeface="Calibri" charset="0"/>
+                        <a:cs typeface="Calibri" charset="0"/>
+                      </a:endParaRPr>
+                    </a:p>
+                  </a:txBody>
+                  <a:tcPr marL="91440" marR="91440" marT="45720" marB="45720" anchor="ctr">
+                    <a:lnL w="6350" cap="flat" cmpd="sng" algn="ctr">
+                      <a:solidFill>
+                        <a:srgbClr val="E9EEF5"/>
+                      </a:solidFill>
+                      <a:prstDash val="solid"/>
+                      <a:round/>
+                      <a:headEnd type="none" w="med" len="med"/>
+                      <a:tailEnd type="none" w="med" len="med"/>
+                    </a:lnL>
+                    <a:lnR w="6350" cap="flat" cmpd="sng" algn="ctr">
+                      <a:solidFill>
+                        <a:srgbClr val="E9EEF5"/>
+                      </a:solidFill>
+                      <a:prstDash val="solid"/>
+                      <a:round/>
+                      <a:headEnd type="none" w="med" len="med"/>
+                      <a:tailEnd type="none" w="med" len="med"/>
+                    </a:lnR>
+                    <a:lnT w="6350" cap="flat" cmpd="sng" algn="ctr">
+                      <a:solidFill>
+                        <a:srgbClr val="E9EEF5"/>
+                      </a:solidFill>
+                      <a:prstDash val="solid"/>
+                      <a:round/>
+                      <a:headEnd type="none" w="med" len="med"/>
+                      <a:tailEnd type="none" w="med" len="med"/>
+                    </a:lnT>
+                    <a:lnB w="6350" cap="flat" cmpd="sng" algn="ctr">
+                      <a:solidFill>
+                        <a:srgbClr val="E9EEF5"/>
+                      </a:solidFill>
+                      <a:prstDash val="solid"/>
+                      <a:round/>
+                      <a:headEnd type="none" w="med" len="med"/>
+                      <a:tailEnd type="none" w="med" len="med"/>
+                    </a:lnB>
+                    <a:solidFill>
+                      <a:srgbClr val="F1F5FB"/>
+                    </a:solidFill>
+                  </a:tcPr>
+                </a:tc>
+                <a:tc>
+                  <a:txBody>
+                    <a:bodyPr/>
+                    <a:lstStyle/>
+                    <a:p>
+                      <a:pPr algn="ctr" indent="0" marL="0">
+                        <a:buNone/>
+                      </a:pPr>
+                      <a:r>
+                        <a:rPr lang="en-US" sz="1050" b="1" dirty="0">
+                          <a:solidFill>
+                            <a:srgbClr val="475569"/>
+                          </a:solidFill>
+                          <a:latin typeface="Calibri" pitchFamily="34" charset="0"/>
+                          <a:ea typeface="Calibri" pitchFamily="34" charset="-122"/>
+                          <a:cs typeface="Calibri" pitchFamily="34" charset="-120"/>
+                        </a:rPr>
+                        <a:t>Issues</a:t>
+                      </a:r>
+                      <a:endParaRPr lang="en-US" sz="1050" dirty="0">
+                        <a:latin typeface="Calibri" charset="0"/>
+                        <a:ea typeface="Calibri" charset="0"/>
+                        <a:cs typeface="Calibri" charset="0"/>
+                      </a:endParaRPr>
+                    </a:p>
+                  </a:txBody>
+                  <a:tcPr marL="91440" marR="91440" marT="45720" marB="45720" anchor="ctr">
+                    <a:lnL w="6350" cap="flat" cmpd="sng" algn="ctr">
+                      <a:solidFill>
+                        <a:srgbClr val="E9EEF5"/>
+                      </a:solidFill>
+                      <a:prstDash val="solid"/>
+                      <a:round/>
+                      <a:headEnd type="none" w="med" len="med"/>
+                      <a:tailEnd type="none" w="med" len="med"/>
+                    </a:lnL>
+                    <a:lnR w="6350" cap="flat" cmpd="sng" algn="ctr">
+                      <a:solidFill>
+                        <a:srgbClr val="E9EEF5"/>
+                      </a:solidFill>
+                      <a:prstDash val="solid"/>
+                      <a:round/>
+                      <a:headEnd type="none" w="med" len="med"/>
+                      <a:tailEnd type="none" w="med" len="med"/>
+                    </a:lnR>
+                    <a:lnT w="6350" cap="flat" cmpd="sng" algn="ctr">
+                      <a:solidFill>
+                        <a:srgbClr val="E9EEF5"/>
+                      </a:solidFill>
+                      <a:prstDash val="solid"/>
+                      <a:round/>
+                      <a:headEnd type="none" w="med" len="med"/>
+                      <a:tailEnd type="none" w="med" len="med"/>
+                    </a:lnT>
+                    <a:lnB w="6350" cap="flat" cmpd="sng" algn="ctr">
+                      <a:solidFill>
+                        <a:srgbClr val="E9EEF5"/>
+                      </a:solidFill>
+                      <a:prstDash val="solid"/>
+                      <a:round/>
+                      <a:headEnd type="none" w="med" len="med"/>
+                      <a:tailEnd type="none" w="med" len="med"/>
+                    </a:lnB>
+                    <a:solidFill>
+                      <a:srgbClr val="F1F5FB"/>
+                    </a:solidFill>
+                  </a:tcPr>
+                </a:tc>
+                <a:tc>
+                  <a:txBody>
+                    <a:bodyPr/>
+                    <a:lstStyle/>
+                    <a:p>
+                      <a:pPr algn="ctr" indent="0" marL="0">
+                        <a:buNone/>
+                      </a:pPr>
+                      <a:r>
+                        <a:rPr lang="en-US" sz="1050" b="1" dirty="0">
+                          <a:solidFill>
+                            <a:srgbClr val="475569"/>
+                          </a:solidFill>
+                          <a:latin typeface="Calibri" pitchFamily="34" charset="0"/>
+                          <a:ea typeface="Calibri" pitchFamily="34" charset="-122"/>
+                          <a:cs typeface="Calibri" pitchFamily="34" charset="-120"/>
+                        </a:rPr>
+                        <a:t>Status</a:t>
+                      </a:r>
+                      <a:endParaRPr lang="en-US" sz="1050" dirty="0">
+                        <a:latin typeface="Calibri" charset="0"/>
+                        <a:ea typeface="Calibri" charset="0"/>
+                        <a:cs typeface="Calibri" charset="0"/>
+                      </a:endParaRPr>
+                    </a:p>
+                  </a:txBody>
+                  <a:tcPr marL="91440" marR="91440" marT="45720" marB="45720" anchor="ctr">
+                    <a:lnL w="6350" cap="flat" cmpd="sng" algn="ctr">
+                      <a:solidFill>
+                        <a:srgbClr val="E9EEF5"/>
+                      </a:solidFill>
+                      <a:prstDash val="solid"/>
+                      <a:round/>
+                      <a:headEnd type="none" w="med" len="med"/>
+                      <a:tailEnd type="none" w="med" len="med"/>
+                    </a:lnL>
+                    <a:lnR w="6350" cap="flat" cmpd="sng" algn="ctr">
+                      <a:solidFill>
+                        <a:srgbClr val="E9EEF5"/>
+                      </a:solidFill>
+                      <a:prstDash val="solid"/>
+                      <a:round/>
+                      <a:headEnd type="none" w="med" len="med"/>
+                      <a:tailEnd type="none" w="med" len="med"/>
+                    </a:lnR>
+                    <a:lnT w="6350" cap="flat" cmpd="sng" algn="ctr">
+                      <a:solidFill>
+                        <a:srgbClr val="E9EEF5"/>
+                      </a:solidFill>
+                      <a:prstDash val="solid"/>
+                      <a:round/>
+                      <a:headEnd type="none" w="med" len="med"/>
+                      <a:tailEnd type="none" w="med" len="med"/>
+                    </a:lnT>
+                    <a:lnB w="6350" cap="flat" cmpd="sng" algn="ctr">
+                      <a:solidFill>
+                        <a:srgbClr val="E9EEF5"/>
+                      </a:solidFill>
+                      <a:prstDash val="solid"/>
+                      <a:round/>
+                      <a:headEnd type="none" w="med" len="med"/>
+                      <a:tailEnd type="none" w="med" len="med"/>
+                    </a:lnB>
+                    <a:solidFill>
+                      <a:srgbClr val="F1F5FB"/>
+                    </a:solidFill>
+                  </a:tcPr>
+                </a:tc>
+              </a:tr>
+              <a:tr h="329184">
+                <a:tc>
+                  <a:txBody>
+                    <a:bodyPr/>
+                    <a:lstStyle/>
+                    <a:p>
+                      <a:pPr algn="l" indent="0" marL="0">
+                        <a:buNone/>
+                      </a:pPr>
+                      <a:r>
+                        <a:rPr lang="en-US" sz="1100" dirty="0">
+                          <a:solidFill>
+                            <a:srgbClr val="17233B"/>
+                          </a:solidFill>
+                          <a:latin typeface="Calibri" pitchFamily="34" charset="0"/>
+                          <a:ea typeface="Calibri" pitchFamily="34" charset="-122"/>
+                          <a:cs typeface="Calibri" pitchFamily="34" charset="-120"/>
+                        </a:rPr>
+                        <a:t>wpl-wealth</a:t>
+                      </a:r>
+                      <a:endParaRPr lang="en-US" sz="1100" dirty="0">
+                        <a:latin typeface="Calibri" charset="0"/>
+                        <a:ea typeface="Calibri" charset="0"/>
+                        <a:cs typeface="Calibri" charset="0"/>
+                      </a:endParaRPr>
+                    </a:p>
+                  </a:txBody>
+                  <a:tcPr marL="91440" marR="91440" marT="45720" marB="45720" anchor="ctr">
+                    <a:lnL w="6350" cap="flat" cmpd="sng" algn="ctr">
+                      <a:solidFill>
+                        <a:srgbClr val="E9EEF5"/>
+                      </a:solidFill>
+                      <a:prstDash val="solid"/>
+                      <a:round/>
+                      <a:headEnd type="none" w="med" len="med"/>
+                      <a:tailEnd type="none" w="med" len="med"/>
+                    </a:lnL>
+                    <a:lnR w="6350" cap="flat" cmpd="sng" algn="ctr">
+                      <a:solidFill>
+                        <a:srgbClr val="E9EEF5"/>
+                      </a:solidFill>
+                      <a:prstDash val="solid"/>
+                      <a:round/>
+                      <a:headEnd type="none" w="med" len="med"/>
+                      <a:tailEnd type="none" w="med" len="med"/>
+                    </a:lnR>
+                    <a:lnT w="6350" cap="flat" cmpd="sng" algn="ctr">
+                      <a:solidFill>
+                        <a:srgbClr val="E9EEF5"/>
+                      </a:solidFill>
+                      <a:prstDash val="solid"/>
+                      <a:round/>
+                      <a:headEnd type="none" w="med" len="med"/>
+                      <a:tailEnd type="none" w="med" len="med"/>
+                    </a:lnT>
+                    <a:lnB w="6350" cap="flat" cmpd="sng" algn="ctr">
+                      <a:solidFill>
+                        <a:srgbClr val="E9EEF5"/>
+                      </a:solidFill>
+                      <a:prstDash val="solid"/>
+                      <a:round/>
+                      <a:headEnd type="none" w="med" len="med"/>
+                      <a:tailEnd type="none" w="med" len="med"/>
+                    </a:lnB>
+                  </a:tcPr>
+                </a:tc>
+                <a:tc>
+                  <a:txBody>
+                    <a:bodyPr/>
+                    <a:lstStyle/>
+                    <a:p>
+                      <a:pPr algn="ctr" indent="0" marL="0">
+                        <a:buNone/>
+                      </a:pPr>
+                      <a:r>
+                        <a:rPr lang="en-US" sz="1100" dirty="0">
+                          <a:solidFill>
+                            <a:srgbClr val="17233B"/>
+                          </a:solidFill>
+                          <a:latin typeface="Calibri" pitchFamily="34" charset="0"/>
+                          <a:ea typeface="Calibri" pitchFamily="34" charset="-122"/>
+                          <a:cs typeface="Calibri" pitchFamily="34" charset="-120"/>
+                        </a:rPr>
+                        <a:t>18</a:t>
+                      </a:r>
+                      <a:endParaRPr lang="en-US" sz="1100" dirty="0">
+                        <a:latin typeface="Calibri" charset="0"/>
+                        <a:ea typeface="Calibri" charset="0"/>
+                        <a:cs typeface="Calibri" charset="0"/>
+                      </a:endParaRPr>
+                    </a:p>
+                  </a:txBody>
+                  <a:tcPr marL="91440" marR="91440" marT="45720" marB="45720" anchor="ctr">
+                    <a:lnL w="6350" cap="flat" cmpd="sng" algn="ctr">
+                      <a:solidFill>
+                        <a:srgbClr val="E9EEF5"/>
+                      </a:solidFill>
+                      <a:prstDash val="solid"/>
+                      <a:round/>
+                      <a:headEnd type="none" w="med" len="med"/>
+                      <a:tailEnd type="none" w="med" len="med"/>
+                    </a:lnL>
+                    <a:lnR w="6350" cap="flat" cmpd="sng" algn="ctr">
+                      <a:solidFill>
+                        <a:srgbClr val="E9EEF5"/>
+                      </a:solidFill>
+                      <a:prstDash val="solid"/>
+                      <a:round/>
+                      <a:headEnd type="none" w="med" len="med"/>
+                      <a:tailEnd type="none" w="med" len="med"/>
+                    </a:lnR>
+                    <a:lnT w="6350" cap="flat" cmpd="sng" algn="ctr">
+                      <a:solidFill>
+                        <a:srgbClr val="E9EEF5"/>
+                      </a:solidFill>
+                      <a:prstDash val="solid"/>
+                      <a:round/>
+                      <a:headEnd type="none" w="med" len="med"/>
+                      <a:tailEnd type="none" w="med" len="med"/>
+                    </a:lnT>
+                    <a:lnB w="6350" cap="flat" cmpd="sng" algn="ctr">
+                      <a:solidFill>
+                        <a:srgbClr val="E9EEF5"/>
+                      </a:solidFill>
+                      <a:prstDash val="solid"/>
+                      <a:round/>
+                      <a:headEnd type="none" w="med" len="med"/>
+                      <a:tailEnd type="none" w="med" len="med"/>
+                    </a:lnB>
+                  </a:tcPr>
+                </a:tc>
+                <a:tc>
+                  <a:txBody>
+                    <a:bodyPr/>
+                    <a:lstStyle/>
+                    <a:p>
+                      <a:pPr algn="ctr" indent="0" marL="0">
+                        <a:buNone/>
+                      </a:pPr>
+                      <a:r>
+                        <a:rPr lang="en-US" sz="1100" dirty="0">
+                          <a:solidFill>
+                            <a:srgbClr val="17233B"/>
+                          </a:solidFill>
+                          <a:latin typeface="Calibri" pitchFamily="34" charset="0"/>
+                          <a:ea typeface="Calibri" pitchFamily="34" charset="-122"/>
+                          <a:cs typeface="Calibri" pitchFamily="34" charset="-120"/>
+                        </a:rPr>
+                        <a:t>5</a:t>
+                      </a:r>
+                      <a:endParaRPr lang="en-US" sz="1100" dirty="0">
+                        <a:latin typeface="Calibri" charset="0"/>
+                        <a:ea typeface="Calibri" charset="0"/>
+                        <a:cs typeface="Calibri" charset="0"/>
+                      </a:endParaRPr>
+                    </a:p>
+                  </a:txBody>
+                  <a:tcPr marL="91440" marR="91440" marT="45720" marB="45720" anchor="ctr">
+                    <a:lnL w="6350" cap="flat" cmpd="sng" algn="ctr">
+                      <a:solidFill>
+                        <a:srgbClr val="E9EEF5"/>
+                      </a:solidFill>
+                      <a:prstDash val="solid"/>
+                      <a:round/>
+                      <a:headEnd type="none" w="med" len="med"/>
+                      <a:tailEnd type="none" w="med" len="med"/>
+                    </a:lnL>
+                    <a:lnR w="6350" cap="flat" cmpd="sng" algn="ctr">
+                      <a:solidFill>
+                        <a:srgbClr val="E9EEF5"/>
+                      </a:solidFill>
+                      <a:prstDash val="solid"/>
+                      <a:round/>
+                      <a:headEnd type="none" w="med" len="med"/>
+                      <a:tailEnd type="none" w="med" len="med"/>
+                    </a:lnR>
+                    <a:lnT w="6350" cap="flat" cmpd="sng" algn="ctr">
+                      <a:solidFill>
+                        <a:srgbClr val="E9EEF5"/>
+                      </a:solidFill>
+                      <a:prstDash val="solid"/>
+                      <a:round/>
+                      <a:headEnd type="none" w="med" len="med"/>
+                      <a:tailEnd type="none" w="med" len="med"/>
+                    </a:lnT>
+                    <a:lnB w="6350" cap="flat" cmpd="sng" algn="ctr">
+                      <a:solidFill>
+                        <a:srgbClr val="E9EEF5"/>
+                      </a:solidFill>
+                      <a:prstDash val="solid"/>
+                      <a:round/>
+                      <a:headEnd type="none" w="med" len="med"/>
+                      <a:tailEnd type="none" w="med" len="med"/>
+                    </a:lnB>
+                  </a:tcPr>
+                </a:tc>
+                <a:tc>
+                  <a:txBody>
+                    <a:bodyPr/>
+                    <a:lstStyle/>
+                    <a:p>
+                      <a:pPr algn="ctr" indent="0" marL="0">
+                        <a:buNone/>
+                      </a:pPr>
+                      <a:r>
+                        <a:rPr lang="en-US" sz="1100" dirty="0">
+                          <a:solidFill>
+                            <a:srgbClr val="17233B"/>
+                          </a:solidFill>
+                          <a:latin typeface="Calibri" pitchFamily="34" charset="0"/>
+                          <a:ea typeface="Calibri" pitchFamily="34" charset="-122"/>
+                          <a:cs typeface="Calibri" pitchFamily="34" charset="-120"/>
+                        </a:rPr>
+                        <a:t>13</a:t>
+                      </a:r>
+                      <a:endParaRPr lang="en-US" sz="1100" dirty="0">
+                        <a:latin typeface="Calibri" charset="0"/>
+                        <a:ea typeface="Calibri" charset="0"/>
+                        <a:cs typeface="Calibri" charset="0"/>
+                      </a:endParaRPr>
+                    </a:p>
+                  </a:txBody>
+                  <a:tcPr marL="91440" marR="91440" marT="45720" marB="45720" anchor="ctr">
+                    <a:lnL w="6350" cap="flat" cmpd="sng" algn="ctr">
+                      <a:solidFill>
+                        <a:srgbClr val="E9EEF5"/>
+                      </a:solidFill>
+                      <a:prstDash val="solid"/>
+                      <a:round/>
+                      <a:headEnd type="none" w="med" len="med"/>
+                      <a:tailEnd type="none" w="med" len="med"/>
+                    </a:lnL>
+                    <a:lnR w="6350" cap="flat" cmpd="sng" algn="ctr">
+                      <a:solidFill>
+                        <a:srgbClr val="E9EEF5"/>
+                      </a:solidFill>
+                      <a:prstDash val="solid"/>
+                      <a:round/>
+                      <a:headEnd type="none" w="med" len="med"/>
+                      <a:tailEnd type="none" w="med" len="med"/>
+                    </a:lnR>
+                    <a:lnT w="6350" cap="flat" cmpd="sng" algn="ctr">
+                      <a:solidFill>
+                        <a:srgbClr val="E9EEF5"/>
+                      </a:solidFill>
+                      <a:prstDash val="solid"/>
+                      <a:round/>
+                      <a:headEnd type="none" w="med" len="med"/>
+                      <a:tailEnd type="none" w="med" len="med"/>
+                    </a:lnT>
+                    <a:lnB w="6350" cap="flat" cmpd="sng" algn="ctr">
+                      <a:solidFill>
+                        <a:srgbClr val="E9EEF5"/>
+                      </a:solidFill>
+                      <a:prstDash val="solid"/>
+                      <a:round/>
+                      <a:headEnd type="none" w="med" len="med"/>
+                      <a:tailEnd type="none" w="med" len="med"/>
+                    </a:lnB>
+                  </a:tcPr>
+                </a:tc>
+                <a:tc>
+                  <a:txBody>
+                    <a:bodyPr/>
+                    <a:lstStyle/>
+                    <a:p>
+                      <a:pPr algn="ctr" indent="0" marL="0">
+                        <a:buNone/>
+                      </a:pPr>
+                      <a:r>
+                        <a:rPr lang="en-US" sz="1100" dirty="0">
+                          <a:solidFill>
+                            <a:srgbClr val="17233B"/>
+                          </a:solidFill>
+                          <a:latin typeface="Calibri" pitchFamily="34" charset="0"/>
+                          <a:ea typeface="Calibri" pitchFamily="34" charset="-122"/>
+                          <a:cs typeface="Calibri" pitchFamily="34" charset="-120"/>
+                        </a:rPr>
+                        <a:t>2</a:t>
+                      </a:r>
+                      <a:endParaRPr lang="en-US" sz="1100" dirty="0">
+                        <a:latin typeface="Calibri" charset="0"/>
+                        <a:ea typeface="Calibri" charset="0"/>
+                        <a:cs typeface="Calibri" charset="0"/>
+                      </a:endParaRPr>
+                    </a:p>
+                  </a:txBody>
+                  <a:tcPr marL="91440" marR="91440" marT="45720" marB="45720" anchor="ctr">
+                    <a:lnL w="6350" cap="flat" cmpd="sng" algn="ctr">
+                      <a:solidFill>
+                        <a:srgbClr val="E9EEF5"/>
+                      </a:solidFill>
+                      <a:prstDash val="solid"/>
+                      <a:round/>
+                      <a:headEnd type="none" w="med" len="med"/>
+                      <a:tailEnd type="none" w="med" len="med"/>
+                    </a:lnL>
+                    <a:lnR w="6350" cap="flat" cmpd="sng" algn="ctr">
+                      <a:solidFill>
+                        <a:srgbClr val="E9EEF5"/>
+                      </a:solidFill>
+                      <a:prstDash val="solid"/>
+                      <a:round/>
+                      <a:headEnd type="none" w="med" len="med"/>
+                      <a:tailEnd type="none" w="med" len="med"/>
+                    </a:lnR>
+                    <a:lnT w="6350" cap="flat" cmpd="sng" algn="ctr">
+                      <a:solidFill>
+                        <a:srgbClr val="E9EEF5"/>
+                      </a:solidFill>
+                      <a:prstDash val="solid"/>
+                      <a:round/>
+                      <a:headEnd type="none" w="med" len="med"/>
+                      <a:tailEnd type="none" w="med" len="med"/>
+                    </a:lnT>
+                    <a:lnB w="6350" cap="flat" cmpd="sng" algn="ctr">
+                      <a:solidFill>
+                        <a:srgbClr val="E9EEF5"/>
+                      </a:solidFill>
+                      <a:prstDash val="solid"/>
+                      <a:round/>
+                      <a:headEnd type="none" w="med" len="med"/>
+                      <a:tailEnd type="none" w="med" len="med"/>
+                    </a:lnB>
+                  </a:tcPr>
+                </a:tc>
+                <a:tc>
+                  <a:txBody>
+                    <a:bodyPr/>
+                    <a:lstStyle/>
+                    <a:p>
+                      <a:pPr algn="ctr" indent="0" marL="0">
+                        <a:buNone/>
+                      </a:pPr>
+                      <a:r>
+                        <a:rPr lang="en-US" sz="1050" b="1" dirty="0">
+                          <a:solidFill>
+                            <a:srgbClr val="B91C1C"/>
+                          </a:solidFill>
+                          <a:latin typeface="Calibri" pitchFamily="34" charset="0"/>
+                          <a:ea typeface="Calibri" pitchFamily="34" charset="-122"/>
+                          <a:cs typeface="Calibri" pitchFamily="34" charset="-120"/>
+                        </a:rPr>
+                        <a:t>At risk</a:t>
+                      </a:r>
+                      <a:endParaRPr lang="en-US" sz="1050" dirty="0">
+                        <a:latin typeface="Calibri" charset="0"/>
+                        <a:ea typeface="Calibri" charset="0"/>
+                        <a:cs typeface="Calibri" charset="0"/>
+                      </a:endParaRPr>
+                    </a:p>
+                  </a:txBody>
+                  <a:tcPr marL="91440" marR="91440" marT="45720" marB="45720" anchor="ctr">
+                    <a:lnL w="6350" cap="flat" cmpd="sng" algn="ctr">
+                      <a:solidFill>
+                        <a:srgbClr val="E9EEF5"/>
+                      </a:solidFill>
+                      <a:prstDash val="solid"/>
+                      <a:round/>
+                      <a:headEnd type="none" w="med" len="med"/>
+                      <a:tailEnd type="none" w="med" len="med"/>
+                    </a:lnL>
+                    <a:lnR w="6350" cap="flat" cmpd="sng" algn="ctr">
+                      <a:solidFill>
+                        <a:srgbClr val="E9EEF5"/>
+                      </a:solidFill>
+                      <a:prstDash val="solid"/>
+                      <a:round/>
+                      <a:headEnd type="none" w="med" len="med"/>
+                      <a:tailEnd type="none" w="med" len="med"/>
+                    </a:lnR>
+                    <a:lnT w="6350" cap="flat" cmpd="sng" algn="ctr">
+                      <a:solidFill>
+                        <a:srgbClr val="E9EEF5"/>
+                      </a:solidFill>
+                      <a:prstDash val="solid"/>
+                      <a:round/>
+                      <a:headEnd type="none" w="med" len="med"/>
+                      <a:tailEnd type="none" w="med" len="med"/>
+                    </a:lnT>
+                    <a:lnB w="6350" cap="flat" cmpd="sng" algn="ctr">
+                      <a:solidFill>
+                        <a:srgbClr val="E9EEF5"/>
+                      </a:solidFill>
+                      <a:prstDash val="solid"/>
+                      <a:round/>
+                      <a:headEnd type="none" w="med" len="med"/>
+                      <a:tailEnd type="none" w="med" len="med"/>
+                    </a:lnB>
+                    <a:solidFill>
+                      <a:srgbClr val="FEE2E2"/>
+                    </a:solidFill>
+                  </a:tcPr>
+                </a:tc>
+              </a:tr>
+              <a:tr h="329184">
+                <a:tc>
+                  <a:txBody>
+                    <a:bodyPr/>
+                    <a:lstStyle/>
+                    <a:p>
+                      <a:pPr algn="l" indent="0" marL="0">
+                        <a:buNone/>
+                      </a:pPr>
+                      <a:r>
+                        <a:rPr lang="en-US" sz="1100" dirty="0">
+                          <a:solidFill>
+                            <a:srgbClr val="17233B"/>
+                          </a:solidFill>
+                          <a:latin typeface="Calibri" pitchFamily="34" charset="0"/>
+                          <a:ea typeface="Calibri" pitchFamily="34" charset="-122"/>
+                          <a:cs typeface="Calibri" pitchFamily="34" charset="-120"/>
+                        </a:rPr>
+                        <a:t>mighty</a:t>
+                      </a:r>
+                      <a:endParaRPr lang="en-US" sz="1100" dirty="0">
+                        <a:latin typeface="Calibri" charset="0"/>
+                        <a:ea typeface="Calibri" charset="0"/>
+                        <a:cs typeface="Calibri" charset="0"/>
+                      </a:endParaRPr>
+                    </a:p>
+                  </a:txBody>
+                  <a:tcPr marL="91440" marR="91440" marT="45720" marB="45720" anchor="ctr">
+                    <a:lnL w="6350" cap="flat" cmpd="sng" algn="ctr">
+                      <a:solidFill>
+                        <a:srgbClr val="E9EEF5"/>
+                      </a:solidFill>
+                      <a:prstDash val="solid"/>
+                      <a:round/>
+                      <a:headEnd type="none" w="med" len="med"/>
+                      <a:tailEnd type="none" w="med" len="med"/>
+                    </a:lnL>
+                    <a:lnR w="6350" cap="flat" cmpd="sng" algn="ctr">
+                      <a:solidFill>
+                        <a:srgbClr val="E9EEF5"/>
+                      </a:solidFill>
+                      <a:prstDash val="solid"/>
+                      <a:round/>
+                      <a:headEnd type="none" w="med" len="med"/>
+                      <a:tailEnd type="none" w="med" len="med"/>
+                    </a:lnR>
+                    <a:lnT w="6350" cap="flat" cmpd="sng" algn="ctr">
+                      <a:solidFill>
+                        <a:srgbClr val="E9EEF5"/>
+                      </a:solidFill>
+                      <a:prstDash val="solid"/>
+                      <a:round/>
+                      <a:headEnd type="none" w="med" len="med"/>
+                      <a:tailEnd type="none" w="med" len="med"/>
+                    </a:lnT>
+                    <a:lnB w="6350" cap="flat" cmpd="sng" algn="ctr">
+                      <a:solidFill>
+                        <a:srgbClr val="E9EEF5"/>
+                      </a:solidFill>
+                      <a:prstDash val="solid"/>
+                      <a:round/>
+                      <a:headEnd type="none" w="med" len="med"/>
+                      <a:tailEnd type="none" w="med" len="med"/>
+                    </a:lnB>
+                  </a:tcPr>
+                </a:tc>
+                <a:tc>
+                  <a:txBody>
+                    <a:bodyPr/>
+                    <a:lstStyle/>
+                    <a:p>
+                      <a:pPr algn="ctr" indent="0" marL="0">
+                        <a:buNone/>
+                      </a:pPr>
+                      <a:r>
+                        <a:rPr lang="en-US" sz="1100" dirty="0">
+                          <a:solidFill>
+                            <a:srgbClr val="17233B"/>
+                          </a:solidFill>
+                          <a:latin typeface="Calibri" pitchFamily="34" charset="0"/>
+                          <a:ea typeface="Calibri" pitchFamily="34" charset="-122"/>
+                          <a:cs typeface="Calibri" pitchFamily="34" charset="-120"/>
+                        </a:rPr>
+                        <a:t>12</a:t>
+                      </a:r>
+                      <a:endParaRPr lang="en-US" sz="1100" dirty="0">
+                        <a:latin typeface="Calibri" charset="0"/>
+                        <a:ea typeface="Calibri" charset="0"/>
+                        <a:cs typeface="Calibri" charset="0"/>
+                      </a:endParaRPr>
+                    </a:p>
+                  </a:txBody>
+                  <a:tcPr marL="91440" marR="91440" marT="45720" marB="45720" anchor="ctr">
+                    <a:lnL w="6350" cap="flat" cmpd="sng" algn="ctr">
+                      <a:solidFill>
+                        <a:srgbClr val="E9EEF5"/>
+                      </a:solidFill>
+                      <a:prstDash val="solid"/>
+                      <a:round/>
+                      <a:headEnd type="none" w="med" len="med"/>
+                      <a:tailEnd type="none" w="med" len="med"/>
+                    </a:lnL>
+                    <a:lnR w="6350" cap="flat" cmpd="sng" algn="ctr">
+                      <a:solidFill>
+                        <a:srgbClr val="E9EEF5"/>
+                      </a:solidFill>
+                      <a:prstDash val="solid"/>
+                      <a:round/>
+                      <a:headEnd type="none" w="med" len="med"/>
+                      <a:tailEnd type="none" w="med" len="med"/>
+                    </a:lnR>
+                    <a:lnT w="6350" cap="flat" cmpd="sng" algn="ctr">
+                      <a:solidFill>
+                        <a:srgbClr val="E9EEF5"/>
+                      </a:solidFill>
+                      <a:prstDash val="solid"/>
+                      <a:round/>
+                      <a:headEnd type="none" w="med" len="med"/>
+                      <a:tailEnd type="none" w="med" len="med"/>
+                    </a:lnT>
+                    <a:lnB w="6350" cap="flat" cmpd="sng" algn="ctr">
+                      <a:solidFill>
+                        <a:srgbClr val="E9EEF5"/>
+                      </a:solidFill>
+                      <a:prstDash val="solid"/>
+                      <a:round/>
+                      <a:headEnd type="none" w="med" len="med"/>
+                      <a:tailEnd type="none" w="med" len="med"/>
+                    </a:lnB>
+                  </a:tcPr>
+                </a:tc>
+                <a:tc>
+                  <a:txBody>
+                    <a:bodyPr/>
+                    <a:lstStyle/>
+                    <a:p>
+                      <a:pPr algn="ctr" indent="0" marL="0">
+                        <a:buNone/>
+                      </a:pPr>
+                      <a:r>
+                        <a:rPr lang="en-US" sz="1100" dirty="0">
+                          <a:solidFill>
+                            <a:srgbClr val="17233B"/>
+                          </a:solidFill>
+                          <a:latin typeface="Calibri" pitchFamily="34" charset="0"/>
+                          <a:ea typeface="Calibri" pitchFamily="34" charset="-122"/>
+                          <a:cs typeface="Calibri" pitchFamily="34" charset="-120"/>
+                        </a:rPr>
+                        <a:t>11</a:t>
+                      </a:r>
+                      <a:endParaRPr lang="en-US" sz="1100" dirty="0">
+                        <a:latin typeface="Calibri" charset="0"/>
+                        <a:ea typeface="Calibri" charset="0"/>
+                        <a:cs typeface="Calibri" charset="0"/>
+                      </a:endParaRPr>
+                    </a:p>
+                  </a:txBody>
+                  <a:tcPr marL="91440" marR="91440" marT="45720" marB="45720" anchor="ctr">
+                    <a:lnL w="6350" cap="flat" cmpd="sng" algn="ctr">
+                      <a:solidFill>
+                        <a:srgbClr val="E9EEF5"/>
+                      </a:solidFill>
+                      <a:prstDash val="solid"/>
+                      <a:round/>
+                      <a:headEnd type="none" w="med" len="med"/>
+                      <a:tailEnd type="none" w="med" len="med"/>
+                    </a:lnL>
+                    <a:lnR w="6350" cap="flat" cmpd="sng" algn="ctr">
+                      <a:solidFill>
+                        <a:srgbClr val="E9EEF5"/>
+                      </a:solidFill>
+                      <a:prstDash val="solid"/>
+                      <a:round/>
+                      <a:headEnd type="none" w="med" len="med"/>
+                      <a:tailEnd type="none" w="med" len="med"/>
+                    </a:lnR>
+                    <a:lnT w="6350" cap="flat" cmpd="sng" algn="ctr">
+                      <a:solidFill>
+                        <a:srgbClr val="E9EEF5"/>
+                      </a:solidFill>
+                      <a:prstDash val="solid"/>
+                      <a:round/>
+                      <a:headEnd type="none" w="med" len="med"/>
+                      <a:tailEnd type="none" w="med" len="med"/>
+                    </a:lnT>
+                    <a:lnB w="6350" cap="flat" cmpd="sng" algn="ctr">
+                      <a:solidFill>
+                        <a:srgbClr val="E9EEF5"/>
+                      </a:solidFill>
+                      <a:prstDash val="solid"/>
+                      <a:round/>
+                      <a:headEnd type="none" w="med" len="med"/>
+                      <a:tailEnd type="none" w="med" len="med"/>
+                    </a:lnB>
+                  </a:tcPr>
+                </a:tc>
+                <a:tc>
+                  <a:txBody>
+                    <a:bodyPr/>
+                    <a:lstStyle/>
+                    <a:p>
+                      <a:pPr algn="ctr" indent="0" marL="0">
+                        <a:buNone/>
+                      </a:pPr>
+                      <a:r>
+                        <a:rPr lang="en-US" sz="1100" dirty="0">
+                          <a:solidFill>
+                            <a:srgbClr val="17233B"/>
+                          </a:solidFill>
+                          <a:latin typeface="Calibri" pitchFamily="34" charset="0"/>
+                          <a:ea typeface="Calibri" pitchFamily="34" charset="-122"/>
+                          <a:cs typeface="Calibri" pitchFamily="34" charset="-120"/>
+                        </a:rPr>
+                        <a:t>1</a:t>
+                      </a:r>
+                      <a:endParaRPr lang="en-US" sz="1100" dirty="0">
+                        <a:latin typeface="Calibri" charset="0"/>
+                        <a:ea typeface="Calibri" charset="0"/>
+                        <a:cs typeface="Calibri" charset="0"/>
+                      </a:endParaRPr>
+                    </a:p>
+                  </a:txBody>
+                  <a:tcPr marL="91440" marR="91440" marT="45720" marB="45720" anchor="ctr">
+                    <a:lnL w="6350" cap="flat" cmpd="sng" algn="ctr">
+                      <a:solidFill>
+                        <a:srgbClr val="E9EEF5"/>
+                      </a:solidFill>
+                      <a:prstDash val="solid"/>
+                      <a:round/>
+                      <a:headEnd type="none" w="med" len="med"/>
+                      <a:tailEnd type="none" w="med" len="med"/>
+                    </a:lnL>
+                    <a:lnR w="6350" cap="flat" cmpd="sng" algn="ctr">
+                      <a:solidFill>
+                        <a:srgbClr val="E9EEF5"/>
+                      </a:solidFill>
+                      <a:prstDash val="solid"/>
+                      <a:round/>
+                      <a:headEnd type="none" w="med" len="med"/>
+                      <a:tailEnd type="none" w="med" len="med"/>
+                    </a:lnR>
+                    <a:lnT w="6350" cap="flat" cmpd="sng" algn="ctr">
+                      <a:solidFill>
+                        <a:srgbClr val="E9EEF5"/>
+                      </a:solidFill>
+                      <a:prstDash val="solid"/>
+                      <a:round/>
+                      <a:headEnd type="none" w="med" len="med"/>
+                      <a:tailEnd type="none" w="med" len="med"/>
+                    </a:lnT>
+                    <a:lnB w="6350" cap="flat" cmpd="sng" algn="ctr">
+                      <a:solidFill>
+                        <a:srgbClr val="E9EEF5"/>
+                      </a:solidFill>
+                      <a:prstDash val="solid"/>
+                      <a:round/>
+                      <a:headEnd type="none" w="med" len="med"/>
+                      <a:tailEnd type="none" w="med" len="med"/>
+                    </a:lnB>
+                  </a:tcPr>
+                </a:tc>
+                <a:tc>
+                  <a:txBody>
+                    <a:bodyPr/>
+                    <a:lstStyle/>
+                    <a:p>
+                      <a:pPr algn="ctr" indent="0" marL="0">
+                        <a:buNone/>
+                      </a:pPr>
+                      <a:r>
+                        <a:rPr lang="en-US" sz="1100" dirty="0">
+                          <a:solidFill>
+                            <a:srgbClr val="17233B"/>
+                          </a:solidFill>
+                          <a:latin typeface="Calibri" pitchFamily="34" charset="0"/>
+                          <a:ea typeface="Calibri" pitchFamily="34" charset="-122"/>
+                          <a:cs typeface="Calibri" pitchFamily="34" charset="-120"/>
+                        </a:rPr>
+                        <a:t>—</a:t>
+                      </a:r>
+                      <a:endParaRPr lang="en-US" sz="1100" dirty="0">
+                        <a:latin typeface="Calibri" charset="0"/>
+                        <a:ea typeface="Calibri" charset="0"/>
+                        <a:cs typeface="Calibri" charset="0"/>
+                      </a:endParaRPr>
+                    </a:p>
+                  </a:txBody>
+                  <a:tcPr marL="91440" marR="91440" marT="45720" marB="45720" anchor="ctr">
+                    <a:lnL w="6350" cap="flat" cmpd="sng" algn="ctr">
+                      <a:solidFill>
+                        <a:srgbClr val="E9EEF5"/>
+                      </a:solidFill>
+                      <a:prstDash val="solid"/>
+                      <a:round/>
+                      <a:headEnd type="none" w="med" len="med"/>
+                      <a:tailEnd type="none" w="med" len="med"/>
+                    </a:lnL>
+                    <a:lnR w="6350" cap="flat" cmpd="sng" algn="ctr">
+                      <a:solidFill>
+                        <a:srgbClr val="E9EEF5"/>
+                      </a:solidFill>
+                      <a:prstDash val="solid"/>
+                      <a:round/>
+                      <a:headEnd type="none" w="med" len="med"/>
+                      <a:tailEnd type="none" w="med" len="med"/>
+                    </a:lnR>
+                    <a:lnT w="6350" cap="flat" cmpd="sng" algn="ctr">
+                      <a:solidFill>
+                        <a:srgbClr val="E9EEF5"/>
+                      </a:solidFill>
+                      <a:prstDash val="solid"/>
+                      <a:round/>
+                      <a:headEnd type="none" w="med" len="med"/>
+                      <a:tailEnd type="none" w="med" len="med"/>
+                    </a:lnT>
+                    <a:lnB w="6350" cap="flat" cmpd="sng" algn="ctr">
+                      <a:solidFill>
+                        <a:srgbClr val="E9EEF5"/>
+                      </a:solidFill>
+                      <a:prstDash val="solid"/>
+                      <a:round/>
+                      <a:headEnd type="none" w="med" len="med"/>
+                      <a:tailEnd type="none" w="med" len="med"/>
+                    </a:lnB>
+                  </a:tcPr>
+                </a:tc>
+                <a:tc>
+                  <a:txBody>
+                    <a:bodyPr/>
+                    <a:lstStyle/>
+                    <a:p>
+                      <a:pPr algn="ctr" indent="0" marL="0">
+                        <a:buNone/>
+                      </a:pPr>
+                      <a:r>
+                        <a:rPr lang="en-US" sz="1050" b="1" dirty="0">
+                          <a:solidFill>
+                            <a:srgbClr val="B45309"/>
+                          </a:solidFill>
+                          <a:latin typeface="Calibri" pitchFamily="34" charset="0"/>
+                          <a:ea typeface="Calibri" pitchFamily="34" charset="-122"/>
+                          <a:cs typeface="Calibri" pitchFamily="34" charset="-120"/>
+                        </a:rPr>
+                        <a:t>Review</a:t>
+                      </a:r>
+                      <a:endParaRPr lang="en-US" sz="1050" dirty="0">
+                        <a:latin typeface="Calibri" charset="0"/>
+                        <a:ea typeface="Calibri" charset="0"/>
+                        <a:cs typeface="Calibri" charset="0"/>
+                      </a:endParaRPr>
+                    </a:p>
+                  </a:txBody>
+                  <a:tcPr marL="91440" marR="91440" marT="45720" marB="45720" anchor="ctr">
+                    <a:lnL w="6350" cap="flat" cmpd="sng" algn="ctr">
+                      <a:solidFill>
+                        <a:srgbClr val="E9EEF5"/>
+                      </a:solidFill>
+                      <a:prstDash val="solid"/>
+                      <a:round/>
+                      <a:headEnd type="none" w="med" len="med"/>
+                      <a:tailEnd type="none" w="med" len="med"/>
+                    </a:lnL>
+                    <a:lnR w="6350" cap="flat" cmpd="sng" algn="ctr">
+                      <a:solidFill>
+                        <a:srgbClr val="E9EEF5"/>
+                      </a:solidFill>
+                      <a:prstDash val="solid"/>
+                      <a:round/>
+                      <a:headEnd type="none" w="med" len="med"/>
+                      <a:tailEnd type="none" w="med" len="med"/>
+                    </a:lnR>
+                    <a:lnT w="6350" cap="flat" cmpd="sng" algn="ctr">
+                      <a:solidFill>
+                        <a:srgbClr val="E9EEF5"/>
+                      </a:solidFill>
+                      <a:prstDash val="solid"/>
+                      <a:round/>
+                      <a:headEnd type="none" w="med" len="med"/>
+                      <a:tailEnd type="none" w="med" len="med"/>
+                    </a:lnT>
+                    <a:lnB w="6350" cap="flat" cmpd="sng" algn="ctr">
+                      <a:solidFill>
+                        <a:srgbClr val="E9EEF5"/>
+                      </a:solidFill>
+                      <a:prstDash val="solid"/>
+                      <a:round/>
+                      <a:headEnd type="none" w="med" len="med"/>
+                      <a:tailEnd type="none" w="med" len="med"/>
+                    </a:lnB>
+                    <a:solidFill>
+                      <a:srgbClr val="FEF3C7"/>
+                    </a:solidFill>
+                  </a:tcPr>
+                </a:tc>
+              </a:tr>
+              <a:tr h="329184">
+                <a:tc>
+                  <a:txBody>
+                    <a:bodyPr/>
+                    <a:lstStyle/>
+                    <a:p>
+                      <a:pPr algn="l" indent="0" marL="0">
+                        <a:buNone/>
+                      </a:pPr>
+                      <a:r>
+                        <a:rPr lang="en-US" sz="1100" dirty="0">
+                          <a:solidFill>
+                            <a:srgbClr val="17233B"/>
+                          </a:solidFill>
+                          <a:latin typeface="Calibri" pitchFamily="34" charset="0"/>
+                          <a:ea typeface="Calibri" pitchFamily="34" charset="-122"/>
+                          <a:cs typeface="Calibri" pitchFamily="34" charset="-120"/>
+                        </a:rPr>
+                        <a:t>spl-onboarding</a:t>
+                      </a:r>
+                      <a:endParaRPr lang="en-US" sz="1100" dirty="0">
+                        <a:latin typeface="Calibri" charset="0"/>
+                        <a:ea typeface="Calibri" charset="0"/>
+                        <a:cs typeface="Calibri" charset="0"/>
+                      </a:endParaRPr>
+                    </a:p>
+                  </a:txBody>
+                  <a:tcPr marL="91440" marR="91440" marT="45720" marB="45720" anchor="ctr">
+                    <a:lnL w="6350" cap="flat" cmpd="sng" algn="ctr">
+                      <a:solidFill>
+                        <a:srgbClr val="E9EEF5"/>
+                      </a:solidFill>
+                      <a:prstDash val="solid"/>
+                      <a:round/>
+                      <a:headEnd type="none" w="med" len="med"/>
+                      <a:tailEnd type="none" w="med" len="med"/>
+                    </a:lnL>
+                    <a:lnR w="6350" cap="flat" cmpd="sng" algn="ctr">
+                      <a:solidFill>
+                        <a:srgbClr val="E9EEF5"/>
+                      </a:solidFill>
+                      <a:prstDash val="solid"/>
+                      <a:round/>
+                      <a:headEnd type="none" w="med" len="med"/>
+                      <a:tailEnd type="none" w="med" len="med"/>
+                    </a:lnR>
+                    <a:lnT w="6350" cap="flat" cmpd="sng" algn="ctr">
+                      <a:solidFill>
+                        <a:srgbClr val="E9EEF5"/>
+                      </a:solidFill>
+                      <a:prstDash val="solid"/>
+                      <a:round/>
+                      <a:headEnd type="none" w="med" len="med"/>
+                      <a:tailEnd type="none" w="med" len="med"/>
+                    </a:lnT>
+                    <a:lnB w="6350" cap="flat" cmpd="sng" algn="ctr">
+                      <a:solidFill>
+                        <a:srgbClr val="E9EEF5"/>
+                      </a:solidFill>
+                      <a:prstDash val="solid"/>
+                      <a:round/>
+                      <a:headEnd type="none" w="med" len="med"/>
+                      <a:tailEnd type="none" w="med" len="med"/>
+                    </a:lnB>
+                  </a:tcPr>
+                </a:tc>
+                <a:tc>
+                  <a:txBody>
+                    <a:bodyPr/>
+                    <a:lstStyle/>
+                    <a:p>
+                      <a:pPr algn="ctr" indent="0" marL="0">
+                        <a:buNone/>
+                      </a:pPr>
+                      <a:r>
+                        <a:rPr lang="en-US" sz="1100" dirty="0">
+                          <a:solidFill>
+                            <a:srgbClr val="17233B"/>
+                          </a:solidFill>
+                          <a:latin typeface="Calibri" pitchFamily="34" charset="0"/>
+                          <a:ea typeface="Calibri" pitchFamily="34" charset="-122"/>
+                          <a:cs typeface="Calibri" pitchFamily="34" charset="-120"/>
+                        </a:rPr>
+                        <a:t>10</a:t>
+                      </a:r>
+                      <a:endParaRPr lang="en-US" sz="1100" dirty="0">
+                        <a:latin typeface="Calibri" charset="0"/>
+                        <a:ea typeface="Calibri" charset="0"/>
+                        <a:cs typeface="Calibri" charset="0"/>
+                      </a:endParaRPr>
+                    </a:p>
+                  </a:txBody>
+                  <a:tcPr marL="91440" marR="91440" marT="45720" marB="45720" anchor="ctr">
+                    <a:lnL w="6350" cap="flat" cmpd="sng" algn="ctr">
+                      <a:solidFill>
+                        <a:srgbClr val="E9EEF5"/>
+                      </a:solidFill>
+                      <a:prstDash val="solid"/>
+                      <a:round/>
+                      <a:headEnd type="none" w="med" len="med"/>
+                      <a:tailEnd type="none" w="med" len="med"/>
+                    </a:lnL>
+                    <a:lnR w="6350" cap="flat" cmpd="sng" algn="ctr">
+                      <a:solidFill>
+                        <a:srgbClr val="E9EEF5"/>
+                      </a:solidFill>
+                      <a:prstDash val="solid"/>
+                      <a:round/>
+                      <a:headEnd type="none" w="med" len="med"/>
+                      <a:tailEnd type="none" w="med" len="med"/>
+                    </a:lnR>
+                    <a:lnT w="6350" cap="flat" cmpd="sng" algn="ctr">
+                      <a:solidFill>
+                        <a:srgbClr val="E9EEF5"/>
+                      </a:solidFill>
+                      <a:prstDash val="solid"/>
+                      <a:round/>
+                      <a:headEnd type="none" w="med" len="med"/>
+                      <a:tailEnd type="none" w="med" len="med"/>
+                    </a:lnT>
+                    <a:lnB w="6350" cap="flat" cmpd="sng" algn="ctr">
+                      <a:solidFill>
+                        <a:srgbClr val="E9EEF5"/>
+                      </a:solidFill>
+                      <a:prstDash val="solid"/>
+                      <a:round/>
+                      <a:headEnd type="none" w="med" len="med"/>
+                      <a:tailEnd type="none" w="med" len="med"/>
+                    </a:lnB>
+                  </a:tcPr>
+                </a:tc>
+                <a:tc>
+                  <a:txBody>
+                    <a:bodyPr/>
+                    <a:lstStyle/>
+                    <a:p>
+                      <a:pPr algn="ctr" indent="0" marL="0">
+                        <a:buNone/>
+                      </a:pPr>
+                      <a:r>
+                        <a:rPr lang="en-US" sz="1100" dirty="0">
+                          <a:solidFill>
+                            <a:srgbClr val="17233B"/>
+                          </a:solidFill>
+                          <a:latin typeface="Calibri" pitchFamily="34" charset="0"/>
+                          <a:ea typeface="Calibri" pitchFamily="34" charset="-122"/>
+                          <a:cs typeface="Calibri" pitchFamily="34" charset="-120"/>
+                        </a:rPr>
+                        <a:t>8</a:t>
+                      </a:r>
+                      <a:endParaRPr lang="en-US" sz="1100" dirty="0">
+                        <a:latin typeface="Calibri" charset="0"/>
+                        <a:ea typeface="Calibri" charset="0"/>
+                        <a:cs typeface="Calibri" charset="0"/>
+                      </a:endParaRPr>
+                    </a:p>
+                  </a:txBody>
+                  <a:tcPr marL="91440" marR="91440" marT="45720" marB="45720" anchor="ctr">
+                    <a:lnL w="6350" cap="flat" cmpd="sng" algn="ctr">
+                      <a:solidFill>
+                        <a:srgbClr val="E9EEF5"/>
+                      </a:solidFill>
+                      <a:prstDash val="solid"/>
+                      <a:round/>
+                      <a:headEnd type="none" w="med" len="med"/>
+                      <a:tailEnd type="none" w="med" len="med"/>
+                    </a:lnL>
+                    <a:lnR w="6350" cap="flat" cmpd="sng" algn="ctr">
+                      <a:solidFill>
+                        <a:srgbClr val="E9EEF5"/>
+                      </a:solidFill>
+                      <a:prstDash val="solid"/>
+                      <a:round/>
+                      <a:headEnd type="none" w="med" len="med"/>
+                      <a:tailEnd type="none" w="med" len="med"/>
+                    </a:lnR>
+                    <a:lnT w="6350" cap="flat" cmpd="sng" algn="ctr">
+                      <a:solidFill>
+                        <a:srgbClr val="E9EEF5"/>
+                      </a:solidFill>
+                      <a:prstDash val="solid"/>
+                      <a:round/>
+                      <a:headEnd type="none" w="med" len="med"/>
+                      <a:tailEnd type="none" w="med" len="med"/>
+                    </a:lnT>
+                    <a:lnB w="6350" cap="flat" cmpd="sng" algn="ctr">
+                      <a:solidFill>
+                        <a:srgbClr val="E9EEF5"/>
+                      </a:solidFill>
+                      <a:prstDash val="solid"/>
+                      <a:round/>
+                      <a:headEnd type="none" w="med" len="med"/>
+                      <a:tailEnd type="none" w="med" len="med"/>
+                    </a:lnB>
+                  </a:tcPr>
+                </a:tc>
+                <a:tc>
+                  <a:txBody>
+                    <a:bodyPr/>
+                    <a:lstStyle/>
+                    <a:p>
+                      <a:pPr algn="ctr" indent="0" marL="0">
+                        <a:buNone/>
+                      </a:pPr>
+                      <a:r>
+                        <a:rPr lang="en-US" sz="1100" dirty="0">
+                          <a:solidFill>
+                            <a:srgbClr val="17233B"/>
+                          </a:solidFill>
+                          <a:latin typeface="Calibri" pitchFamily="34" charset="0"/>
+                          <a:ea typeface="Calibri" pitchFamily="34" charset="-122"/>
+                          <a:cs typeface="Calibri" pitchFamily="34" charset="-120"/>
+                        </a:rPr>
+                        <a:t>2</a:t>
+                      </a:r>
+                      <a:endParaRPr lang="en-US" sz="1100" dirty="0">
+                        <a:latin typeface="Calibri" charset="0"/>
+                        <a:ea typeface="Calibri" charset="0"/>
+                        <a:cs typeface="Calibri" charset="0"/>
+                      </a:endParaRPr>
+                    </a:p>
+                  </a:txBody>
+                  <a:tcPr marL="91440" marR="91440" marT="45720" marB="45720" anchor="ctr">
+                    <a:lnL w="6350" cap="flat" cmpd="sng" algn="ctr">
+                      <a:solidFill>
+                        <a:srgbClr val="E9EEF5"/>
+                      </a:solidFill>
+                      <a:prstDash val="solid"/>
+                      <a:round/>
+                      <a:headEnd type="none" w="med" len="med"/>
+                      <a:tailEnd type="none" w="med" len="med"/>
+                    </a:lnL>
+                    <a:lnR w="6350" cap="flat" cmpd="sng" algn="ctr">
+                      <a:solidFill>
+                        <a:srgbClr val="E9EEF5"/>
+                      </a:solidFill>
+                      <a:prstDash val="solid"/>
+                      <a:round/>
+                      <a:headEnd type="none" w="med" len="med"/>
+                      <a:tailEnd type="none" w="med" len="med"/>
+                    </a:lnR>
+                    <a:lnT w="6350" cap="flat" cmpd="sng" algn="ctr">
+                      <a:solidFill>
+                        <a:srgbClr val="E9EEF5"/>
+                      </a:solidFill>
+                      <a:prstDash val="solid"/>
+                      <a:round/>
+                      <a:headEnd type="none" w="med" len="med"/>
+                      <a:tailEnd type="none" w="med" len="med"/>
+                    </a:lnT>
+                    <a:lnB w="6350" cap="flat" cmpd="sng" algn="ctr">
+                      <a:solidFill>
+                        <a:srgbClr val="E9EEF5"/>
+                      </a:solidFill>
+                      <a:prstDash val="solid"/>
+                      <a:round/>
+                      <a:headEnd type="none" w="med" len="med"/>
+                      <a:tailEnd type="none" w="med" len="med"/>
+                    </a:lnB>
+                  </a:tcPr>
+                </a:tc>
+                <a:tc>
+                  <a:txBody>
+                    <a:bodyPr/>
+                    <a:lstStyle/>
+                    <a:p>
+                      <a:pPr algn="ctr" indent="0" marL="0">
+                        <a:buNone/>
+                      </a:pPr>
+                      <a:r>
+                        <a:rPr lang="en-US" sz="1100" dirty="0">
+                          <a:solidFill>
+                            <a:srgbClr val="17233B"/>
+                          </a:solidFill>
+                          <a:latin typeface="Calibri" pitchFamily="34" charset="0"/>
+                          <a:ea typeface="Calibri" pitchFamily="34" charset="-122"/>
+                          <a:cs typeface="Calibri" pitchFamily="34" charset="-120"/>
+                        </a:rPr>
+                        <a:t>—</a:t>
+                      </a:r>
+                      <a:endParaRPr lang="en-US" sz="1100" dirty="0">
+                        <a:latin typeface="Calibri" charset="0"/>
+                        <a:ea typeface="Calibri" charset="0"/>
+                        <a:cs typeface="Calibri" charset="0"/>
+                      </a:endParaRPr>
+                    </a:p>
+                  </a:txBody>
+                  <a:tcPr marL="91440" marR="91440" marT="45720" marB="45720" anchor="ctr">
+                    <a:lnL w="6350" cap="flat" cmpd="sng" algn="ctr">
+                      <a:solidFill>
+                        <a:srgbClr val="E9EEF5"/>
+                      </a:solidFill>
+                      <a:prstDash val="solid"/>
+                      <a:round/>
+                      <a:headEnd type="none" w="med" len="med"/>
+                      <a:tailEnd type="none" w="med" len="med"/>
+                    </a:lnL>
+                    <a:lnR w="6350" cap="flat" cmpd="sng" algn="ctr">
+                      <a:solidFill>
+                        <a:srgbClr val="E9EEF5"/>
+                      </a:solidFill>
+                      <a:prstDash val="solid"/>
+                      <a:round/>
+                      <a:headEnd type="none" w="med" len="med"/>
+                      <a:tailEnd type="none" w="med" len="med"/>
+                    </a:lnR>
+                    <a:lnT w="6350" cap="flat" cmpd="sng" algn="ctr">
+                      <a:solidFill>
+                        <a:srgbClr val="E9EEF5"/>
+                      </a:solidFill>
+                      <a:prstDash val="solid"/>
+                      <a:round/>
+                      <a:headEnd type="none" w="med" len="med"/>
+                      <a:tailEnd type="none" w="med" len="med"/>
+                    </a:lnT>
+                    <a:lnB w="6350" cap="flat" cmpd="sng" algn="ctr">
+                      <a:solidFill>
+                        <a:srgbClr val="E9EEF5"/>
+                      </a:solidFill>
+                      <a:prstDash val="solid"/>
+                      <a:round/>
+                      <a:headEnd type="none" w="med" len="med"/>
+                      <a:tailEnd type="none" w="med" len="med"/>
+                    </a:lnB>
+                  </a:tcPr>
+                </a:tc>
+                <a:tc>
+                  <a:txBody>
+                    <a:bodyPr/>
+                    <a:lstStyle/>
+                    <a:p>
+                      <a:pPr algn="ctr" indent="0" marL="0">
+                        <a:buNone/>
+                      </a:pPr>
+                      <a:r>
+                        <a:rPr lang="en-US" sz="1050" b="1" dirty="0">
+                          <a:solidFill>
+                            <a:srgbClr val="B45309"/>
+                          </a:solidFill>
+                          <a:latin typeface="Calibri" pitchFamily="34" charset="0"/>
+                          <a:ea typeface="Calibri" pitchFamily="34" charset="-122"/>
+                          <a:cs typeface="Calibri" pitchFamily="34" charset="-120"/>
+                        </a:rPr>
+                        <a:t>Review</a:t>
+                      </a:r>
+                      <a:endParaRPr lang="en-US" sz="1050" dirty="0">
+                        <a:latin typeface="Calibri" charset="0"/>
+                        <a:ea typeface="Calibri" charset="0"/>
+                        <a:cs typeface="Calibri" charset="0"/>
+                      </a:endParaRPr>
+                    </a:p>
+                  </a:txBody>
+                  <a:tcPr marL="91440" marR="91440" marT="45720" marB="45720" anchor="ctr">
+                    <a:lnL w="6350" cap="flat" cmpd="sng" algn="ctr">
+                      <a:solidFill>
+                        <a:srgbClr val="E9EEF5"/>
+                      </a:solidFill>
+                      <a:prstDash val="solid"/>
+                      <a:round/>
+                      <a:headEnd type="none" w="med" len="med"/>
+                      <a:tailEnd type="none" w="med" len="med"/>
+                    </a:lnL>
+                    <a:lnR w="6350" cap="flat" cmpd="sng" algn="ctr">
+                      <a:solidFill>
+                        <a:srgbClr val="E9EEF5"/>
+                      </a:solidFill>
+                      <a:prstDash val="solid"/>
+                      <a:round/>
+                      <a:headEnd type="none" w="med" len="med"/>
+                      <a:tailEnd type="none" w="med" len="med"/>
+                    </a:lnR>
+                    <a:lnT w="6350" cap="flat" cmpd="sng" algn="ctr">
+                      <a:solidFill>
+                        <a:srgbClr val="E9EEF5"/>
+                      </a:solidFill>
+                      <a:prstDash val="solid"/>
+                      <a:round/>
+                      <a:headEnd type="none" w="med" len="med"/>
+                      <a:tailEnd type="none" w="med" len="med"/>
+                    </a:lnT>
+                    <a:lnB w="6350" cap="flat" cmpd="sng" algn="ctr">
+                      <a:solidFill>
+                        <a:srgbClr val="E9EEF5"/>
+                      </a:solidFill>
+                      <a:prstDash val="solid"/>
+                      <a:round/>
+                      <a:headEnd type="none" w="med" len="med"/>
+                      <a:tailEnd type="none" w="med" len="med"/>
+                    </a:lnB>
+                    <a:solidFill>
+                      <a:srgbClr val="FEF3C7"/>
+                    </a:solidFill>
+                  </a:tcPr>
+                </a:tc>
+              </a:tr>
+              <a:tr h="329184">
+                <a:tc>
+                  <a:txBody>
+                    <a:bodyPr/>
+                    <a:lstStyle/>
+                    <a:p>
+                      <a:pPr algn="l" indent="0" marL="0">
+                        <a:buNone/>
+                      </a:pPr>
+                      <a:r>
+                        <a:rPr lang="en-US" sz="1100" dirty="0">
+                          <a:solidFill>
+                            <a:srgbClr val="17233B"/>
+                          </a:solidFill>
+                          <a:latin typeface="Calibri" pitchFamily="34" charset="0"/>
+                          <a:ea typeface="Calibri" pitchFamily="34" charset="-122"/>
+                          <a:cs typeface="Calibri" pitchFamily="34" charset="-120"/>
+                        </a:rPr>
+                        <a:t>spl-secure</a:t>
+                      </a:r>
+                      <a:endParaRPr lang="en-US" sz="1100" dirty="0">
+                        <a:latin typeface="Calibri" charset="0"/>
+                        <a:ea typeface="Calibri" charset="0"/>
+                        <a:cs typeface="Calibri" charset="0"/>
+                      </a:endParaRPr>
+                    </a:p>
+                  </a:txBody>
+                  <a:tcPr marL="91440" marR="91440" marT="45720" marB="45720" anchor="ctr">
+                    <a:lnL w="6350" cap="flat" cmpd="sng" algn="ctr">
+                      <a:solidFill>
+                        <a:srgbClr val="E9EEF5"/>
+                      </a:solidFill>
+                      <a:prstDash val="solid"/>
+                      <a:round/>
+                      <a:headEnd type="none" w="med" len="med"/>
+                      <a:tailEnd type="none" w="med" len="med"/>
+                    </a:lnL>
+                    <a:lnR w="6350" cap="flat" cmpd="sng" algn="ctr">
+                      <a:solidFill>
+                        <a:srgbClr val="E9EEF5"/>
+                      </a:solidFill>
+                      <a:prstDash val="solid"/>
+                      <a:round/>
+                      <a:headEnd type="none" w="med" len="med"/>
+                      <a:tailEnd type="none" w="med" len="med"/>
+                    </a:lnR>
+                    <a:lnT w="6350" cap="flat" cmpd="sng" algn="ctr">
+                      <a:solidFill>
+                        <a:srgbClr val="E9EEF5"/>
+                      </a:solidFill>
+                      <a:prstDash val="solid"/>
+                      <a:round/>
+                      <a:headEnd type="none" w="med" len="med"/>
+                      <a:tailEnd type="none" w="med" len="med"/>
+                    </a:lnT>
+                    <a:lnB w="6350" cap="flat" cmpd="sng" algn="ctr">
+                      <a:solidFill>
+                        <a:srgbClr val="E9EEF5"/>
+                      </a:solidFill>
+                      <a:prstDash val="solid"/>
+                      <a:round/>
+                      <a:headEnd type="none" w="med" len="med"/>
+                      <a:tailEnd type="none" w="med" len="med"/>
+                    </a:lnB>
+                  </a:tcPr>
+                </a:tc>
+                <a:tc>
+                  <a:txBody>
+                    <a:bodyPr/>
+                    <a:lstStyle/>
+                    <a:p>
+                      <a:pPr algn="ctr" indent="0" marL="0">
+                        <a:buNone/>
+                      </a:pPr>
+                      <a:r>
+                        <a:rPr lang="en-US" sz="1100" dirty="0">
+                          <a:solidFill>
+                            <a:srgbClr val="17233B"/>
+                          </a:solidFill>
+                          <a:latin typeface="Calibri" pitchFamily="34" charset="0"/>
+                          <a:ea typeface="Calibri" pitchFamily="34" charset="-122"/>
+                          <a:cs typeface="Calibri" pitchFamily="34" charset="-120"/>
+                        </a:rPr>
+                        <a:t>8</a:t>
+                      </a:r>
+                      <a:endParaRPr lang="en-US" sz="1100" dirty="0">
+                        <a:latin typeface="Calibri" charset="0"/>
+                        <a:ea typeface="Calibri" charset="0"/>
+                        <a:cs typeface="Calibri" charset="0"/>
+                      </a:endParaRPr>
+                    </a:p>
+                  </a:txBody>
+                  <a:tcPr marL="91440" marR="91440" marT="45720" marB="45720" anchor="ctr">
+                    <a:lnL w="6350" cap="flat" cmpd="sng" algn="ctr">
+                      <a:solidFill>
+                        <a:srgbClr val="E9EEF5"/>
+                      </a:solidFill>
+                      <a:prstDash val="solid"/>
+                      <a:round/>
+                      <a:headEnd type="none" w="med" len="med"/>
+                      <a:tailEnd type="none" w="med" len="med"/>
+                    </a:lnL>
+                    <a:lnR w="6350" cap="flat" cmpd="sng" algn="ctr">
+                      <a:solidFill>
+                        <a:srgbClr val="E9EEF5"/>
+                      </a:solidFill>
+                      <a:prstDash val="solid"/>
+                      <a:round/>
+                      <a:headEnd type="none" w="med" len="med"/>
+                      <a:tailEnd type="none" w="med" len="med"/>
+                    </a:lnR>
+                    <a:lnT w="6350" cap="flat" cmpd="sng" algn="ctr">
+                      <a:solidFill>
+                        <a:srgbClr val="E9EEF5"/>
+                      </a:solidFill>
+                      <a:prstDash val="solid"/>
+                      <a:round/>
+                      <a:headEnd type="none" w="med" len="med"/>
+                      <a:tailEnd type="none" w="med" len="med"/>
+                    </a:lnT>
+                    <a:lnB w="6350" cap="flat" cmpd="sng" algn="ctr">
+                      <a:solidFill>
+                        <a:srgbClr val="E9EEF5"/>
+                      </a:solidFill>
+                      <a:prstDash val="solid"/>
+                      <a:round/>
+                      <a:headEnd type="none" w="med" len="med"/>
+                      <a:tailEnd type="none" w="med" len="med"/>
+                    </a:lnB>
+                  </a:tcPr>
+                </a:tc>
+                <a:tc>
+                  <a:txBody>
+                    <a:bodyPr/>
+                    <a:lstStyle/>
+                    <a:p>
+                      <a:pPr algn="ctr" indent="0" marL="0">
+                        <a:buNone/>
+                      </a:pPr>
+                      <a:r>
+                        <a:rPr lang="en-US" sz="1100" dirty="0">
+                          <a:solidFill>
+                            <a:srgbClr val="17233B"/>
+                          </a:solidFill>
+                          <a:latin typeface="Calibri" pitchFamily="34" charset="0"/>
+                          <a:ea typeface="Calibri" pitchFamily="34" charset="-122"/>
+                          <a:cs typeface="Calibri" pitchFamily="34" charset="-120"/>
+                        </a:rPr>
+                        <a:t>3</a:t>
+                      </a:r>
+                      <a:endParaRPr lang="en-US" sz="1100" dirty="0">
+                        <a:latin typeface="Calibri" charset="0"/>
+                        <a:ea typeface="Calibri" charset="0"/>
+                        <a:cs typeface="Calibri" charset="0"/>
+                      </a:endParaRPr>
+                    </a:p>
+                  </a:txBody>
+                  <a:tcPr marL="91440" marR="91440" marT="45720" marB="45720" anchor="ctr">
+                    <a:lnL w="6350" cap="flat" cmpd="sng" algn="ctr">
+                      <a:solidFill>
+                        <a:srgbClr val="E9EEF5"/>
+                      </a:solidFill>
+                      <a:prstDash val="solid"/>
+                      <a:round/>
+                      <a:headEnd type="none" w="med" len="med"/>
+                      <a:tailEnd type="none" w="med" len="med"/>
+                    </a:lnL>
+                    <a:lnR w="6350" cap="flat" cmpd="sng" algn="ctr">
+                      <a:solidFill>
+                        <a:srgbClr val="E9EEF5"/>
+                      </a:solidFill>
+                      <a:prstDash val="solid"/>
+                      <a:round/>
+                      <a:headEnd type="none" w="med" len="med"/>
+                      <a:tailEnd type="none" w="med" len="med"/>
+                    </a:lnR>
+                    <a:lnT w="6350" cap="flat" cmpd="sng" algn="ctr">
+                      <a:solidFill>
+                        <a:srgbClr val="E9EEF5"/>
+                      </a:solidFill>
+                      <a:prstDash val="solid"/>
+                      <a:round/>
+                      <a:headEnd type="none" w="med" len="med"/>
+                      <a:tailEnd type="none" w="med" len="med"/>
+                    </a:lnT>
+                    <a:lnB w="6350" cap="flat" cmpd="sng" algn="ctr">
+                      <a:solidFill>
+                        <a:srgbClr val="E9EEF5"/>
+                      </a:solidFill>
+                      <a:prstDash val="solid"/>
+                      <a:round/>
+                      <a:headEnd type="none" w="med" len="med"/>
+                      <a:tailEnd type="none" w="med" len="med"/>
+                    </a:lnB>
+                  </a:tcPr>
+                </a:tc>
+                <a:tc>
+                  <a:txBody>
+                    <a:bodyPr/>
+                    <a:lstStyle/>
+                    <a:p>
+                      <a:pPr algn="ctr" indent="0" marL="0">
+                        <a:buNone/>
+                      </a:pPr>
+                      <a:r>
+                        <a:rPr lang="en-US" sz="1100" dirty="0">
+                          <a:solidFill>
+                            <a:srgbClr val="17233B"/>
+                          </a:solidFill>
+                          <a:latin typeface="Calibri" pitchFamily="34" charset="0"/>
+                          <a:ea typeface="Calibri" pitchFamily="34" charset="-122"/>
+                          <a:cs typeface="Calibri" pitchFamily="34" charset="-120"/>
+                        </a:rPr>
+                        <a:t>5</a:t>
+                      </a:r>
+                      <a:endParaRPr lang="en-US" sz="1100" dirty="0">
+                        <a:latin typeface="Calibri" charset="0"/>
+                        <a:ea typeface="Calibri" charset="0"/>
+                        <a:cs typeface="Calibri" charset="0"/>
+                      </a:endParaRPr>
+                    </a:p>
+                  </a:txBody>
+                  <a:tcPr marL="91440" marR="91440" marT="45720" marB="45720" anchor="ctr">
+                    <a:lnL w="6350" cap="flat" cmpd="sng" algn="ctr">
+                      <a:solidFill>
+                        <a:srgbClr val="E9EEF5"/>
+                      </a:solidFill>
+                      <a:prstDash val="solid"/>
+                      <a:round/>
+                      <a:headEnd type="none" w="med" len="med"/>
+                      <a:tailEnd type="none" w="med" len="med"/>
+                    </a:lnL>
+                    <a:lnR w="6350" cap="flat" cmpd="sng" algn="ctr">
+                      <a:solidFill>
+                        <a:srgbClr val="E9EEF5"/>
+                      </a:solidFill>
+                      <a:prstDash val="solid"/>
+                      <a:round/>
+                      <a:headEnd type="none" w="med" len="med"/>
+                      <a:tailEnd type="none" w="med" len="med"/>
+                    </a:lnR>
+                    <a:lnT w="6350" cap="flat" cmpd="sng" algn="ctr">
+                      <a:solidFill>
+                        <a:srgbClr val="E9EEF5"/>
+                      </a:solidFill>
+                      <a:prstDash val="solid"/>
+                      <a:round/>
+                      <a:headEnd type="none" w="med" len="med"/>
+                      <a:tailEnd type="none" w="med" len="med"/>
+                    </a:lnT>
+                    <a:lnB w="6350" cap="flat" cmpd="sng" algn="ctr">
+                      <a:solidFill>
+                        <a:srgbClr val="E9EEF5"/>
+                      </a:solidFill>
+                      <a:prstDash val="solid"/>
+                      <a:round/>
+                      <a:headEnd type="none" w="med" len="med"/>
+                      <a:tailEnd type="none" w="med" len="med"/>
+                    </a:lnB>
+                  </a:tcPr>
+                </a:tc>
+                <a:tc>
+                  <a:txBody>
+                    <a:bodyPr/>
+                    <a:lstStyle/>
+                    <a:p>
+                      <a:pPr algn="ctr" indent="0" marL="0">
+                        <a:buNone/>
+                      </a:pPr>
+                      <a:r>
+                        <a:rPr lang="en-US" sz="1100" dirty="0">
+                          <a:solidFill>
+                            <a:srgbClr val="17233B"/>
+                          </a:solidFill>
+                          <a:latin typeface="Calibri" pitchFamily="34" charset="0"/>
+                          <a:ea typeface="Calibri" pitchFamily="34" charset="-122"/>
+                          <a:cs typeface="Calibri" pitchFamily="34" charset="-120"/>
+                        </a:rPr>
+                        <a:t>—</a:t>
+                      </a:r>
+                      <a:endParaRPr lang="en-US" sz="1100" dirty="0">
+                        <a:latin typeface="Calibri" charset="0"/>
+                        <a:ea typeface="Calibri" charset="0"/>
+                        <a:cs typeface="Calibri" charset="0"/>
+                      </a:endParaRPr>
+                    </a:p>
+                  </a:txBody>
+                  <a:tcPr marL="91440" marR="91440" marT="45720" marB="45720" anchor="ctr">
+                    <a:lnL w="6350" cap="flat" cmpd="sng" algn="ctr">
+                      <a:solidFill>
+                        <a:srgbClr val="E9EEF5"/>
+                      </a:solidFill>
+                      <a:prstDash val="solid"/>
+                      <a:round/>
+                      <a:headEnd type="none" w="med" len="med"/>
+                      <a:tailEnd type="none" w="med" len="med"/>
+                    </a:lnL>
+                    <a:lnR w="6350" cap="flat" cmpd="sng" algn="ctr">
+                      <a:solidFill>
+                        <a:srgbClr val="E9EEF5"/>
+                      </a:solidFill>
+                      <a:prstDash val="solid"/>
+                      <a:round/>
+                      <a:headEnd type="none" w="med" len="med"/>
+                      <a:tailEnd type="none" w="med" len="med"/>
+                    </a:lnR>
+                    <a:lnT w="6350" cap="flat" cmpd="sng" algn="ctr">
+                      <a:solidFill>
+                        <a:srgbClr val="E9EEF5"/>
+                      </a:solidFill>
+                      <a:prstDash val="solid"/>
+                      <a:round/>
+                      <a:headEnd type="none" w="med" len="med"/>
+                      <a:tailEnd type="none" w="med" len="med"/>
+                    </a:lnT>
+                    <a:lnB w="6350" cap="flat" cmpd="sng" algn="ctr">
+                      <a:solidFill>
+                        <a:srgbClr val="E9EEF5"/>
+                      </a:solidFill>
+                      <a:prstDash val="solid"/>
+                      <a:round/>
+                      <a:headEnd type="none" w="med" len="med"/>
+                      <a:tailEnd type="none" w="med" len="med"/>
+                    </a:lnB>
+                  </a:tcPr>
+                </a:tc>
+                <a:tc>
+                  <a:txBody>
+                    <a:bodyPr/>
+                    <a:lstStyle/>
+                    <a:p>
+                      <a:pPr algn="ctr" indent="0" marL="0">
+                        <a:buNone/>
+                      </a:pPr>
+                      <a:r>
+                        <a:rPr lang="en-US" sz="1050" b="1" dirty="0">
+                          <a:solidFill>
+                            <a:srgbClr val="B45309"/>
+                          </a:solidFill>
+                          <a:latin typeface="Calibri" pitchFamily="34" charset="0"/>
+                          <a:ea typeface="Calibri" pitchFamily="34" charset="-122"/>
+                          <a:cs typeface="Calibri" pitchFamily="34" charset="-120"/>
+                        </a:rPr>
+                        <a:t>Review</a:t>
+                      </a:r>
+                      <a:endParaRPr lang="en-US" sz="1050" dirty="0">
+                        <a:latin typeface="Calibri" charset="0"/>
+                        <a:ea typeface="Calibri" charset="0"/>
+                        <a:cs typeface="Calibri" charset="0"/>
+                      </a:endParaRPr>
+                    </a:p>
+                  </a:txBody>
+                  <a:tcPr marL="91440" marR="91440" marT="45720" marB="45720" anchor="ctr">
+                    <a:lnL w="6350" cap="flat" cmpd="sng" algn="ctr">
+                      <a:solidFill>
+                        <a:srgbClr val="E9EEF5"/>
+                      </a:solidFill>
+                      <a:prstDash val="solid"/>
+                      <a:round/>
+                      <a:headEnd type="none" w="med" len="med"/>
+                      <a:tailEnd type="none" w="med" len="med"/>
+                    </a:lnL>
+                    <a:lnR w="6350" cap="flat" cmpd="sng" algn="ctr">
+                      <a:solidFill>
+                        <a:srgbClr val="E9EEF5"/>
+                      </a:solidFill>
+                      <a:prstDash val="solid"/>
+                      <a:round/>
+                      <a:headEnd type="none" w="med" len="med"/>
+                      <a:tailEnd type="none" w="med" len="med"/>
+                    </a:lnR>
+                    <a:lnT w="6350" cap="flat" cmpd="sng" algn="ctr">
+                      <a:solidFill>
+                        <a:srgbClr val="E9EEF5"/>
+                      </a:solidFill>
+                      <a:prstDash val="solid"/>
+                      <a:round/>
+                      <a:headEnd type="none" w="med" len="med"/>
+                      <a:tailEnd type="none" w="med" len="med"/>
+                    </a:lnT>
+                    <a:lnB w="6350" cap="flat" cmpd="sng" algn="ctr">
+                      <a:solidFill>
+                        <a:srgbClr val="E9EEF5"/>
+                      </a:solidFill>
+                      <a:prstDash val="solid"/>
+                      <a:round/>
+                      <a:headEnd type="none" w="med" len="med"/>
+                      <a:tailEnd type="none" w="med" len="med"/>
+                    </a:lnB>
+                    <a:solidFill>
+                      <a:srgbClr val="FEF3C7"/>
+                    </a:solidFill>
+                  </a:tcPr>
+                </a:tc>
+              </a:tr>
+              <a:tr h="329184">
+                <a:tc>
+                  <a:txBody>
+                    <a:bodyPr/>
+                    <a:lstStyle/>
+                    <a:p>
+                      <a:pPr algn="l" indent="0" marL="0">
+                        <a:buNone/>
+                      </a:pPr>
+                      <a:r>
+                        <a:rPr lang="en-US" sz="1100" dirty="0">
+                          <a:solidFill>
+                            <a:srgbClr val="17233B"/>
+                          </a:solidFill>
+                          <a:latin typeface="Calibri" pitchFamily="34" charset="0"/>
+                          <a:ea typeface="Calibri" pitchFamily="34" charset="-122"/>
+                          <a:cs typeface="Calibri" pitchFamily="34" charset="-120"/>
+                        </a:rPr>
+                        <a:t>spl-edp</a:t>
+                      </a:r>
+                      <a:endParaRPr lang="en-US" sz="1100" dirty="0">
+                        <a:latin typeface="Calibri" charset="0"/>
+                        <a:ea typeface="Calibri" charset="0"/>
+                        <a:cs typeface="Calibri" charset="0"/>
+                      </a:endParaRPr>
+                    </a:p>
+                  </a:txBody>
+                  <a:tcPr marL="91440" marR="91440" marT="45720" marB="45720" anchor="ctr">
+                    <a:lnL w="6350" cap="flat" cmpd="sng" algn="ctr">
+                      <a:solidFill>
+                        <a:srgbClr val="E9EEF5"/>
+                      </a:solidFill>
+                      <a:prstDash val="solid"/>
+                      <a:round/>
+                      <a:headEnd type="none" w="med" len="med"/>
+                      <a:tailEnd type="none" w="med" len="med"/>
+                    </a:lnL>
+                    <a:lnR w="6350" cap="flat" cmpd="sng" algn="ctr">
+                      <a:solidFill>
+                        <a:srgbClr val="E9EEF5"/>
+                      </a:solidFill>
+                      <a:prstDash val="solid"/>
+                      <a:round/>
+                      <a:headEnd type="none" w="med" len="med"/>
+                      <a:tailEnd type="none" w="med" len="med"/>
+                    </a:lnR>
+                    <a:lnT w="6350" cap="flat" cmpd="sng" algn="ctr">
+                      <a:solidFill>
+                        <a:srgbClr val="E9EEF5"/>
+                      </a:solidFill>
+                      <a:prstDash val="solid"/>
+                      <a:round/>
+                      <a:headEnd type="none" w="med" len="med"/>
+                      <a:tailEnd type="none" w="med" len="med"/>
+                    </a:lnT>
+                    <a:lnB w="6350" cap="flat" cmpd="sng" algn="ctr">
+                      <a:solidFill>
+                        <a:srgbClr val="E9EEF5"/>
+                      </a:solidFill>
+                      <a:prstDash val="solid"/>
+                      <a:round/>
+                      <a:headEnd type="none" w="med" len="med"/>
+                      <a:tailEnd type="none" w="med" len="med"/>
+                    </a:lnB>
+                  </a:tcPr>
+                </a:tc>
+                <a:tc>
+                  <a:txBody>
+                    <a:bodyPr/>
+                    <a:lstStyle/>
+                    <a:p>
+                      <a:pPr algn="ctr" indent="0" marL="0">
+                        <a:buNone/>
+                      </a:pPr>
+                      <a:r>
+                        <a:rPr lang="en-US" sz="1100" dirty="0">
+                          <a:solidFill>
+                            <a:srgbClr val="17233B"/>
+                          </a:solidFill>
+                          <a:latin typeface="Calibri" pitchFamily="34" charset="0"/>
+                          <a:ea typeface="Calibri" pitchFamily="34" charset="-122"/>
+                          <a:cs typeface="Calibri" pitchFamily="34" charset="-120"/>
+                        </a:rPr>
+                        <a:t>14</a:t>
+                      </a:r>
+                      <a:endParaRPr lang="en-US" sz="1100" dirty="0">
+                        <a:latin typeface="Calibri" charset="0"/>
+                        <a:ea typeface="Calibri" charset="0"/>
+                        <a:cs typeface="Calibri" charset="0"/>
+                      </a:endParaRPr>
+                    </a:p>
+                  </a:txBody>
+                  <a:tcPr marL="91440" marR="91440" marT="45720" marB="45720" anchor="ctr">
+                    <a:lnL w="6350" cap="flat" cmpd="sng" algn="ctr">
+                      <a:solidFill>
+                        <a:srgbClr val="E9EEF5"/>
+                      </a:solidFill>
+                      <a:prstDash val="solid"/>
+                      <a:round/>
+                      <a:headEnd type="none" w="med" len="med"/>
+                      <a:tailEnd type="none" w="med" len="med"/>
+                    </a:lnL>
+                    <a:lnR w="6350" cap="flat" cmpd="sng" algn="ctr">
+                      <a:solidFill>
+                        <a:srgbClr val="E9EEF5"/>
+                      </a:solidFill>
+                      <a:prstDash val="solid"/>
+                      <a:round/>
+                      <a:headEnd type="none" w="med" len="med"/>
+                      <a:tailEnd type="none" w="med" len="med"/>
+                    </a:lnR>
+                    <a:lnT w="6350" cap="flat" cmpd="sng" algn="ctr">
+                      <a:solidFill>
+                        <a:srgbClr val="E9EEF5"/>
+                      </a:solidFill>
+                      <a:prstDash val="solid"/>
+                      <a:round/>
+                      <a:headEnd type="none" w="med" len="med"/>
+                      <a:tailEnd type="none" w="med" len="med"/>
+                    </a:lnT>
+                    <a:lnB w="6350" cap="flat" cmpd="sng" algn="ctr">
+                      <a:solidFill>
+                        <a:srgbClr val="E9EEF5"/>
+                      </a:solidFill>
+                      <a:prstDash val="solid"/>
+                      <a:round/>
+                      <a:headEnd type="none" w="med" len="med"/>
+                      <a:tailEnd type="none" w="med" len="med"/>
+                    </a:lnB>
+                  </a:tcPr>
+                </a:tc>
+                <a:tc>
+                  <a:txBody>
+                    <a:bodyPr/>
+                    <a:lstStyle/>
+                    <a:p>
+                      <a:pPr algn="ctr" indent="0" marL="0">
+                        <a:buNone/>
+                      </a:pPr>
+                      <a:r>
+                        <a:rPr lang="en-US" sz="1100" dirty="0">
+                          <a:solidFill>
+                            <a:srgbClr val="17233B"/>
+                          </a:solidFill>
+                          <a:latin typeface="Calibri" pitchFamily="34" charset="0"/>
+                          <a:ea typeface="Calibri" pitchFamily="34" charset="-122"/>
+                          <a:cs typeface="Calibri" pitchFamily="34" charset="-120"/>
+                        </a:rPr>
+                        <a:t>14</a:t>
+                      </a:r>
+                      <a:endParaRPr lang="en-US" sz="1100" dirty="0">
+                        <a:latin typeface="Calibri" charset="0"/>
+                        <a:ea typeface="Calibri" charset="0"/>
+                        <a:cs typeface="Calibri" charset="0"/>
+                      </a:endParaRPr>
+                    </a:p>
+                  </a:txBody>
+                  <a:tcPr marL="91440" marR="91440" marT="45720" marB="45720" anchor="ctr">
+                    <a:lnL w="6350" cap="flat" cmpd="sng" algn="ctr">
+                      <a:solidFill>
+                        <a:srgbClr val="E9EEF5"/>
+                      </a:solidFill>
+                      <a:prstDash val="solid"/>
+                      <a:round/>
+                      <a:headEnd type="none" w="med" len="med"/>
+                      <a:tailEnd type="none" w="med" len="med"/>
+                    </a:lnL>
+                    <a:lnR w="6350" cap="flat" cmpd="sng" algn="ctr">
+                      <a:solidFill>
+                        <a:srgbClr val="E9EEF5"/>
+                      </a:solidFill>
+                      <a:prstDash val="solid"/>
+                      <a:round/>
+                      <a:headEnd type="none" w="med" len="med"/>
+                      <a:tailEnd type="none" w="med" len="med"/>
+                    </a:lnR>
+                    <a:lnT w="6350" cap="flat" cmpd="sng" algn="ctr">
+                      <a:solidFill>
+                        <a:srgbClr val="E9EEF5"/>
+                      </a:solidFill>
+                      <a:prstDash val="solid"/>
+                      <a:round/>
+                      <a:headEnd type="none" w="med" len="med"/>
+                      <a:tailEnd type="none" w="med" len="med"/>
+                    </a:lnT>
+                    <a:lnB w="6350" cap="flat" cmpd="sng" algn="ctr">
+                      <a:solidFill>
+                        <a:srgbClr val="E9EEF5"/>
+                      </a:solidFill>
+                      <a:prstDash val="solid"/>
+                      <a:round/>
+                      <a:headEnd type="none" w="med" len="med"/>
+                      <a:tailEnd type="none" w="med" len="med"/>
+                    </a:lnB>
+                  </a:tcPr>
+                </a:tc>
+                <a:tc>
+                  <a:txBody>
+                    <a:bodyPr/>
+                    <a:lstStyle/>
+                    <a:p>
+                      <a:pPr algn="ctr" indent="0" marL="0">
+                        <a:buNone/>
+                      </a:pPr>
+                      <a:r>
+                        <a:rPr lang="en-US" sz="1100" dirty="0">
+                          <a:solidFill>
+                            <a:srgbClr val="17233B"/>
+                          </a:solidFill>
+                          <a:latin typeface="Calibri" pitchFamily="34" charset="0"/>
+                          <a:ea typeface="Calibri" pitchFamily="34" charset="-122"/>
+                          <a:cs typeface="Calibri" pitchFamily="34" charset="-120"/>
+                        </a:rPr>
+                        <a:t>—</a:t>
+                      </a:r>
+                      <a:endParaRPr lang="en-US" sz="1100" dirty="0">
+                        <a:latin typeface="Calibri" charset="0"/>
+                        <a:ea typeface="Calibri" charset="0"/>
+                        <a:cs typeface="Calibri" charset="0"/>
+                      </a:endParaRPr>
+                    </a:p>
+                  </a:txBody>
+                  <a:tcPr marL="91440" marR="91440" marT="45720" marB="45720" anchor="ctr">
+                    <a:lnL w="6350" cap="flat" cmpd="sng" algn="ctr">
+                      <a:solidFill>
+                        <a:srgbClr val="E9EEF5"/>
+                      </a:solidFill>
+                      <a:prstDash val="solid"/>
+                      <a:round/>
+                      <a:headEnd type="none" w="med" len="med"/>
+                      <a:tailEnd type="none" w="med" len="med"/>
+                    </a:lnL>
+                    <a:lnR w="6350" cap="flat" cmpd="sng" algn="ctr">
+                      <a:solidFill>
+                        <a:srgbClr val="E9EEF5"/>
+                      </a:solidFill>
+                      <a:prstDash val="solid"/>
+                      <a:round/>
+                      <a:headEnd type="none" w="med" len="med"/>
+                      <a:tailEnd type="none" w="med" len="med"/>
+                    </a:lnR>
+                    <a:lnT w="6350" cap="flat" cmpd="sng" algn="ctr">
+                      <a:solidFill>
+                        <a:srgbClr val="E9EEF5"/>
+                      </a:solidFill>
+                      <a:prstDash val="solid"/>
+                      <a:round/>
+                      <a:headEnd type="none" w="med" len="med"/>
+                      <a:tailEnd type="none" w="med" len="med"/>
+                    </a:lnT>
+                    <a:lnB w="6350" cap="flat" cmpd="sng" algn="ctr">
+                      <a:solidFill>
+                        <a:srgbClr val="E9EEF5"/>
+                      </a:solidFill>
+                      <a:prstDash val="solid"/>
+                      <a:round/>
+                      <a:headEnd type="none" w="med" len="med"/>
+                      <a:tailEnd type="none" w="med" len="med"/>
+                    </a:lnB>
+                  </a:tcPr>
+                </a:tc>
+                <a:tc>
+                  <a:txBody>
+                    <a:bodyPr/>
+                    <a:lstStyle/>
+                    <a:p>
+                      <a:pPr algn="ctr" indent="0" marL="0">
+                        <a:buNone/>
+                      </a:pPr>
+                      <a:r>
+                        <a:rPr lang="en-US" sz="1100" dirty="0">
+                          <a:solidFill>
+                            <a:srgbClr val="17233B"/>
+                          </a:solidFill>
+                          <a:latin typeface="Calibri" pitchFamily="34" charset="0"/>
+                          <a:ea typeface="Calibri" pitchFamily="34" charset="-122"/>
+                          <a:cs typeface="Calibri" pitchFamily="34" charset="-120"/>
+                        </a:rPr>
+                        <a:t>—</a:t>
+                      </a:r>
+                      <a:endParaRPr lang="en-US" sz="1100" dirty="0">
+                        <a:latin typeface="Calibri" charset="0"/>
+                        <a:ea typeface="Calibri" charset="0"/>
+                        <a:cs typeface="Calibri" charset="0"/>
+                      </a:endParaRPr>
+                    </a:p>
+                  </a:txBody>
+                  <a:tcPr marL="91440" marR="91440" marT="45720" marB="45720" anchor="ctr">
+                    <a:lnL w="6350" cap="flat" cmpd="sng" algn="ctr">
+                      <a:solidFill>
+                        <a:srgbClr val="E9EEF5"/>
+                      </a:solidFill>
+                      <a:prstDash val="solid"/>
+                      <a:round/>
+                      <a:headEnd type="none" w="med" len="med"/>
+                      <a:tailEnd type="none" w="med" len="med"/>
+                    </a:lnL>
+                    <a:lnR w="6350" cap="flat" cmpd="sng" algn="ctr">
+                      <a:solidFill>
+                        <a:srgbClr val="E9EEF5"/>
+                      </a:solidFill>
+                      <a:prstDash val="solid"/>
+                      <a:round/>
+                      <a:headEnd type="none" w="med" len="med"/>
+                      <a:tailEnd type="none" w="med" len="med"/>
+                    </a:lnR>
+                    <a:lnT w="6350" cap="flat" cmpd="sng" algn="ctr">
+                      <a:solidFill>
+                        <a:srgbClr val="E9EEF5"/>
+                      </a:solidFill>
+                      <a:prstDash val="solid"/>
+                      <a:round/>
+                      <a:headEnd type="none" w="med" len="med"/>
+                      <a:tailEnd type="none" w="med" len="med"/>
+                    </a:lnT>
+                    <a:lnB w="6350" cap="flat" cmpd="sng" algn="ctr">
+                      <a:solidFill>
+                        <a:srgbClr val="E9EEF5"/>
+                      </a:solidFill>
+                      <a:prstDash val="solid"/>
+                      <a:round/>
+                      <a:headEnd type="none" w="med" len="med"/>
+                      <a:tailEnd type="none" w="med" len="med"/>
+                    </a:lnB>
+                  </a:tcPr>
+                </a:tc>
+                <a:tc>
+                  <a:txBody>
+                    <a:bodyPr/>
+                    <a:lstStyle/>
+                    <a:p>
+                      <a:pPr algn="ctr" indent="0" marL="0">
+                        <a:buNone/>
+                      </a:pPr>
+                      <a:r>
+                        <a:rPr lang="en-US" sz="1050" b="1" dirty="0">
+                          <a:solidFill>
+                            <a:srgbClr val="16A34A"/>
+                          </a:solidFill>
+                          <a:latin typeface="Calibri" pitchFamily="34" charset="0"/>
+                          <a:ea typeface="Calibri" pitchFamily="34" charset="-122"/>
+                          <a:cs typeface="Calibri" pitchFamily="34" charset="-120"/>
+                        </a:rPr>
+                        <a:t>Ready</a:t>
+                      </a:r>
+                      <a:endParaRPr lang="en-US" sz="1050" dirty="0">
+                        <a:latin typeface="Calibri" charset="0"/>
+                        <a:ea typeface="Calibri" charset="0"/>
+                        <a:cs typeface="Calibri" charset="0"/>
+                      </a:endParaRPr>
+                    </a:p>
+                  </a:txBody>
+                  <a:tcPr marL="91440" marR="91440" marT="45720" marB="45720" anchor="ctr">
+                    <a:lnL w="6350" cap="flat" cmpd="sng" algn="ctr">
+                      <a:solidFill>
+                        <a:srgbClr val="E9EEF5"/>
+                      </a:solidFill>
+                      <a:prstDash val="solid"/>
+                      <a:round/>
+                      <a:headEnd type="none" w="med" len="med"/>
+                      <a:tailEnd type="none" w="med" len="med"/>
+                    </a:lnL>
+                    <a:lnR w="6350" cap="flat" cmpd="sng" algn="ctr">
+                      <a:solidFill>
+                        <a:srgbClr val="E9EEF5"/>
+                      </a:solidFill>
+                      <a:prstDash val="solid"/>
+                      <a:round/>
+                      <a:headEnd type="none" w="med" len="med"/>
+                      <a:tailEnd type="none" w="med" len="med"/>
+                    </a:lnR>
+                    <a:lnT w="6350" cap="flat" cmpd="sng" algn="ctr">
+                      <a:solidFill>
+                        <a:srgbClr val="E9EEF5"/>
+                      </a:solidFill>
+                      <a:prstDash val="solid"/>
+                      <a:round/>
+                      <a:headEnd type="none" w="med" len="med"/>
+                      <a:tailEnd type="none" w="med" len="med"/>
+                    </a:lnT>
+                    <a:lnB w="6350" cap="flat" cmpd="sng" algn="ctr">
+                      <a:solidFill>
+                        <a:srgbClr val="E9EEF5"/>
+                      </a:solidFill>
+                      <a:prstDash val="solid"/>
+                      <a:round/>
+                      <a:headEnd type="none" w="med" len="med"/>
+                      <a:tailEnd type="none" w="med" len="med"/>
+                    </a:lnB>
+                    <a:solidFill>
+                      <a:srgbClr val="DCFCE7"/>
+                    </a:solidFill>
+                  </a:tcPr>
+                </a:tc>
+              </a:tr>
+            </a:tbl>
+          </a:graphicData>
+        </a:graphic>
+      </p:graphicFrame>
+      <p:sp>
+        <p:nvSpPr>
+          <p:cNvPr id="20" name="Text 17"/>
+          <p:cNvSpPr/>
+          <p:nvPr/>
+        </p:nvSpPr>
+        <p:spPr>
+          <a:xfrm>
+            <a:off x="10067544" y="5148072"/>
+            <a:ext cx="1280160" cy="228600"/>
           </a:xfrm>
           <a:prstGeom prst="rect">
             <a:avLst/>
@@ -6116,11 +9023,50 @@
           <a:bodyPr wrap="square" rtlCol="0" anchor="ctr"/>
           <a:lstStyle/>
           <a:p>
+            <a:pPr algn="r" indent="0" marL="0">
+              <a:buNone/>
+            </a:pPr>
+            <a:r>
+              <a:rPr lang="en-US" sz="900" i="1" dirty="0">
+                <a:solidFill>
+                  <a:srgbClr val="9AA5B5"/>
+                </a:solidFill>
+                <a:latin typeface="Calibri" pitchFamily="34" charset="0"/>
+                <a:ea typeface="Calibri" pitchFamily="34" charset="-122"/>
+                <a:cs typeface="Calibri" pitchFamily="34" charset="-120"/>
+              </a:rPr>
+              <a:t>Sample report</a:t>
+            </a:r>
+            <a:endParaRPr lang="en-US" sz="900" dirty="0"/>
+          </a:p>
+        </p:txBody>
+      </p:sp>
+      <p:sp>
+        <p:nvSpPr>
+          <p:cNvPr id="21" name="Text 18"/>
+          <p:cNvSpPr/>
+          <p:nvPr/>
+        </p:nvSpPr>
+        <p:spPr>
+          <a:xfrm>
+            <a:off x="566928" y="5586984"/>
+            <a:ext cx="11064240" cy="457200"/>
+          </a:xfrm>
+          <a:prstGeom prst="rect">
+            <a:avLst/>
+          </a:prstGeom>
+          <a:noFill/>
+          <a:ln/>
+        </p:spPr>
+        <p:txBody>
+          <a:bodyPr wrap="square" rtlCol="0" anchor="ctr"/>
+          <a:lstStyle/>
+          <a:p>
             <a:pPr indent="0" marL="0">
               <a:buNone/>
             </a:pPr>
             <a:r>
-              <a:rPr lang="en-US" sz="1500" b="1" dirty="0">
+              <a:rPr lang="en-US" sz="1400" b="1" dirty="0">
                 <a:solidFill>
                   <a:srgbClr val="2563EB"/>
                 </a:solidFill>
@@ -6134,7 +9080,7 @@
               <a:buNone/>
             </a:pPr>
             <a:r>
-              <a:rPr lang="en-US" sz="1500" dirty="0">
+              <a:rPr lang="en-US" sz="1400" dirty="0">
                 <a:solidFill>
                   <a:srgbClr val="5B6B85"/>
                 </a:solidFill>
@@ -6142,115 +9088,9 @@
                 <a:ea typeface="Calibri" pitchFamily="34" charset="-122"/>
                 <a:cs typeface="Calibri" pitchFamily="34" charset="-120"/>
               </a:rPr>
-              <a:t>One report per release — grouped by module, worst first.</a:t>
-            </a:r>
-            <a:endParaRPr lang="en-US" sz="1500" dirty="0"/>
-          </a:p>
-        </p:txBody>
-      </p:sp>
-      <p:sp>
-        <p:nvSpPr>
-          <p:cNvPr id="17" name="Text 15"/>
-          <p:cNvSpPr/>
-          <p:nvPr/>
-        </p:nvSpPr>
-        <p:spPr>
-          <a:xfrm>
-            <a:off x="566928" y="4544568"/>
-            <a:ext cx="10972800" cy="457200"/>
-          </a:xfrm>
-          <a:prstGeom prst="rect">
-            <a:avLst/>
-          </a:prstGeom>
-          <a:noFill/>
-          <a:ln/>
-        </p:spPr>
-        <p:txBody>
-          <a:bodyPr wrap="square" rtlCol="0" anchor="ctr"/>
-          <a:lstStyle/>
-          <a:p>
-            <a:pPr indent="0" marL="0">
-              <a:buNone/>
-            </a:pPr>
-            <a:r>
-              <a:rPr lang="en-US" sz="1500" b="1" dirty="0">
-                <a:solidFill>
-                  <a:srgbClr val="2563EB"/>
-                </a:solidFill>
-                <a:latin typeface="Calibri" pitchFamily="34" charset="0"/>
-                <a:ea typeface="Calibri" pitchFamily="34" charset="-122"/>
-                <a:cs typeface="Calibri" pitchFamily="34" charset="-120"/>
-              </a:rPr>
-              <a:t>→   </a:t>
-            </a:r>
-            <a:pPr indent="0" marL="0">
-              <a:buNone/>
-            </a:pPr>
-            <a:r>
-              <a:rPr lang="en-US" sz="1500" dirty="0">
-                <a:solidFill>
-                  <a:srgbClr val="5B6B85"/>
-                </a:solidFill>
-                <a:latin typeface="Calibri" pitchFamily="34" charset="0"/>
-                <a:ea typeface="Calibri" pitchFamily="34" charset="-122"/>
-                <a:cs typeface="Calibri" pitchFamily="34" charset="-120"/>
-              </a:rPr>
-              <a:t>Each module shows tested / not tested / issues, with a clear status.</a:t>
-            </a:r>
-            <a:endParaRPr lang="en-US" sz="1500" dirty="0"/>
-          </a:p>
-        </p:txBody>
-      </p:sp>
-      <p:sp>
-        <p:nvSpPr>
-          <p:cNvPr id="18" name="Text 16"/>
-          <p:cNvSpPr/>
-          <p:nvPr/>
-        </p:nvSpPr>
-        <p:spPr>
-          <a:xfrm>
-            <a:off x="566928" y="5111496"/>
-            <a:ext cx="10972800" cy="457200"/>
-          </a:xfrm>
-          <a:prstGeom prst="rect">
-            <a:avLst/>
-          </a:prstGeom>
-          <a:noFill/>
-          <a:ln/>
-        </p:spPr>
-        <p:txBody>
-          <a:bodyPr wrap="square" rtlCol="0" anchor="ctr"/>
-          <a:lstStyle/>
-          <a:p>
-            <a:pPr indent="0" marL="0">
-              <a:buNone/>
-            </a:pPr>
-            <a:r>
-              <a:rPr lang="en-US" sz="1500" b="1" dirty="0">
-                <a:solidFill>
-                  <a:srgbClr val="2563EB"/>
-                </a:solidFill>
-                <a:latin typeface="Calibri" pitchFamily="34" charset="0"/>
-                <a:ea typeface="Calibri" pitchFamily="34" charset="-122"/>
-                <a:cs typeface="Calibri" pitchFamily="34" charset="-120"/>
-              </a:rPr>
-              <a:t>→   </a:t>
-            </a:r>
-            <a:pPr indent="0" marL="0">
-              <a:buNone/>
-            </a:pPr>
-            <a:r>
-              <a:rPr lang="en-US" sz="1500" dirty="0">
-                <a:solidFill>
-                  <a:srgbClr val="5B6B85"/>
-                </a:solidFill>
-                <a:latin typeface="Calibri" pitchFamily="34" charset="0"/>
-                <a:ea typeface="Calibri" pitchFamily="34" charset="-122"/>
-                <a:cs typeface="Calibri" pitchFamily="34" charset="-120"/>
-              </a:rPr>
-              <a:t>A shareable PDF — release sign-off from a single document.</a:t>
-            </a:r>
-            <a:endParaRPr lang="en-US" sz="1500" dirty="0"/>
+              <a:t>One shareable PDF — modules worst-first, each with tested / not-tested / issues and a Ready · Review · At-risk status.</a:t>
+            </a:r>
+            <a:endParaRPr lang="en-US" sz="1400" dirty="0"/>
           </a:p>
         </p:txBody>
       </p:sp>

--- a/docs/TraceGuard-Executive.pptx
+++ b/docs/TraceGuard-Executive.pptx
@@ -114,242 +114,6 @@
     </a:lvl9pPr>
   </p:defaultTextStyle>
 </p:presentation>
-</file>
-
-<file path=ppt/charts/chart1.xml><?xml version="1.0" encoding="utf-8"?>
-<c:chartSpace xmlns:c="http://schemas.openxmlformats.org/drawingml/2006/chart" xmlns:a="http://schemas.openxmlformats.org/drawingml/2006/main" xmlns:r="http://schemas.openxmlformats.org/officeDocument/2006/relationships">
-  <c:date1904 val="0"/>
-  <c:roundedCorners val="1"/>
-  <c:chart>
-    <c:autoTitleDeleted val="1"/>
-    <c:plotArea>
-      <c:layout/>
-      <c:barChart>
-        <c:barDir val="bar"/>
-        <c:grouping val="clustered"/>
-        <c:varyColors val="0"/>
-        <c:ser>
-          <c:idx val="0"/>
-          <c:order val="0"/>
-          <c:tx>
-            <c:strRef>
-              <c:f>Sheet1!$B$1</c:f>
-              <c:strCache>
-                <c:ptCount val="1"/>
-                <c:pt idx="0">
-                  <c:v>Failure %</c:v>
-                </c:pt>
-              </c:strCache>
-            </c:strRef>
-          </c:tx>
-          <c:spPr>
-            <a:solidFill>
-              <a:srgbClr val="2563EB"/>
-            </a:solidFill>
-            <a:effectLst/>
-          </c:spPr>
-          <c:invertIfNegative val="0"/>
-          <c:dLbls>
-            <c:numFmt formatCode="0&quot;%&quot;" sourceLinked="0"/>
-            <c:txPr>
-              <a:bodyPr/>
-              <a:lstStyle/>
-              <a:p>
-                <a:pPr>
-                  <a:defRPr b="0" i="0" strike="noStrike" sz="1100" u="none">
-                    <a:solidFill>
-                      <a:srgbClr val="17233B"/>
-                    </a:solidFill>
-                    <a:latin typeface="Calibri"/>
-                  </a:defRPr>
-                </a:pPr>
-              </a:p>
-            </c:txPr>
-            <c:showLegendKey val="0"/>
-            <c:showVal val="1"/>
-            <c:showCatName val="0"/>
-            <c:showSerName val="0"/>
-            <c:showPercent val="0"/>
-            <c:showBubbleSize val="0"/>
-            <c:showLeaderLines val="0"/>
-          </c:dLbls>
-          <c:cat>
-            <c:multiLvlStrRef>
-              <c:f>Sheet1!$A$2:$A$5</c:f>
-              <c:multiLvlStrCache>
-                <c:ptCount val="4"/>
-                <c:lvl>
-                  <c:pt idx="0">
-                    <c:v>HTTP 500</c:v>
-                  </c:pt>
-                  <c:pt idx="1">
-                    <c:v>HTTP 503</c:v>
-                  </c:pt>
-                  <c:pt idx="2">
-                    <c:v>Timeout</c:v>
-                  </c:pt>
-                  <c:pt idx="3">
-                    <c:v>HTTP 400</c:v>
-                  </c:pt>
-                </c:lvl>
-              </c:multiLvlStrCache>
-            </c:multiLvlStrRef>
-          </c:cat>
-          <c:val>
-            <c:numRef>
-              <c:f>Sheet1!$B$2:$B$5</c:f>
-              <c:numCache>
-                <c:formatCode>General</c:formatCode>
-                <c:ptCount val="4"/>
-                <c:pt idx="0">
-                  <c:v>42</c:v>
-                </c:pt>
-                <c:pt idx="1">
-                  <c:v>31</c:v>
-                </c:pt>
-                <c:pt idx="2">
-                  <c:v>18</c:v>
-                </c:pt>
-                <c:pt idx="3">
-                  <c:v>9</c:v>
-                </c:pt>
-              </c:numCache>
-            </c:numRef>
-          </c:val>
-        </c:ser>
-        <c:dLbls>
-          <c:numFmt formatCode="0&quot;%&quot;" sourceLinked="0"/>
-          <c:txPr>
-            <a:bodyPr/>
-            <a:lstStyle/>
-            <a:p>
-              <a:pPr>
-                <a:defRPr b="0" i="0" strike="noStrike" sz="1100" u="none">
-                  <a:solidFill>
-                    <a:srgbClr val="17233B"/>
-                  </a:solidFill>
-                  <a:latin typeface="Calibri"/>
-                </a:defRPr>
-              </a:pPr>
-            </a:p>
-          </c:txPr>
-          <c:showLegendKey val="0"/>
-          <c:showVal val="1"/>
-          <c:showCatName val="0"/>
-          <c:showSerName val="0"/>
-          <c:showPercent val="0"/>
-          <c:showBubbleSize val="0"/>
-          <c:showLeaderLines val="0"/>
-        </c:dLbls>
-        <c:gapWidth val="45"/>
-        <c:overlap val="0"/>
-        <c:axId val="2094734554"/>
-        <c:axId val="2094734552"/>
-        <c:axId val="2094734556"/>
-      </c:barChart>
-      <c:catAx>
-        <c:axId val="2094734554"/>
-        <c:scaling>
-          <c:orientation val="minMax"/>
-        </c:scaling>
-        <c:delete val="0"/>
-        <c:axPos val="l"/>
-        <c:numFmt formatCode="General" sourceLinked="1"/>
-        <c:majorTickMark val="out"/>
-        <c:minorTickMark val="none"/>
-        <c:tickLblPos val="nextTo"/>
-        <c:spPr>
-          <a:ln w="12700" cap="flat">
-            <a:solidFill>
-              <a:srgbClr val="888888"/>
-            </a:solidFill>
-            <a:prstDash val="solid"/>
-            <a:round/>
-          </a:ln>
-        </c:spPr>
-        <c:txPr>
-          <a:bodyPr/>
-          <a:lstStyle/>
-          <a:p>
-            <a:pPr>
-              <a:defRPr sz="1200" b="0" i="0" u="none" strike="noStrike">
-                <a:solidFill>
-                  <a:srgbClr val="5B6B85"/>
-                </a:solidFill>
-                <a:latin typeface="Calibri"/>
-              </a:defRPr>
-            </a:pPr>
-            <a:endParaRPr lang="en-US"/>
-          </a:p>
-        </c:txPr>
-        <c:crossAx val="2094734552"/>
-        <c:crosses val="autoZero"/>
-        <c:auto val="1"/>
-        <c:lblAlgn val="ctr"/>
-        <c:noMultiLvlLbl val="1"/>
-      </c:catAx>
-      <c:valAx>
-        <c:axId val="2094734552"/>
-        <c:scaling>
-          <c:orientation val="minMax"/>
-          <c:max val="50"/>
-        </c:scaling>
-        <c:delete val="1"/>
-        <c:axPos val="b"/>
-        <c:numFmt formatCode="General" sourceLinked="0"/>
-        <c:majorTickMark val="out"/>
-        <c:minorTickMark val="none"/>
-        <c:tickLblPos val="low"/>
-        <c:spPr>
-          <a:ln w="12700" cap="flat">
-            <a:solidFill>
-              <a:srgbClr val="888888"/>
-            </a:solidFill>
-            <a:prstDash val="solid"/>
-            <a:round/>
-          </a:ln>
-        </c:spPr>
-        <c:txPr>
-          <a:bodyPr/>
-          <a:lstStyle/>
-          <a:p>
-            <a:pPr>
-              <a:defRPr sz="1200" b="0" i="0" u="none" strike="noStrike">
-                <a:solidFill>
-                  <a:srgbClr val="000000"/>
-                </a:solidFill>
-                <a:latin typeface="Arial"/>
-              </a:defRPr>
-            </a:pPr>
-            <a:endParaRPr lang="en-US"/>
-          </a:p>
-        </c:txPr>
-        <c:crossAx val="2094734554"/>
-        <c:crosses val="autoZero"/>
-        <c:crossBetween val="between"/>
-      </c:valAx>
-      <c:spPr>
-        <a:noFill/>
-        <a:ln>
-          <a:noFill/>
-        </a:ln>
-        <a:effectLst/>
-      </c:spPr>
-    </c:plotArea>
-    <c:plotVisOnly val="1"/>
-    <c:dispBlanksAs val="span"/>
-  </c:chart>
-  <c:spPr>
-    <a:noFill/>
-    <a:ln>
-      <a:noFill/>
-    </a:ln>
-    <a:effectLst/>
-  </c:spPr>
-  <c:externalData r:id="rId1">
-    <c:autoUpdate val="0"/>
-  </c:externalData>
-</c:chartSpace>
 </file>
 
 <file path=ppt/notesMasters/notesMaster1.xml><?xml version="1.0" encoding="utf-8"?>
@@ -3242,22 +3006,22 @@
         </p:nvSpPr>
         <p:spPr>
           <a:xfrm>
-            <a:off x="566928" y="2057400"/>
-            <a:ext cx="1993392" cy="1280160"/>
+            <a:off x="566928" y="1783080"/>
+            <a:ext cx="11055096" cy="1874520"/>
           </a:xfrm>
           <a:prstGeom prst="roundRect">
             <a:avLst>
-              <a:gd name="adj" fmla="val 6429"/>
+              <a:gd name="adj" fmla="val 2439"/>
             </a:avLst>
           </a:prstGeom>
           <a:solidFill>
-            <a:srgbClr val="EFF6FF"/>
+            <a:srgbClr val="F7F9FC"/>
           </a:solidFill>
-          <a:ln w="12700">
+          <a:ln w="15875">
             <a:solidFill>
-              <a:srgbClr val="D7E0EE"/>
+              <a:srgbClr val="2563EB"/>
             </a:solidFill>
-            <a:prstDash val="solid"/>
+            <a:prstDash val="dash"/>
           </a:ln>
         </p:spPr>
       </p:sp>
@@ -3269,8 +3033,8 @@
         </p:nvSpPr>
         <p:spPr>
           <a:xfrm>
-            <a:off x="566928" y="2240280"/>
-            <a:ext cx="1993392" cy="548640"/>
+            <a:off x="841248" y="1783080"/>
+            <a:ext cx="10506456" cy="1874520"/>
           </a:xfrm>
           <a:prstGeom prst="rect">
             <a:avLst/>
@@ -3283,10 +3047,13 @@
           <a:lstStyle/>
           <a:p>
             <a:pPr algn="ctr" indent="0" marL="0">
-              <a:buNone/>
-            </a:pPr>
-            <a:r>
-              <a:rPr lang="en-US" sz="3000" b="1" dirty="0">
+              <a:lnSpc>
+                <a:spcPct val="130000"/>
+              </a:lnSpc>
+              <a:buNone/>
+            </a:pPr>
+            <a:r>
+              <a:rPr lang="en-US" sz="1500" b="1" dirty="0">
                 <a:solidFill>
                   <a:srgbClr val="2563EB"/>
                 </a:solidFill>
@@ -3294,669 +3061,75 @@
                 <a:ea typeface="Calibri" pitchFamily="34" charset="-122"/>
                 <a:cs typeface="Calibri" pitchFamily="34" charset="-120"/>
               </a:rPr>
-              <a:t>12</a:t>
-            </a:r>
-            <a:endParaRPr lang="en-US" sz="3000" dirty="0"/>
+              <a:t>Add screenshot</a:t>
+            </a:r>
+            <a:endParaRPr lang="en-US" sz="1500" dirty="0"/>
+          </a:p>
+          <a:p>
+            <a:pPr algn="ctr" indent="0" marL="0">
+              <a:lnSpc>
+                <a:spcPct val="130000"/>
+              </a:lnSpc>
+              <a:buNone/>
+            </a:pPr>
+            <a:r>
+              <a:rPr lang="en-US" sz="1300" b="1" dirty="0">
+                <a:solidFill>
+                  <a:srgbClr val="17233B"/>
+                </a:solidFill>
+                <a:latin typeface="Calibri" pitchFamily="34" charset="0"/>
+                <a:ea typeface="Calibri" pitchFamily="34" charset="-122"/>
+                <a:cs typeface="Calibri" pitchFamily="34" charset="-120"/>
+              </a:rPr>
+              <a:t>The “By module” view</a:t>
+            </a:r>
+            <a:endParaRPr lang="en-US" sz="1500" dirty="0"/>
+          </a:p>
+          <a:p>
+            <a:pPr algn="ctr" indent="0" marL="0">
+              <a:lnSpc>
+                <a:spcPct val="130000"/>
+              </a:lnSpc>
+              <a:buNone/>
+            </a:pPr>
+            <a:r>
+              <a:rPr lang="en-US" sz="1100" dirty="0">
+                <a:solidFill>
+                  <a:srgbClr val="5B6B85"/>
+                </a:solidFill>
+                <a:latin typeface="Calibri" pitchFamily="34" charset="0"/>
+                <a:ea typeface="Calibri" pitchFamily="34" charset="-122"/>
+                <a:cs typeface="Calibri" pitchFamily="34" charset="-120"/>
+              </a:rPr>
+              <a:t>Every module in scope for the release, each with its API count.</a:t>
+            </a:r>
+            <a:endParaRPr lang="en-US" sz="1500" dirty="0"/>
+          </a:p>
+          <a:p>
+            <a:pPr algn="ctr" indent="0" marL="0">
+              <a:lnSpc>
+                <a:spcPct val="130000"/>
+              </a:lnSpc>
+              <a:buNone/>
+            </a:pPr>
+            <a:r>
+              <a:rPr lang="en-US" sz="950" i="1" dirty="0">
+                <a:solidFill>
+                  <a:srgbClr val="9AA5B5"/>
+                </a:solidFill>
+                <a:latin typeface="Calibri" pitchFamily="34" charset="0"/>
+                <a:ea typeface="Calibri" pitchFamily="34" charset="-122"/>
+                <a:cs typeface="Calibri" pitchFamily="34" charset="-120"/>
+              </a:rPr>
+              <a:t>Insert › Picture, then drop it over this box (or right-click › Change Picture).</a:t>
+            </a:r>
+            <a:endParaRPr lang="en-US" sz="1500" dirty="0"/>
           </a:p>
         </p:txBody>
       </p:sp>
       <p:sp>
         <p:nvSpPr>
           <p:cNvPr id="6" name="Text 4"/>
-          <p:cNvSpPr/>
-          <p:nvPr/>
-        </p:nvSpPr>
-        <p:spPr>
-          <a:xfrm>
-            <a:off x="566928" y="2788920"/>
-            <a:ext cx="1993392" cy="274320"/>
-          </a:xfrm>
-          <a:prstGeom prst="rect">
-            <a:avLst/>
-          </a:prstGeom>
-          <a:noFill/>
-          <a:ln/>
-        </p:spPr>
-        <p:txBody>
-          <a:bodyPr wrap="square" rtlCol="0" anchor="ctr"/>
-          <a:lstStyle/>
-          <a:p>
-            <a:pPr algn="ctr" indent="0" marL="0">
-              <a:buNone/>
-            </a:pPr>
-            <a:r>
-              <a:rPr lang="en-US" sz="1050" dirty="0">
-                <a:solidFill>
-                  <a:srgbClr val="5B6B85"/>
-                </a:solidFill>
-                <a:latin typeface="Calibri" pitchFamily="34" charset="0"/>
-                <a:ea typeface="Calibri" pitchFamily="34" charset="-122"/>
-                <a:cs typeface="Calibri" pitchFamily="34" charset="-120"/>
-              </a:rPr>
-              <a:t>APIs in scope</a:t>
-            </a:r>
-            <a:endParaRPr lang="en-US" sz="1050" dirty="0"/>
-          </a:p>
-        </p:txBody>
-      </p:sp>
-      <p:sp>
-        <p:nvSpPr>
-          <p:cNvPr id="7" name="Text 5"/>
-          <p:cNvSpPr/>
-          <p:nvPr/>
-        </p:nvSpPr>
-        <p:spPr>
-          <a:xfrm>
-            <a:off x="566928" y="3035808"/>
-            <a:ext cx="1993392" cy="274320"/>
-          </a:xfrm>
-          <a:prstGeom prst="rect">
-            <a:avLst/>
-          </a:prstGeom>
-          <a:noFill/>
-          <a:ln/>
-        </p:spPr>
-        <p:txBody>
-          <a:bodyPr wrap="square" rtlCol="0" anchor="ctr"/>
-          <a:lstStyle/>
-          <a:p>
-            <a:pPr algn="ctr" indent="0" marL="0">
-              <a:buNone/>
-            </a:pPr>
-            <a:r>
-              <a:rPr lang="en-US" sz="1300" b="1" dirty="0">
-                <a:solidFill>
-                  <a:srgbClr val="17233B"/>
-                </a:solidFill>
-                <a:latin typeface="Calibri" pitchFamily="34" charset="0"/>
-                <a:ea typeface="Calibri" pitchFamily="34" charset="-122"/>
-                <a:cs typeface="Calibri" pitchFamily="34" charset="-120"/>
-              </a:rPr>
-              <a:t>Mighty</a:t>
-            </a:r>
-            <a:endParaRPr lang="en-US" sz="1300" dirty="0"/>
-          </a:p>
-        </p:txBody>
-      </p:sp>
-      <p:sp>
-        <p:nvSpPr>
-          <p:cNvPr id="8" name="Shape 6"/>
-          <p:cNvSpPr/>
-          <p:nvPr/>
-        </p:nvSpPr>
-        <p:spPr>
-          <a:xfrm>
-            <a:off x="2761488" y="2057400"/>
-            <a:ext cx="1993392" cy="1280160"/>
-          </a:xfrm>
-          <a:prstGeom prst="roundRect">
-            <a:avLst>
-              <a:gd name="adj" fmla="val 6429"/>
-            </a:avLst>
-          </a:prstGeom>
-          <a:solidFill>
-            <a:srgbClr val="EFF6FF"/>
-          </a:solidFill>
-          <a:ln w="12700">
-            <a:solidFill>
-              <a:srgbClr val="D7E0EE"/>
-            </a:solidFill>
-            <a:prstDash val="solid"/>
-          </a:ln>
-        </p:spPr>
-      </p:sp>
-      <p:sp>
-        <p:nvSpPr>
-          <p:cNvPr id="9" name="Text 7"/>
-          <p:cNvSpPr/>
-          <p:nvPr/>
-        </p:nvSpPr>
-        <p:spPr>
-          <a:xfrm>
-            <a:off x="2761488" y="2240280"/>
-            <a:ext cx="1993392" cy="548640"/>
-          </a:xfrm>
-          <a:prstGeom prst="rect">
-            <a:avLst/>
-          </a:prstGeom>
-          <a:noFill/>
-          <a:ln/>
-        </p:spPr>
-        <p:txBody>
-          <a:bodyPr wrap="square" rtlCol="0" anchor="ctr"/>
-          <a:lstStyle/>
-          <a:p>
-            <a:pPr algn="ctr" indent="0" marL="0">
-              <a:buNone/>
-            </a:pPr>
-            <a:r>
-              <a:rPr lang="en-US" sz="3000" b="1" dirty="0">
-                <a:solidFill>
-                  <a:srgbClr val="2563EB"/>
-                </a:solidFill>
-                <a:latin typeface="Calibri" pitchFamily="34" charset="0"/>
-                <a:ea typeface="Calibri" pitchFamily="34" charset="-122"/>
-                <a:cs typeface="Calibri" pitchFamily="34" charset="-120"/>
-              </a:rPr>
-              <a:t>10</a:t>
-            </a:r>
-            <a:endParaRPr lang="en-US" sz="3000" dirty="0"/>
-          </a:p>
-        </p:txBody>
-      </p:sp>
-      <p:sp>
-        <p:nvSpPr>
-          <p:cNvPr id="10" name="Text 8"/>
-          <p:cNvSpPr/>
-          <p:nvPr/>
-        </p:nvSpPr>
-        <p:spPr>
-          <a:xfrm>
-            <a:off x="2761488" y="2788920"/>
-            <a:ext cx="1993392" cy="274320"/>
-          </a:xfrm>
-          <a:prstGeom prst="rect">
-            <a:avLst/>
-          </a:prstGeom>
-          <a:noFill/>
-          <a:ln/>
-        </p:spPr>
-        <p:txBody>
-          <a:bodyPr wrap="square" rtlCol="0" anchor="ctr"/>
-          <a:lstStyle/>
-          <a:p>
-            <a:pPr algn="ctr" indent="0" marL="0">
-              <a:buNone/>
-            </a:pPr>
-            <a:r>
-              <a:rPr lang="en-US" sz="1050" dirty="0">
-                <a:solidFill>
-                  <a:srgbClr val="5B6B85"/>
-                </a:solidFill>
-                <a:latin typeface="Calibri" pitchFamily="34" charset="0"/>
-                <a:ea typeface="Calibri" pitchFamily="34" charset="-122"/>
-                <a:cs typeface="Calibri" pitchFamily="34" charset="-120"/>
-              </a:rPr>
-              <a:t>APIs in scope</a:t>
-            </a:r>
-            <a:endParaRPr lang="en-US" sz="1050" dirty="0"/>
-          </a:p>
-        </p:txBody>
-      </p:sp>
-      <p:sp>
-        <p:nvSpPr>
-          <p:cNvPr id="11" name="Text 9"/>
-          <p:cNvSpPr/>
-          <p:nvPr/>
-        </p:nvSpPr>
-        <p:spPr>
-          <a:xfrm>
-            <a:off x="2761488" y="3035808"/>
-            <a:ext cx="1993392" cy="274320"/>
-          </a:xfrm>
-          <a:prstGeom prst="rect">
-            <a:avLst/>
-          </a:prstGeom>
-          <a:noFill/>
-          <a:ln/>
-        </p:spPr>
-        <p:txBody>
-          <a:bodyPr wrap="square" rtlCol="0" anchor="ctr"/>
-          <a:lstStyle/>
-          <a:p>
-            <a:pPr algn="ctr" indent="0" marL="0">
-              <a:buNone/>
-            </a:pPr>
-            <a:r>
-              <a:rPr lang="en-US" sz="1300" b="1" dirty="0">
-                <a:solidFill>
-                  <a:srgbClr val="17233B"/>
-                </a:solidFill>
-                <a:latin typeface="Calibri" pitchFamily="34" charset="0"/>
-                <a:ea typeface="Calibri" pitchFamily="34" charset="-122"/>
-                <a:cs typeface="Calibri" pitchFamily="34" charset="-120"/>
-              </a:rPr>
-              <a:t>Onboarding</a:t>
-            </a:r>
-            <a:endParaRPr lang="en-US" sz="1300" dirty="0"/>
-          </a:p>
-        </p:txBody>
-      </p:sp>
-      <p:sp>
-        <p:nvSpPr>
-          <p:cNvPr id="12" name="Shape 10"/>
-          <p:cNvSpPr/>
-          <p:nvPr/>
-        </p:nvSpPr>
-        <p:spPr>
-          <a:xfrm>
-            <a:off x="4956048" y="2057400"/>
-            <a:ext cx="1993392" cy="1280160"/>
-          </a:xfrm>
-          <a:prstGeom prst="roundRect">
-            <a:avLst>
-              <a:gd name="adj" fmla="val 6429"/>
-            </a:avLst>
-          </a:prstGeom>
-          <a:solidFill>
-            <a:srgbClr val="EFF6FF"/>
-          </a:solidFill>
-          <a:ln w="12700">
-            <a:solidFill>
-              <a:srgbClr val="D7E0EE"/>
-            </a:solidFill>
-            <a:prstDash val="solid"/>
-          </a:ln>
-        </p:spPr>
-      </p:sp>
-      <p:sp>
-        <p:nvSpPr>
-          <p:cNvPr id="13" name="Text 11"/>
-          <p:cNvSpPr/>
-          <p:nvPr/>
-        </p:nvSpPr>
-        <p:spPr>
-          <a:xfrm>
-            <a:off x="4956048" y="2240280"/>
-            <a:ext cx="1993392" cy="548640"/>
-          </a:xfrm>
-          <a:prstGeom prst="rect">
-            <a:avLst/>
-          </a:prstGeom>
-          <a:noFill/>
-          <a:ln/>
-        </p:spPr>
-        <p:txBody>
-          <a:bodyPr wrap="square" rtlCol="0" anchor="ctr"/>
-          <a:lstStyle/>
-          <a:p>
-            <a:pPr algn="ctr" indent="0" marL="0">
-              <a:buNone/>
-            </a:pPr>
-            <a:r>
-              <a:rPr lang="en-US" sz="3000" b="1" dirty="0">
-                <a:solidFill>
-                  <a:srgbClr val="2563EB"/>
-                </a:solidFill>
-                <a:latin typeface="Calibri" pitchFamily="34" charset="0"/>
-                <a:ea typeface="Calibri" pitchFamily="34" charset="-122"/>
-                <a:cs typeface="Calibri" pitchFamily="34" charset="-120"/>
-              </a:rPr>
-              <a:t>14</a:t>
-            </a:r>
-            <a:endParaRPr lang="en-US" sz="3000" dirty="0"/>
-          </a:p>
-        </p:txBody>
-      </p:sp>
-      <p:sp>
-        <p:nvSpPr>
-          <p:cNvPr id="14" name="Text 12"/>
-          <p:cNvSpPr/>
-          <p:nvPr/>
-        </p:nvSpPr>
-        <p:spPr>
-          <a:xfrm>
-            <a:off x="4956048" y="2788920"/>
-            <a:ext cx="1993392" cy="274320"/>
-          </a:xfrm>
-          <a:prstGeom prst="rect">
-            <a:avLst/>
-          </a:prstGeom>
-          <a:noFill/>
-          <a:ln/>
-        </p:spPr>
-        <p:txBody>
-          <a:bodyPr wrap="square" rtlCol="0" anchor="ctr"/>
-          <a:lstStyle/>
-          <a:p>
-            <a:pPr algn="ctr" indent="0" marL="0">
-              <a:buNone/>
-            </a:pPr>
-            <a:r>
-              <a:rPr lang="en-US" sz="1050" dirty="0">
-                <a:solidFill>
-                  <a:srgbClr val="5B6B85"/>
-                </a:solidFill>
-                <a:latin typeface="Calibri" pitchFamily="34" charset="0"/>
-                <a:ea typeface="Calibri" pitchFamily="34" charset="-122"/>
-                <a:cs typeface="Calibri" pitchFamily="34" charset="-120"/>
-              </a:rPr>
-              <a:t>APIs in scope</a:t>
-            </a:r>
-            <a:endParaRPr lang="en-US" sz="1050" dirty="0"/>
-          </a:p>
-        </p:txBody>
-      </p:sp>
-      <p:sp>
-        <p:nvSpPr>
-          <p:cNvPr id="15" name="Text 13"/>
-          <p:cNvSpPr/>
-          <p:nvPr/>
-        </p:nvSpPr>
-        <p:spPr>
-          <a:xfrm>
-            <a:off x="4956048" y="3035808"/>
-            <a:ext cx="1993392" cy="274320"/>
-          </a:xfrm>
-          <a:prstGeom prst="rect">
-            <a:avLst/>
-          </a:prstGeom>
-          <a:noFill/>
-          <a:ln/>
-        </p:spPr>
-        <p:txBody>
-          <a:bodyPr wrap="square" rtlCol="0" anchor="ctr"/>
-          <a:lstStyle/>
-          <a:p>
-            <a:pPr algn="ctr" indent="0" marL="0">
-              <a:buNone/>
-            </a:pPr>
-            <a:r>
-              <a:rPr lang="en-US" sz="1300" b="1" dirty="0">
-                <a:solidFill>
-                  <a:srgbClr val="17233B"/>
-                </a:solidFill>
-                <a:latin typeface="Calibri" pitchFamily="34" charset="0"/>
-                <a:ea typeface="Calibri" pitchFamily="34" charset="-122"/>
-                <a:cs typeface="Calibri" pitchFamily="34" charset="-120"/>
-              </a:rPr>
-              <a:t>EDP</a:t>
-            </a:r>
-            <a:endParaRPr lang="en-US" sz="1300" dirty="0"/>
-          </a:p>
-        </p:txBody>
-      </p:sp>
-      <p:sp>
-        <p:nvSpPr>
-          <p:cNvPr id="16" name="Shape 14"/>
-          <p:cNvSpPr/>
-          <p:nvPr/>
-        </p:nvSpPr>
-        <p:spPr>
-          <a:xfrm>
-            <a:off x="7150608" y="2057400"/>
-            <a:ext cx="1993392" cy="1280160"/>
-          </a:xfrm>
-          <a:prstGeom prst="roundRect">
-            <a:avLst>
-              <a:gd name="adj" fmla="val 6429"/>
-            </a:avLst>
-          </a:prstGeom>
-          <a:solidFill>
-            <a:srgbClr val="EFF6FF"/>
-          </a:solidFill>
-          <a:ln w="12700">
-            <a:solidFill>
-              <a:srgbClr val="D7E0EE"/>
-            </a:solidFill>
-            <a:prstDash val="solid"/>
-          </a:ln>
-        </p:spPr>
-      </p:sp>
-      <p:sp>
-        <p:nvSpPr>
-          <p:cNvPr id="17" name="Text 15"/>
-          <p:cNvSpPr/>
-          <p:nvPr/>
-        </p:nvSpPr>
-        <p:spPr>
-          <a:xfrm>
-            <a:off x="7150608" y="2240280"/>
-            <a:ext cx="1993392" cy="548640"/>
-          </a:xfrm>
-          <a:prstGeom prst="rect">
-            <a:avLst/>
-          </a:prstGeom>
-          <a:noFill/>
-          <a:ln/>
-        </p:spPr>
-        <p:txBody>
-          <a:bodyPr wrap="square" rtlCol="0" anchor="ctr"/>
-          <a:lstStyle/>
-          <a:p>
-            <a:pPr algn="ctr" indent="0" marL="0">
-              <a:buNone/>
-            </a:pPr>
-            <a:r>
-              <a:rPr lang="en-US" sz="3000" b="1" dirty="0">
-                <a:solidFill>
-                  <a:srgbClr val="2563EB"/>
-                </a:solidFill>
-                <a:latin typeface="Calibri" pitchFamily="34" charset="0"/>
-                <a:ea typeface="Calibri" pitchFamily="34" charset="-122"/>
-                <a:cs typeface="Calibri" pitchFamily="34" charset="-120"/>
-              </a:rPr>
-              <a:t>18</a:t>
-            </a:r>
-            <a:endParaRPr lang="en-US" sz="3000" dirty="0"/>
-          </a:p>
-        </p:txBody>
-      </p:sp>
-      <p:sp>
-        <p:nvSpPr>
-          <p:cNvPr id="18" name="Text 16"/>
-          <p:cNvSpPr/>
-          <p:nvPr/>
-        </p:nvSpPr>
-        <p:spPr>
-          <a:xfrm>
-            <a:off x="7150608" y="2788920"/>
-            <a:ext cx="1993392" cy="274320"/>
-          </a:xfrm>
-          <a:prstGeom prst="rect">
-            <a:avLst/>
-          </a:prstGeom>
-          <a:noFill/>
-          <a:ln/>
-        </p:spPr>
-        <p:txBody>
-          <a:bodyPr wrap="square" rtlCol="0" anchor="ctr"/>
-          <a:lstStyle/>
-          <a:p>
-            <a:pPr algn="ctr" indent="0" marL="0">
-              <a:buNone/>
-            </a:pPr>
-            <a:r>
-              <a:rPr lang="en-US" sz="1050" dirty="0">
-                <a:solidFill>
-                  <a:srgbClr val="5B6B85"/>
-                </a:solidFill>
-                <a:latin typeface="Calibri" pitchFamily="34" charset="0"/>
-                <a:ea typeface="Calibri" pitchFamily="34" charset="-122"/>
-                <a:cs typeface="Calibri" pitchFamily="34" charset="-120"/>
-              </a:rPr>
-              <a:t>APIs in scope</a:t>
-            </a:r>
-            <a:endParaRPr lang="en-US" sz="1050" dirty="0"/>
-          </a:p>
-        </p:txBody>
-      </p:sp>
-      <p:sp>
-        <p:nvSpPr>
-          <p:cNvPr id="19" name="Text 17"/>
-          <p:cNvSpPr/>
-          <p:nvPr/>
-        </p:nvSpPr>
-        <p:spPr>
-          <a:xfrm>
-            <a:off x="7150608" y="3035808"/>
-            <a:ext cx="1993392" cy="274320"/>
-          </a:xfrm>
-          <a:prstGeom prst="rect">
-            <a:avLst/>
-          </a:prstGeom>
-          <a:noFill/>
-          <a:ln/>
-        </p:spPr>
-        <p:txBody>
-          <a:bodyPr wrap="square" rtlCol="0" anchor="ctr"/>
-          <a:lstStyle/>
-          <a:p>
-            <a:pPr algn="ctr" indent="0" marL="0">
-              <a:buNone/>
-            </a:pPr>
-            <a:r>
-              <a:rPr lang="en-US" sz="1300" b="1" dirty="0">
-                <a:solidFill>
-                  <a:srgbClr val="17233B"/>
-                </a:solidFill>
-                <a:latin typeface="Calibri" pitchFamily="34" charset="0"/>
-                <a:ea typeface="Calibri" pitchFamily="34" charset="-122"/>
-                <a:cs typeface="Calibri" pitchFamily="34" charset="-120"/>
-              </a:rPr>
-              <a:t>Wealth</a:t>
-            </a:r>
-            <a:endParaRPr lang="en-US" sz="1300" dirty="0"/>
-          </a:p>
-        </p:txBody>
-      </p:sp>
-      <p:sp>
-        <p:nvSpPr>
-          <p:cNvPr id="20" name="Shape 18"/>
-          <p:cNvSpPr/>
-          <p:nvPr/>
-        </p:nvSpPr>
-        <p:spPr>
-          <a:xfrm>
-            <a:off x="9345168" y="2057400"/>
-            <a:ext cx="1993392" cy="1280160"/>
-          </a:xfrm>
-          <a:prstGeom prst="roundRect">
-            <a:avLst>
-              <a:gd name="adj" fmla="val 6429"/>
-            </a:avLst>
-          </a:prstGeom>
-          <a:solidFill>
-            <a:srgbClr val="EFF6FF"/>
-          </a:solidFill>
-          <a:ln w="12700">
-            <a:solidFill>
-              <a:srgbClr val="D7E0EE"/>
-            </a:solidFill>
-            <a:prstDash val="solid"/>
-          </a:ln>
-        </p:spPr>
-      </p:sp>
-      <p:sp>
-        <p:nvSpPr>
-          <p:cNvPr id="21" name="Text 19"/>
-          <p:cNvSpPr/>
-          <p:nvPr/>
-        </p:nvSpPr>
-        <p:spPr>
-          <a:xfrm>
-            <a:off x="9345168" y="2240280"/>
-            <a:ext cx="1993392" cy="548640"/>
-          </a:xfrm>
-          <a:prstGeom prst="rect">
-            <a:avLst/>
-          </a:prstGeom>
-          <a:noFill/>
-          <a:ln/>
-        </p:spPr>
-        <p:txBody>
-          <a:bodyPr wrap="square" rtlCol="0" anchor="ctr"/>
-          <a:lstStyle/>
-          <a:p>
-            <a:pPr algn="ctr" indent="0" marL="0">
-              <a:buNone/>
-            </a:pPr>
-            <a:r>
-              <a:rPr lang="en-US" sz="3000" b="1" dirty="0">
-                <a:solidFill>
-                  <a:srgbClr val="2563EB"/>
-                </a:solidFill>
-                <a:latin typeface="Calibri" pitchFamily="34" charset="0"/>
-                <a:ea typeface="Calibri" pitchFamily="34" charset="-122"/>
-                <a:cs typeface="Calibri" pitchFamily="34" charset="-120"/>
-              </a:rPr>
-              <a:t>8</a:t>
-            </a:r>
-            <a:endParaRPr lang="en-US" sz="3000" dirty="0"/>
-          </a:p>
-        </p:txBody>
-      </p:sp>
-      <p:sp>
-        <p:nvSpPr>
-          <p:cNvPr id="22" name="Text 20"/>
-          <p:cNvSpPr/>
-          <p:nvPr/>
-        </p:nvSpPr>
-        <p:spPr>
-          <a:xfrm>
-            <a:off x="9345168" y="2788920"/>
-            <a:ext cx="1993392" cy="274320"/>
-          </a:xfrm>
-          <a:prstGeom prst="rect">
-            <a:avLst/>
-          </a:prstGeom>
-          <a:noFill/>
-          <a:ln/>
-        </p:spPr>
-        <p:txBody>
-          <a:bodyPr wrap="square" rtlCol="0" anchor="ctr"/>
-          <a:lstStyle/>
-          <a:p>
-            <a:pPr algn="ctr" indent="0" marL="0">
-              <a:buNone/>
-            </a:pPr>
-            <a:r>
-              <a:rPr lang="en-US" sz="1050" dirty="0">
-                <a:solidFill>
-                  <a:srgbClr val="5B6B85"/>
-                </a:solidFill>
-                <a:latin typeface="Calibri" pitchFamily="34" charset="0"/>
-                <a:ea typeface="Calibri" pitchFamily="34" charset="-122"/>
-                <a:cs typeface="Calibri" pitchFamily="34" charset="-120"/>
-              </a:rPr>
-              <a:t>APIs in scope</a:t>
-            </a:r>
-            <a:endParaRPr lang="en-US" sz="1050" dirty="0"/>
-          </a:p>
-        </p:txBody>
-      </p:sp>
-      <p:sp>
-        <p:nvSpPr>
-          <p:cNvPr id="23" name="Text 21"/>
-          <p:cNvSpPr/>
-          <p:nvPr/>
-        </p:nvSpPr>
-        <p:spPr>
-          <a:xfrm>
-            <a:off x="9345168" y="3035808"/>
-            <a:ext cx="1993392" cy="274320"/>
-          </a:xfrm>
-          <a:prstGeom prst="rect">
-            <a:avLst/>
-          </a:prstGeom>
-          <a:noFill/>
-          <a:ln/>
-        </p:spPr>
-        <p:txBody>
-          <a:bodyPr wrap="square" rtlCol="0" anchor="ctr"/>
-          <a:lstStyle/>
-          <a:p>
-            <a:pPr algn="ctr" indent="0" marL="0">
-              <a:buNone/>
-            </a:pPr>
-            <a:r>
-              <a:rPr lang="en-US" sz="1300" b="1" dirty="0">
-                <a:solidFill>
-                  <a:srgbClr val="17233B"/>
-                </a:solidFill>
-                <a:latin typeface="Calibri" pitchFamily="34" charset="0"/>
-                <a:ea typeface="Calibri" pitchFamily="34" charset="-122"/>
-                <a:cs typeface="Calibri" pitchFamily="34" charset="-120"/>
-              </a:rPr>
-              <a:t>Secure</a:t>
-            </a:r>
-            <a:endParaRPr lang="en-US" sz="1300" dirty="0"/>
-          </a:p>
-        </p:txBody>
-      </p:sp>
-      <p:sp>
-        <p:nvSpPr>
-          <p:cNvPr id="24" name="Text 22"/>
           <p:cNvSpPr/>
           <p:nvPr/>
         </p:nvSpPr>
@@ -4009,7 +3182,7 @@
       </p:sp>
       <p:sp>
         <p:nvSpPr>
-          <p:cNvPr id="25" name="Text 23"/>
+          <p:cNvPr id="7" name="Text 5"/>
           <p:cNvSpPr/>
           <p:nvPr/>
         </p:nvSpPr>
@@ -4062,7 +3235,7 @@
       </p:sp>
       <p:sp>
         <p:nvSpPr>
-          <p:cNvPr id="26" name="Text 24"/>
+          <p:cNvPr id="8" name="Text 6"/>
           <p:cNvSpPr/>
           <p:nvPr/>
         </p:nvSpPr>
@@ -4231,22 +3404,22 @@
         </p:nvSpPr>
         <p:spPr>
           <a:xfrm>
-            <a:off x="566928" y="2148840"/>
-            <a:ext cx="3108960" cy="1143000"/>
+            <a:off x="566928" y="1965960"/>
+            <a:ext cx="11055096" cy="1874520"/>
           </a:xfrm>
           <a:prstGeom prst="roundRect">
             <a:avLst>
-              <a:gd name="adj" fmla="val 7200"/>
+              <a:gd name="adj" fmla="val 2439"/>
             </a:avLst>
           </a:prstGeom>
           <a:solidFill>
-            <a:srgbClr val="FFFFFF"/>
+            <a:srgbClr val="F7F9FC"/>
           </a:solidFill>
-          <a:ln w="25400">
+          <a:ln w="15875">
             <a:solidFill>
               <a:srgbClr val="2563EB"/>
             </a:solidFill>
-            <a:prstDash val="solid"/>
+            <a:prstDash val="dash"/>
           </a:ln>
         </p:spPr>
       </p:sp>
@@ -4258,8 +3431,8 @@
         </p:nvSpPr>
         <p:spPr>
           <a:xfrm>
-            <a:off x="749808" y="2350008"/>
-            <a:ext cx="2743200" cy="365760"/>
+            <a:off x="841248" y="1965960"/>
+            <a:ext cx="10506456" cy="1874520"/>
           </a:xfrm>
           <a:prstGeom prst="rect">
             <a:avLst/>
@@ -4271,11 +3444,34 @@
           <a:bodyPr wrap="square" rtlCol="0" anchor="ctr"/>
           <a:lstStyle/>
           <a:p>
-            <a:pPr indent="0" marL="0">
-              <a:buNone/>
-            </a:pPr>
-            <a:r>
-              <a:rPr lang="en-US" sz="1600" b="1" dirty="0">
+            <a:pPr algn="ctr" indent="0" marL="0">
+              <a:lnSpc>
+                <a:spcPct val="130000"/>
+              </a:lnSpc>
+              <a:buNone/>
+            </a:pPr>
+            <a:r>
+              <a:rPr lang="en-US" sz="1500" b="1" dirty="0">
+                <a:solidFill>
+                  <a:srgbClr val="2563EB"/>
+                </a:solidFill>
+                <a:latin typeface="Calibri" pitchFamily="34" charset="0"/>
+                <a:ea typeface="Calibri" pitchFamily="34" charset="-122"/>
+                <a:cs typeface="Calibri" pitchFamily="34" charset="-120"/>
+              </a:rPr>
+              <a:t>Add screenshot</a:t>
+            </a:r>
+            <a:endParaRPr lang="en-US" sz="1500" dirty="0"/>
+          </a:p>
+          <a:p>
+            <a:pPr algn="ctr" indent="0" marL="0">
+              <a:lnSpc>
+                <a:spcPct val="130000"/>
+              </a:lnSpc>
+              <a:buNone/>
+            </a:pPr>
+            <a:r>
+              <a:rPr lang="en-US" sz="1300" b="1" dirty="0">
                 <a:solidFill>
                   <a:srgbClr val="17233B"/>
                 </a:solidFill>
@@ -4283,342 +3479,55 @@
                 <a:ea typeface="Calibri" pitchFamily="34" charset="-122"/>
                 <a:cs typeface="Calibri" pitchFamily="34" charset="-120"/>
               </a:rPr>
-              <a:t>Front-end API</a:t>
-            </a:r>
-            <a:endParaRPr lang="en-US" sz="1600" dirty="0"/>
+              <a:t>The route graph</a:t>
+            </a:r>
+            <a:endParaRPr lang="en-US" sz="1500" dirty="0"/>
+          </a:p>
+          <a:p>
+            <a:pPr algn="ctr" indent="0" marL="0">
+              <a:lnSpc>
+                <a:spcPct val="130000"/>
+              </a:lnSpc>
+              <a:buNone/>
+            </a:pPr>
+            <a:r>
+              <a:rPr lang="en-US" sz="1100" dirty="0">
+                <a:solidFill>
+                  <a:srgbClr val="5B6B85"/>
+                </a:solidFill>
+                <a:latin typeface="Calibri" pitchFamily="34" charset="0"/>
+                <a:ea typeface="Calibri" pitchFamily="34" charset="-122"/>
+                <a:cs typeface="Calibri" pitchFamily="34" charset="-120"/>
+              </a:rPr>
+              <a:t>Front-end API → internal routes → backend service, as an interactive graph.</a:t>
+            </a:r>
+            <a:endParaRPr lang="en-US" sz="1500" dirty="0"/>
+          </a:p>
+          <a:p>
+            <a:pPr algn="ctr" indent="0" marL="0">
+              <a:lnSpc>
+                <a:spcPct val="130000"/>
+              </a:lnSpc>
+              <a:buNone/>
+            </a:pPr>
+            <a:r>
+              <a:rPr lang="en-US" sz="950" i="1" dirty="0">
+                <a:solidFill>
+                  <a:srgbClr val="9AA5B5"/>
+                </a:solidFill>
+                <a:latin typeface="Calibri" pitchFamily="34" charset="0"/>
+                <a:ea typeface="Calibri" pitchFamily="34" charset="-122"/>
+                <a:cs typeface="Calibri" pitchFamily="34" charset="-120"/>
+              </a:rPr>
+              <a:t>Insert › Picture, then drop it over this box (or right-click › Change Picture).</a:t>
+            </a:r>
+            <a:endParaRPr lang="en-US" sz="1500" dirty="0"/>
           </a:p>
         </p:txBody>
       </p:sp>
       <p:sp>
         <p:nvSpPr>
           <p:cNvPr id="6" name="Text 4"/>
-          <p:cNvSpPr/>
-          <p:nvPr/>
-        </p:nvSpPr>
-        <p:spPr>
-          <a:xfrm>
-            <a:off x="749808" y="2770632"/>
-            <a:ext cx="2743200" cy="365760"/>
-          </a:xfrm>
-          <a:prstGeom prst="rect">
-            <a:avLst/>
-          </a:prstGeom>
-          <a:noFill/>
-          <a:ln/>
-        </p:spPr>
-        <p:txBody>
-          <a:bodyPr wrap="square" rtlCol="0" anchor="ctr"/>
-          <a:lstStyle/>
-          <a:p>
-            <a:pPr indent="0" marL="0">
-              <a:buNone/>
-            </a:pPr>
-            <a:r>
-              <a:rPr lang="en-US" sz="1250" dirty="0">
-                <a:solidFill>
-                  <a:srgbClr val="5B6B85"/>
-                </a:solidFill>
-                <a:latin typeface="Calibri" pitchFamily="34" charset="0"/>
-                <a:ea typeface="Calibri" pitchFamily="34" charset="-122"/>
-                <a:cs typeface="Calibri" pitchFamily="34" charset="-120"/>
-              </a:rPr>
-              <a:t>/services/get/fetch</a:t>
-            </a:r>
-            <a:endParaRPr lang="en-US" sz="1250" dirty="0"/>
-          </a:p>
-        </p:txBody>
-      </p:sp>
-      <p:sp>
-        <p:nvSpPr>
-          <p:cNvPr id="7" name="Text 5"/>
-          <p:cNvSpPr/>
-          <p:nvPr/>
-        </p:nvSpPr>
-        <p:spPr>
-          <a:xfrm>
-            <a:off x="3721608" y="2468880"/>
-            <a:ext cx="822960" cy="457200"/>
-          </a:xfrm>
-          <a:prstGeom prst="rect">
-            <a:avLst/>
-          </a:prstGeom>
-          <a:noFill/>
-          <a:ln/>
-        </p:spPr>
-        <p:txBody>
-          <a:bodyPr wrap="square" rtlCol="0" anchor="ctr"/>
-          <a:lstStyle/>
-          <a:p>
-            <a:pPr algn="ctr" indent="0" marL="0">
-              <a:buNone/>
-            </a:pPr>
-            <a:r>
-              <a:rPr lang="en-US" sz="2400" b="1" dirty="0">
-                <a:solidFill>
-                  <a:srgbClr val="2563EB"/>
-                </a:solidFill>
-                <a:latin typeface="Calibri" pitchFamily="34" charset="0"/>
-                <a:ea typeface="Calibri" pitchFamily="34" charset="-122"/>
-                <a:cs typeface="Calibri" pitchFamily="34" charset="-120"/>
-              </a:rPr>
-              <a:t>➜</a:t>
-            </a:r>
-            <a:endParaRPr lang="en-US" sz="2400" dirty="0"/>
-          </a:p>
-        </p:txBody>
-      </p:sp>
-      <p:sp>
-        <p:nvSpPr>
-          <p:cNvPr id="8" name="Shape 6"/>
-          <p:cNvSpPr/>
-          <p:nvPr/>
-        </p:nvSpPr>
-        <p:spPr>
-          <a:xfrm>
-            <a:off x="4590288" y="2148840"/>
-            <a:ext cx="3108960" cy="1143000"/>
-          </a:xfrm>
-          <a:prstGeom prst="roundRect">
-            <a:avLst>
-              <a:gd name="adj" fmla="val 7200"/>
-            </a:avLst>
-          </a:prstGeom>
-          <a:solidFill>
-            <a:srgbClr val="FFFFFF"/>
-          </a:solidFill>
-          <a:ln w="25400">
-            <a:solidFill>
-              <a:srgbClr val="0F766E"/>
-            </a:solidFill>
-            <a:prstDash val="solid"/>
-          </a:ln>
-        </p:spPr>
-      </p:sp>
-      <p:sp>
-        <p:nvSpPr>
-          <p:cNvPr id="9" name="Text 7"/>
-          <p:cNvSpPr/>
-          <p:nvPr/>
-        </p:nvSpPr>
-        <p:spPr>
-          <a:xfrm>
-            <a:off x="4773168" y="2350008"/>
-            <a:ext cx="2743200" cy="365760"/>
-          </a:xfrm>
-          <a:prstGeom prst="rect">
-            <a:avLst/>
-          </a:prstGeom>
-          <a:noFill/>
-          <a:ln/>
-        </p:spPr>
-        <p:txBody>
-          <a:bodyPr wrap="square" rtlCol="0" anchor="ctr"/>
-          <a:lstStyle/>
-          <a:p>
-            <a:pPr indent="0" marL="0">
-              <a:buNone/>
-            </a:pPr>
-            <a:r>
-              <a:rPr lang="en-US" sz="1600" b="1" dirty="0">
-                <a:solidFill>
-                  <a:srgbClr val="17233B"/>
-                </a:solidFill>
-                <a:latin typeface="Calibri" pitchFamily="34" charset="0"/>
-                <a:ea typeface="Calibri" pitchFamily="34" charset="-122"/>
-                <a:cs typeface="Calibri" pitchFamily="34" charset="-120"/>
-              </a:rPr>
-              <a:t>Internal routes</a:t>
-            </a:r>
-            <a:endParaRPr lang="en-US" sz="1600" dirty="0"/>
-          </a:p>
-        </p:txBody>
-      </p:sp>
-      <p:sp>
-        <p:nvSpPr>
-          <p:cNvPr id="10" name="Text 8"/>
-          <p:cNvSpPr/>
-          <p:nvPr/>
-        </p:nvSpPr>
-        <p:spPr>
-          <a:xfrm>
-            <a:off x="4773168" y="2770632"/>
-            <a:ext cx="2743200" cy="365760"/>
-          </a:xfrm>
-          <a:prstGeom prst="rect">
-            <a:avLst/>
-          </a:prstGeom>
-          <a:noFill/>
-          <a:ln/>
-        </p:spPr>
-        <p:txBody>
-          <a:bodyPr wrap="square" rtlCol="0" anchor="ctr"/>
-          <a:lstStyle/>
-          <a:p>
-            <a:pPr indent="0" marL="0">
-              <a:buNone/>
-            </a:pPr>
-            <a:r>
-              <a:rPr lang="en-US" sz="1250" dirty="0">
-                <a:solidFill>
-                  <a:srgbClr val="5B6B85"/>
-                </a:solidFill>
-                <a:latin typeface="Calibri" pitchFamily="34" charset="0"/>
-                <a:ea typeface="Calibri" pitchFamily="34" charset="-122"/>
-                <a:cs typeface="Calibri" pitchFamily="34" charset="-120"/>
-              </a:rPr>
-              <a:t>resolved for the release</a:t>
-            </a:r>
-            <a:endParaRPr lang="en-US" sz="1250" dirty="0"/>
-          </a:p>
-        </p:txBody>
-      </p:sp>
-      <p:sp>
-        <p:nvSpPr>
-          <p:cNvPr id="11" name="Text 9"/>
-          <p:cNvSpPr/>
-          <p:nvPr/>
-        </p:nvSpPr>
-        <p:spPr>
-          <a:xfrm>
-            <a:off x="7744968" y="2468880"/>
-            <a:ext cx="822960" cy="457200"/>
-          </a:xfrm>
-          <a:prstGeom prst="rect">
-            <a:avLst/>
-          </a:prstGeom>
-          <a:noFill/>
-          <a:ln/>
-        </p:spPr>
-        <p:txBody>
-          <a:bodyPr wrap="square" rtlCol="0" anchor="ctr"/>
-          <a:lstStyle/>
-          <a:p>
-            <a:pPr algn="ctr" indent="0" marL="0">
-              <a:buNone/>
-            </a:pPr>
-            <a:r>
-              <a:rPr lang="en-US" sz="2400" b="1" dirty="0">
-                <a:solidFill>
-                  <a:srgbClr val="2563EB"/>
-                </a:solidFill>
-                <a:latin typeface="Calibri" pitchFamily="34" charset="0"/>
-                <a:ea typeface="Calibri" pitchFamily="34" charset="-122"/>
-                <a:cs typeface="Calibri" pitchFamily="34" charset="-120"/>
-              </a:rPr>
-              <a:t>➜</a:t>
-            </a:r>
-            <a:endParaRPr lang="en-US" sz="2400" dirty="0"/>
-          </a:p>
-        </p:txBody>
-      </p:sp>
-      <p:sp>
-        <p:nvSpPr>
-          <p:cNvPr id="12" name="Shape 10"/>
-          <p:cNvSpPr/>
-          <p:nvPr/>
-        </p:nvSpPr>
-        <p:spPr>
-          <a:xfrm>
-            <a:off x="8613648" y="2148840"/>
-            <a:ext cx="3108960" cy="1143000"/>
-          </a:xfrm>
-          <a:prstGeom prst="roundRect">
-            <a:avLst>
-              <a:gd name="adj" fmla="val 7200"/>
-            </a:avLst>
-          </a:prstGeom>
-          <a:solidFill>
-            <a:srgbClr val="FFFFFF"/>
-          </a:solidFill>
-          <a:ln w="25400">
-            <a:solidFill>
-              <a:srgbClr val="D97706"/>
-            </a:solidFill>
-            <a:prstDash val="solid"/>
-          </a:ln>
-        </p:spPr>
-      </p:sp>
-      <p:sp>
-        <p:nvSpPr>
-          <p:cNvPr id="13" name="Text 11"/>
-          <p:cNvSpPr/>
-          <p:nvPr/>
-        </p:nvSpPr>
-        <p:spPr>
-          <a:xfrm>
-            <a:off x="8796528" y="2350008"/>
-            <a:ext cx="2743200" cy="365760"/>
-          </a:xfrm>
-          <a:prstGeom prst="rect">
-            <a:avLst/>
-          </a:prstGeom>
-          <a:noFill/>
-          <a:ln/>
-        </p:spPr>
-        <p:txBody>
-          <a:bodyPr wrap="square" rtlCol="0" anchor="ctr"/>
-          <a:lstStyle/>
-          <a:p>
-            <a:pPr indent="0" marL="0">
-              <a:buNone/>
-            </a:pPr>
-            <a:r>
-              <a:rPr lang="en-US" sz="1600" b="1" dirty="0">
-                <a:solidFill>
-                  <a:srgbClr val="17233B"/>
-                </a:solidFill>
-                <a:latin typeface="Calibri" pitchFamily="34" charset="0"/>
-                <a:ea typeface="Calibri" pitchFamily="34" charset="-122"/>
-                <a:cs typeface="Calibri" pitchFamily="34" charset="-120"/>
-              </a:rPr>
-              <a:t>Backend service</a:t>
-            </a:r>
-            <a:endParaRPr lang="en-US" sz="1600" dirty="0"/>
-          </a:p>
-        </p:txBody>
-      </p:sp>
-      <p:sp>
-        <p:nvSpPr>
-          <p:cNvPr id="14" name="Text 12"/>
-          <p:cNvSpPr/>
-          <p:nvPr/>
-        </p:nvSpPr>
-        <p:spPr>
-          <a:xfrm>
-            <a:off x="8796528" y="2770632"/>
-            <a:ext cx="2743200" cy="365760"/>
-          </a:xfrm>
-          <a:prstGeom prst="rect">
-            <a:avLst/>
-          </a:prstGeom>
-          <a:noFill/>
-          <a:ln/>
-        </p:spPr>
-        <p:txBody>
-          <a:bodyPr wrap="square" rtlCol="0" anchor="ctr"/>
-          <a:lstStyle/>
-          <a:p>
-            <a:pPr indent="0" marL="0">
-              <a:buNone/>
-            </a:pPr>
-            <a:r>
-              <a:rPr lang="en-US" sz="1250" dirty="0">
-                <a:solidFill>
-                  <a:srgbClr val="5B6B85"/>
-                </a:solidFill>
-                <a:latin typeface="Calibri" pitchFamily="34" charset="0"/>
-                <a:ea typeface="Calibri" pitchFamily="34" charset="-122"/>
-                <a:cs typeface="Calibri" pitchFamily="34" charset="-120"/>
-              </a:rPr>
-              <a:t>svc 2.2</a:t>
-            </a:r>
-            <a:endParaRPr lang="en-US" sz="1250" dirty="0"/>
-          </a:p>
-        </p:txBody>
-      </p:sp>
-      <p:sp>
-        <p:nvSpPr>
-          <p:cNvPr id="15" name="Text 13"/>
           <p:cNvSpPr/>
           <p:nvPr/>
         </p:nvSpPr>
@@ -4671,7 +3580,7 @@
       </p:sp>
       <p:sp>
         <p:nvSpPr>
-          <p:cNvPr id="16" name="Text 14"/>
+          <p:cNvPr id="7" name="Text 5"/>
           <p:cNvSpPr/>
           <p:nvPr/>
         </p:nvSpPr>
@@ -4724,7 +3633,7 @@
       </p:sp>
       <p:sp>
         <p:nvSpPr>
-          <p:cNvPr id="17" name="Text 15"/>
+          <p:cNvPr id="8" name="Text 6"/>
           <p:cNvSpPr/>
           <p:nvPr/>
         </p:nvSpPr>
@@ -5288,30 +4197,23 @@
         </p:nvSpPr>
         <p:spPr>
           <a:xfrm>
-            <a:off x="6720840" y="2468880"/>
-            <a:ext cx="4901184" cy="2514600"/>
+            <a:off x="6720840" y="2286000"/>
+            <a:ext cx="4901184" cy="2788920"/>
           </a:xfrm>
           <a:prstGeom prst="roundRect">
             <a:avLst>
-              <a:gd name="adj" fmla="val 2182"/>
+              <a:gd name="adj" fmla="val 1639"/>
             </a:avLst>
           </a:prstGeom>
           <a:solidFill>
-            <a:srgbClr val="FFFFFF"/>
+            <a:srgbClr val="F7F9FC"/>
           </a:solidFill>
-          <a:ln w="12700">
+          <a:ln w="15875">
             <a:solidFill>
-              <a:srgbClr val="D7E0EE"/>
+              <a:srgbClr val="2563EB"/>
             </a:solidFill>
-            <a:prstDash val="solid"/>
+            <a:prstDash val="dash"/>
           </a:ln>
-          <a:effectLst>
-            <a:outerShdw sx="100000" sy="100000" kx="0" ky="0" algn="bl" rotWithShape="0" blurRad="152400" dist="25400" dir="5400000">
-              <a:srgbClr val="0B1020">
-                <a:alpha val="9000"/>
-              </a:srgbClr>
-            </a:outerShdw>
-          </a:effectLst>
         </p:spPr>
       </p:sp>
       <p:sp>
@@ -5322,8 +4224,8 @@
         </p:nvSpPr>
         <p:spPr>
           <a:xfrm>
-            <a:off x="7013448" y="2706624"/>
-            <a:ext cx="2980944" cy="320040"/>
+            <a:off x="6995160" y="2286000"/>
+            <a:ext cx="4352544" cy="2788920"/>
           </a:xfrm>
           <a:prstGeom prst="rect">
             <a:avLst/>
@@ -5335,11 +4237,34 @@
           <a:bodyPr wrap="square" rtlCol="0" anchor="ctr"/>
           <a:lstStyle/>
           <a:p>
-            <a:pPr indent="0" marL="0">
-              <a:buNone/>
-            </a:pPr>
-            <a:r>
-              <a:rPr lang="en-US" sz="1400" b="1" dirty="0">
+            <a:pPr algn="ctr" indent="0" marL="0">
+              <a:lnSpc>
+                <a:spcPct val="130000"/>
+              </a:lnSpc>
+              <a:buNone/>
+            </a:pPr>
+            <a:r>
+              <a:rPr lang="en-US" sz="1500" b="1" dirty="0">
+                <a:solidFill>
+                  <a:srgbClr val="2563EB"/>
+                </a:solidFill>
+                <a:latin typeface="Calibri" pitchFamily="34" charset="0"/>
+                <a:ea typeface="Calibri" pitchFamily="34" charset="-122"/>
+                <a:cs typeface="Calibri" pitchFamily="34" charset="-120"/>
+              </a:rPr>
+              <a:t>Add screenshot</a:t>
+            </a:r>
+            <a:endParaRPr lang="en-US" sz="1500" dirty="0"/>
+          </a:p>
+          <a:p>
+            <a:pPr algn="ctr" indent="0" marL="0">
+              <a:lnSpc>
+                <a:spcPct val="130000"/>
+              </a:lnSpc>
+              <a:buNone/>
+            </a:pPr>
+            <a:r>
+              <a:rPr lang="en-US" sz="1300" b="1" dirty="0">
                 <a:solidFill>
                   <a:srgbClr val="17233B"/>
                 </a:solidFill>
@@ -5347,283 +4272,39 @@
                 <a:ea typeface="Calibri" pitchFamily="34" charset="-122"/>
                 <a:cs typeface="Calibri" pitchFamily="34" charset="-120"/>
               </a:rPr>
-              <a:t>POST /transfer/submit</a:t>
-            </a:r>
-            <a:endParaRPr lang="en-US" sz="1400" dirty="0"/>
-          </a:p>
-        </p:txBody>
-      </p:sp>
-      <p:sp>
-        <p:nvSpPr>
-          <p:cNvPr id="16" name="Text 14"/>
-          <p:cNvSpPr/>
-          <p:nvPr/>
-        </p:nvSpPr>
-        <p:spPr>
-          <a:xfrm>
-            <a:off x="9930384" y="2743200"/>
-            <a:ext cx="1417320" cy="274320"/>
-          </a:xfrm>
-          <a:prstGeom prst="rect">
-            <a:avLst/>
-          </a:prstGeom>
-          <a:noFill/>
-          <a:ln/>
-        </p:spPr>
-        <p:txBody>
-          <a:bodyPr wrap="square" rtlCol="0" anchor="ctr"/>
-          <a:lstStyle/>
-          <a:p>
-            <a:pPr algn="r" indent="0" marL="0">
+              <a:t>The release-impact diff</a:t>
+            </a:r>
+            <a:endParaRPr lang="en-US" sz="1500" dirty="0"/>
+          </a:p>
+          <a:p>
+            <a:pPr algn="ctr" indent="0" marL="0">
+              <a:lnSpc>
+                <a:spcPct val="130000"/>
+              </a:lnSpc>
               <a:buNone/>
             </a:pPr>
             <a:r>
               <a:rPr lang="en-US" sz="1100" dirty="0">
                 <a:solidFill>
-                  <a:srgbClr val="64748B"/>
-                </a:solidFill>
-                <a:latin typeface="Calibri" pitchFamily="34" charset="0"/>
-                <a:ea typeface="Calibri" pitchFamily="34" charset="-122"/>
-                <a:cs typeface="Calibri" pitchFamily="34" charset="-120"/>
-              </a:rPr>
-              <a:t>9.14 → 9.18</a:t>
-            </a:r>
-            <a:endParaRPr lang="en-US" sz="1100" dirty="0"/>
-          </a:p>
-        </p:txBody>
-      </p:sp>
-      <p:sp>
-        <p:nvSpPr>
-          <p:cNvPr id="17" name="Shape 15"/>
-          <p:cNvSpPr/>
-          <p:nvPr/>
-        </p:nvSpPr>
-        <p:spPr>
-          <a:xfrm>
-            <a:off x="7013448" y="3127248"/>
-            <a:ext cx="992124" cy="384048"/>
-          </a:xfrm>
-          <a:prstGeom prst="roundRect">
-            <a:avLst>
-              <a:gd name="adj" fmla="val 50000"/>
-            </a:avLst>
-          </a:prstGeom>
-          <a:solidFill>
-            <a:srgbClr val="FEF3C7"/>
-          </a:solidFill>
-          <a:ln/>
-        </p:spPr>
-      </p:sp>
-      <p:sp>
-        <p:nvSpPr>
-          <p:cNvPr id="18" name="Text 16"/>
-          <p:cNvSpPr/>
-          <p:nvPr/>
-        </p:nvSpPr>
-        <p:spPr>
-          <a:xfrm>
-            <a:off x="7013448" y="3127248"/>
-            <a:ext cx="992124" cy="384048"/>
-          </a:xfrm>
-          <a:prstGeom prst="rect">
-            <a:avLst/>
-          </a:prstGeom>
-          <a:noFill/>
-          <a:ln/>
-        </p:spPr>
-        <p:txBody>
-          <a:bodyPr wrap="square" rtlCol="0" anchor="ctr"/>
-          <a:lstStyle/>
+                  <a:srgbClr val="5B6B85"/>
+                </a:solidFill>
+                <a:latin typeface="Calibri" pitchFamily="34" charset="0"/>
+                <a:ea typeface="Calibri" pitchFamily="34" charset="-122"/>
+                <a:cs typeface="Calibri" pitchFamily="34" charset="-120"/>
+              </a:rPr>
+              <a:t>New / Changed highlighted, with payload and service-version changes per API.</a:t>
+            </a:r>
+            <a:endParaRPr lang="en-US" sz="1500" dirty="0"/>
+          </a:p>
           <a:p>
             <a:pPr algn="ctr" indent="0" marL="0">
-              <a:buNone/>
-            </a:pPr>
-            <a:r>
-              <a:rPr lang="en-US" sz="1300" b="1" dirty="0">
-                <a:solidFill>
-                  <a:srgbClr val="B45309"/>
-                </a:solidFill>
-                <a:latin typeface="Calibri" pitchFamily="34" charset="0"/>
-                <a:ea typeface="Calibri" pitchFamily="34" charset="-122"/>
-                <a:cs typeface="Calibri" pitchFamily="34" charset="-120"/>
-              </a:rPr>
-              <a:t>Changed</a:t>
-            </a:r>
-            <a:endParaRPr lang="en-US" sz="1300" dirty="0"/>
-          </a:p>
-        </p:txBody>
-      </p:sp>
-      <p:sp>
-        <p:nvSpPr>
-          <p:cNvPr id="19" name="Text 17"/>
-          <p:cNvSpPr/>
-          <p:nvPr/>
-        </p:nvSpPr>
-        <p:spPr>
-          <a:xfrm>
-            <a:off x="7031736" y="3657600"/>
-            <a:ext cx="4352544" cy="274320"/>
-          </a:xfrm>
-          <a:prstGeom prst="rect">
-            <a:avLst/>
-          </a:prstGeom>
-          <a:noFill/>
-          <a:ln/>
-        </p:spPr>
-        <p:txBody>
-          <a:bodyPr wrap="square" rtlCol="0" anchor="ctr"/>
-          <a:lstStyle/>
-          <a:p>
-            <a:pPr indent="0" marL="0">
-              <a:buNone/>
-            </a:pPr>
-            <a:r>
-              <a:rPr lang="en-US" sz="1250" dirty="0">
-                <a:solidFill>
-                  <a:srgbClr val="B45309"/>
-                </a:solidFill>
-                <a:latin typeface="Calibri" pitchFamily="34" charset="0"/>
-                <a:ea typeface="Calibri" pitchFamily="34" charset="-122"/>
-                <a:cs typeface="Calibri" pitchFamily="34" charset="-120"/>
-              </a:rPr>
-              <a:t>Backend service   2.2 → 2.3</a:t>
-            </a:r>
-            <a:endParaRPr lang="en-US" sz="1250" dirty="0"/>
-          </a:p>
-        </p:txBody>
-      </p:sp>
-      <p:sp>
-        <p:nvSpPr>
-          <p:cNvPr id="20" name="Text 18"/>
-          <p:cNvSpPr/>
-          <p:nvPr/>
-        </p:nvSpPr>
-        <p:spPr>
-          <a:xfrm>
-            <a:off x="7031736" y="4041648"/>
-            <a:ext cx="1828800" cy="256032"/>
-          </a:xfrm>
-          <a:prstGeom prst="rect">
-            <a:avLst/>
-          </a:prstGeom>
-          <a:noFill/>
-          <a:ln/>
-        </p:spPr>
-        <p:txBody>
-          <a:bodyPr wrap="square" rtlCol="0" anchor="ctr"/>
-          <a:lstStyle/>
-          <a:p>
-            <a:pPr indent="0" marL="0">
-              <a:buNone/>
-            </a:pPr>
-            <a:r>
-              <a:rPr lang="en-US" sz="1150" b="1" dirty="0">
-                <a:solidFill>
-                  <a:srgbClr val="17233B"/>
-                </a:solidFill>
-                <a:latin typeface="Calibri" pitchFamily="34" charset="0"/>
-                <a:ea typeface="Calibri" pitchFamily="34" charset="-122"/>
-                <a:cs typeface="Calibri" pitchFamily="34" charset="-120"/>
-              </a:rPr>
-              <a:t>Payload</a:t>
-            </a:r>
-            <a:endParaRPr lang="en-US" sz="1150" dirty="0"/>
-          </a:p>
-        </p:txBody>
-      </p:sp>
-      <p:sp>
-        <p:nvSpPr>
-          <p:cNvPr id="21" name="Text 19"/>
-          <p:cNvSpPr/>
-          <p:nvPr/>
-        </p:nvSpPr>
-        <p:spPr>
-          <a:xfrm>
-            <a:off x="7031736" y="4315968"/>
-            <a:ext cx="4352544" cy="274320"/>
-          </a:xfrm>
-          <a:prstGeom prst="rect">
-            <a:avLst/>
-          </a:prstGeom>
-          <a:noFill/>
-          <a:ln/>
-        </p:spPr>
-        <p:txBody>
-          <a:bodyPr wrap="square" rtlCol="0" anchor="ctr"/>
-          <a:lstStyle/>
-          <a:p>
-            <a:pPr indent="0" marL="0">
-              <a:buNone/>
-            </a:pPr>
-            <a:r>
-              <a:rPr lang="en-US" sz="1250" b="1" dirty="0">
-                <a:solidFill>
-                  <a:srgbClr val="16A34A"/>
-                </a:solidFill>
-                <a:latin typeface="Calibri" pitchFamily="34" charset="0"/>
-                <a:ea typeface="Calibri" pitchFamily="34" charset="-122"/>
-                <a:cs typeface="Calibri" pitchFamily="34" charset="-120"/>
-              </a:rPr>
-              <a:t>+ feeCode</a:t>
-            </a:r>
-            <a:pPr indent="0" marL="0">
-              <a:buNone/>
-            </a:pPr>
-            <a:r>
-              <a:rPr lang="en-US" sz="1250" dirty="0">
-                <a:solidFill>
-                  <a:srgbClr val="000000"/>
-                </a:solidFill>
-                <a:latin typeface="Calibri" pitchFamily="34" charset="0"/>
-                <a:ea typeface="Calibri" pitchFamily="34" charset="-122"/>
-                <a:cs typeface="Calibri" pitchFamily="34" charset="-120"/>
-              </a:rPr>
-              <a:t>        </a:t>
-            </a:r>
-            <a:pPr indent="0" marL="0">
-              <a:buNone/>
-            </a:pPr>
-            <a:r>
-              <a:rPr lang="en-US" sz="1250" b="1" dirty="0">
-                <a:solidFill>
-                  <a:srgbClr val="B91C1C"/>
-                </a:solidFill>
-                <a:latin typeface="Calibri" pitchFamily="34" charset="0"/>
-                <a:ea typeface="Calibri" pitchFamily="34" charset="-122"/>
-                <a:cs typeface="Calibri" pitchFamily="34" charset="-120"/>
-              </a:rPr>
-              <a:t>− legacyRef</a:t>
-            </a:r>
-            <a:endParaRPr lang="en-US" sz="1250" dirty="0"/>
-          </a:p>
-        </p:txBody>
-      </p:sp>
-      <p:sp>
-        <p:nvSpPr>
-          <p:cNvPr id="22" name="Text 20"/>
-          <p:cNvSpPr/>
-          <p:nvPr/>
-        </p:nvSpPr>
-        <p:spPr>
-          <a:xfrm>
-            <a:off x="10433304" y="4709160"/>
-            <a:ext cx="914400" cy="219456"/>
-          </a:xfrm>
-          <a:prstGeom prst="rect">
-            <a:avLst/>
-          </a:prstGeom>
-          <a:noFill/>
-          <a:ln/>
-        </p:spPr>
-        <p:txBody>
-          <a:bodyPr wrap="square" rtlCol="0" anchor="ctr"/>
-          <a:lstStyle/>
-          <a:p>
-            <a:pPr algn="r" indent="0" marL="0">
-              <a:buNone/>
-            </a:pPr>
-            <a:r>
-              <a:rPr lang="en-US" sz="900" i="1" dirty="0">
+              <a:lnSpc>
+                <a:spcPct val="130000"/>
+              </a:lnSpc>
+              <a:buNone/>
+            </a:pPr>
+            <a:r>
+              <a:rPr lang="en-US" sz="950" i="1" dirty="0">
                 <a:solidFill>
                   <a:srgbClr val="9AA5B5"/>
                 </a:solidFill>
@@ -5631,9 +4312,9 @@
                 <a:ea typeface="Calibri" pitchFamily="34" charset="-122"/>
                 <a:cs typeface="Calibri" pitchFamily="34" charset="-120"/>
               </a:rPr>
-              <a:t>Sample</a:t>
-            </a:r>
-            <a:endParaRPr lang="en-US" sz="900" dirty="0"/>
+              <a:t>Insert › Picture, then drop it over this box (or right-click › Change Picture).</a:t>
+            </a:r>
+            <a:endParaRPr lang="en-US" sz="1500" dirty="0"/>
           </a:p>
         </p:txBody>
       </p:sp>
@@ -5908,14 +4589,41 @@
       </p:sp>
       <p:sp>
         <p:nvSpPr>
-          <p:cNvPr id="7" name="Text 5"/>
-          <p:cNvSpPr/>
-          <p:nvPr/>
-        </p:nvSpPr>
-        <p:spPr>
-          <a:xfrm>
-            <a:off x="6492240" y="1965960"/>
-            <a:ext cx="5120640" cy="320040"/>
+          <p:cNvPr id="7" name="Shape 5"/>
+          <p:cNvSpPr/>
+          <p:nvPr/>
+        </p:nvSpPr>
+        <p:spPr>
+          <a:xfrm>
+            <a:off x="6400800" y="2057400"/>
+            <a:ext cx="5221224" cy="2834640"/>
+          </a:xfrm>
+          <a:prstGeom prst="roundRect">
+            <a:avLst>
+              <a:gd name="adj" fmla="val 1613"/>
+            </a:avLst>
+          </a:prstGeom>
+          <a:solidFill>
+            <a:srgbClr val="F7F9FC"/>
+          </a:solidFill>
+          <a:ln w="15875">
+            <a:solidFill>
+              <a:srgbClr val="2563EB"/>
+            </a:solidFill>
+            <a:prstDash val="dash"/>
+          </a:ln>
+        </p:spPr>
+      </p:sp>
+      <p:sp>
+        <p:nvSpPr>
+          <p:cNvPr id="8" name="Text 6"/>
+          <p:cNvSpPr/>
+          <p:nvPr/>
+        </p:nvSpPr>
+        <p:spPr>
+          <a:xfrm>
+            <a:off x="6675120" y="2057400"/>
+            <a:ext cx="4672584" cy="2834640"/>
           </a:xfrm>
           <a:prstGeom prst="rect">
             <a:avLst/>
@@ -5927,7 +4635,30 @@
           <a:bodyPr wrap="square" rtlCol="0" anchor="ctr"/>
           <a:lstStyle/>
           <a:p>
-            <a:pPr indent="0" marL="0">
+            <a:pPr algn="ctr" indent="0" marL="0">
+              <a:lnSpc>
+                <a:spcPct val="130000"/>
+              </a:lnSpc>
+              <a:buNone/>
+            </a:pPr>
+            <a:r>
+              <a:rPr lang="en-US" sz="1500" b="1" dirty="0">
+                <a:solidFill>
+                  <a:srgbClr val="2563EB"/>
+                </a:solidFill>
+                <a:latin typeface="Calibri" pitchFamily="34" charset="0"/>
+                <a:ea typeface="Calibri" pitchFamily="34" charset="-122"/>
+                <a:cs typeface="Calibri" pitchFamily="34" charset="-120"/>
+              </a:rPr>
+              <a:t>Add screenshot</a:t>
+            </a:r>
+            <a:endParaRPr lang="en-US" sz="1500" dirty="0"/>
+          </a:p>
+          <a:p>
+            <a:pPr algn="ctr" indent="0" marL="0">
+              <a:lnSpc>
+                <a:spcPct val="130000"/>
+              </a:lnSpc>
               <a:buNone/>
             </a:pPr>
             <a:r>
@@ -5939,28 +4670,52 @@
                 <a:ea typeface="Calibri" pitchFamily="34" charset="-122"/>
                 <a:cs typeface="Calibri" pitchFamily="34" charset="-120"/>
               </a:rPr>
-              <a:t>Failure share by error code</a:t>
-            </a:r>
-            <a:endParaRPr lang="en-US" sz="1300" dirty="0"/>
-          </a:p>
-        </p:txBody>
-      </p:sp>
-      <p:graphicFrame>
-        <p:nvGraphicFramePr>
-          <p:cNvPr id="8" name="Chart 0" descr=""/>
-          <p:cNvGraphicFramePr/>
-          <p:nvPr/>
-        </p:nvGraphicFramePr>
-        <p:xfrm>
-          <a:off x="6400800" y="2286000"/>
-          <a:ext cx="5212080" cy="2651760"/>
-        </p:xfrm>
-        <a:graphic xmlns:a="http://schemas.openxmlformats.org/drawingml/2006/main">
-          <a:graphicData uri="http://schemas.openxmlformats.org/drawingml/2006/chart">
-            <c:chart xmlns:c="http://schemas.openxmlformats.org/drawingml/2006/chart" r:id="rId1"/>
-          </a:graphicData>
-        </a:graphic>
-      </p:graphicFrame>
+              <a:t>The Splunk verification result</a:t>
+            </a:r>
+            <a:endParaRPr lang="en-US" sz="1500" dirty="0"/>
+          </a:p>
+          <a:p>
+            <a:pPr algn="ctr" indent="0" marL="0">
+              <a:lnSpc>
+                <a:spcPct val="130000"/>
+              </a:lnSpc>
+              <a:buNone/>
+            </a:pPr>
+            <a:r>
+              <a:rPr lang="en-US" sz="1100" dirty="0">
+                <a:solidFill>
+                  <a:srgbClr val="5B6B85"/>
+                </a:solidFill>
+                <a:latin typeface="Calibri" pitchFamily="34" charset="0"/>
+                <a:ea typeface="Calibri" pitchFamily="34" charset="-122"/>
+                <a:cs typeface="Calibri" pitchFamily="34" charset="-120"/>
+              </a:rPr>
+              <a:t>Per-API pass / fail, failure rate, and failure share by error code.</a:t>
+            </a:r>
+            <a:endParaRPr lang="en-US" sz="1500" dirty="0"/>
+          </a:p>
+          <a:p>
+            <a:pPr algn="ctr" indent="0" marL="0">
+              <a:lnSpc>
+                <a:spcPct val="130000"/>
+              </a:lnSpc>
+              <a:buNone/>
+            </a:pPr>
+            <a:r>
+              <a:rPr lang="en-US" sz="950" i="1" dirty="0">
+                <a:solidFill>
+                  <a:srgbClr val="9AA5B5"/>
+                </a:solidFill>
+                <a:latin typeface="Calibri" pitchFamily="34" charset="0"/>
+                <a:ea typeface="Calibri" pitchFamily="34" charset="-122"/>
+                <a:cs typeface="Calibri" pitchFamily="34" charset="-120"/>
+              </a:rPr>
+              <a:t>Insert › Picture, then drop it over this box (or right-click › Change Picture).</a:t>
+            </a:r>
+            <a:endParaRPr lang="en-US" sz="1500" dirty="0"/>
+          </a:p>
+        </p:txBody>
+      </p:sp>
     </p:spTree>
   </p:cSld>
   <p:clrMapOvr>
@@ -6079,30 +4834,23 @@
         </p:nvSpPr>
         <p:spPr>
           <a:xfrm>
-            <a:off x="566928" y="1737360"/>
-            <a:ext cx="11055096" cy="3703320"/>
+            <a:off x="566928" y="1783080"/>
+            <a:ext cx="11055096" cy="3657600"/>
           </a:xfrm>
           <a:prstGeom prst="roundRect">
             <a:avLst>
-              <a:gd name="adj" fmla="val 1235"/>
+              <a:gd name="adj" fmla="val 1250"/>
             </a:avLst>
           </a:prstGeom>
           <a:solidFill>
-            <a:srgbClr val="FFFFFF"/>
+            <a:srgbClr val="F7F9FC"/>
           </a:solidFill>
-          <a:ln w="12700">
+          <a:ln w="15875">
             <a:solidFill>
-              <a:srgbClr val="D7E0EE"/>
+              <a:srgbClr val="2563EB"/>
             </a:solidFill>
-            <a:prstDash val="solid"/>
+            <a:prstDash val="dash"/>
           </a:ln>
-          <a:effectLst>
-            <a:outerShdw sx="100000" sy="100000" kx="0" ky="0" algn="bl" rotWithShape="0" blurRad="177800" dist="38100" dir="5400000">
-              <a:srgbClr val="0B1020">
-                <a:alpha val="10000"/>
-              </a:srgbClr>
-            </a:outerShdw>
-          </a:effectLst>
         </p:spPr>
       </p:sp>
       <p:sp>
@@ -6113,8 +4861,8 @@
         </p:nvSpPr>
         <p:spPr>
           <a:xfrm>
-            <a:off x="877824" y="1938528"/>
-            <a:ext cx="5486400" cy="320040"/>
+            <a:off x="841248" y="1783080"/>
+            <a:ext cx="10506456" cy="3657600"/>
           </a:xfrm>
           <a:prstGeom prst="rect">
             <a:avLst/>
@@ -6126,50 +4874,127 @@
           <a:bodyPr wrap="square" rtlCol="0" anchor="ctr"/>
           <a:lstStyle/>
           <a:p>
+            <a:pPr algn="ctr" indent="0" marL="0">
+              <a:lnSpc>
+                <a:spcPct val="130000"/>
+              </a:lnSpc>
+              <a:buNone/>
+            </a:pPr>
+            <a:r>
+              <a:rPr lang="en-US" sz="1500" b="1" dirty="0">
+                <a:solidFill>
+                  <a:srgbClr val="2563EB"/>
+                </a:solidFill>
+                <a:latin typeface="Calibri" pitchFamily="34" charset="0"/>
+                <a:ea typeface="Calibri" pitchFamily="34" charset="-122"/>
+                <a:cs typeface="Calibri" pitchFamily="34" charset="-120"/>
+              </a:rPr>
+              <a:t>Add screenshot</a:t>
+            </a:r>
+            <a:endParaRPr lang="en-US" sz="1500" dirty="0"/>
+          </a:p>
+          <a:p>
+            <a:pPr algn="ctr" indent="0" marL="0">
+              <a:lnSpc>
+                <a:spcPct val="130000"/>
+              </a:lnSpc>
+              <a:buNone/>
+            </a:pPr>
+            <a:r>
+              <a:rPr lang="en-US" sz="1300" b="1" dirty="0">
+                <a:solidFill>
+                  <a:srgbClr val="17233B"/>
+                </a:solidFill>
+                <a:latin typeface="Calibri" pitchFamily="34" charset="0"/>
+                <a:ea typeface="Calibri" pitchFamily="34" charset="-122"/>
+                <a:cs typeface="Calibri" pitchFamily="34" charset="-120"/>
+              </a:rPr>
+              <a:t>The exported PDF report — release summary page</a:t>
+            </a:r>
+            <a:endParaRPr lang="en-US" sz="1500" dirty="0"/>
+          </a:p>
+          <a:p>
+            <a:pPr algn="ctr" indent="0" marL="0">
+              <a:lnSpc>
+                <a:spcPct val="130000"/>
+              </a:lnSpc>
+              <a:buNone/>
+            </a:pPr>
+            <a:r>
+              <a:rPr lang="en-US" sz="1100" dirty="0">
+                <a:solidFill>
+                  <a:srgbClr val="5B6B85"/>
+                </a:solidFill>
+                <a:latin typeface="Calibri" pitchFamily="34" charset="0"/>
+                <a:ea typeface="Calibri" pitchFamily="34" charset="-122"/>
+                <a:cs typeface="Calibri" pitchFamily="34" charset="-120"/>
+              </a:rPr>
+              <a:t>Per-module coverage with a Ready / Review / At-risk status — one shareable document.</a:t>
+            </a:r>
+            <a:endParaRPr lang="en-US" sz="1500" dirty="0"/>
+          </a:p>
+          <a:p>
+            <a:pPr algn="ctr" indent="0" marL="0">
+              <a:lnSpc>
+                <a:spcPct val="130000"/>
+              </a:lnSpc>
+              <a:buNone/>
+            </a:pPr>
+            <a:r>
+              <a:rPr lang="en-US" sz="950" i="1" dirty="0">
+                <a:solidFill>
+                  <a:srgbClr val="9AA5B5"/>
+                </a:solidFill>
+                <a:latin typeface="Calibri" pitchFamily="34" charset="0"/>
+                <a:ea typeface="Calibri" pitchFamily="34" charset="-122"/>
+                <a:cs typeface="Calibri" pitchFamily="34" charset="-120"/>
+              </a:rPr>
+              <a:t>Insert › Picture, then drop it over this box (or right-click › Change Picture).</a:t>
+            </a:r>
+            <a:endParaRPr lang="en-US" sz="1500" dirty="0"/>
+          </a:p>
+        </p:txBody>
+      </p:sp>
+      <p:sp>
+        <p:nvSpPr>
+          <p:cNvPr id="6" name="Text 4"/>
+          <p:cNvSpPr/>
+          <p:nvPr/>
+        </p:nvSpPr>
+        <p:spPr>
+          <a:xfrm>
+            <a:off x="566928" y="5559552"/>
+            <a:ext cx="11064240" cy="457200"/>
+          </a:xfrm>
+          <a:prstGeom prst="rect">
+            <a:avLst/>
+          </a:prstGeom>
+          <a:noFill/>
+          <a:ln/>
+        </p:spPr>
+        <p:txBody>
+          <a:bodyPr wrap="square" rtlCol="0" anchor="ctr"/>
+          <a:lstStyle/>
+          <a:p>
             <a:pPr indent="0" marL="0">
               <a:buNone/>
             </a:pPr>
             <a:r>
-              <a:rPr lang="en-US" sz="1500" b="1" dirty="0">
-                <a:solidFill>
-                  <a:srgbClr val="17233B"/>
-                </a:solidFill>
-                <a:latin typeface="Calibri" pitchFamily="34" charset="0"/>
-                <a:ea typeface="Calibri" pitchFamily="34" charset="-122"/>
-                <a:cs typeface="Calibri" pitchFamily="34" charset="-120"/>
-              </a:rPr>
-              <a:t>Release Test Report</a:t>
-            </a:r>
-            <a:endParaRPr lang="en-US" sz="1500" dirty="0"/>
-          </a:p>
-        </p:txBody>
-      </p:sp>
-      <p:sp>
-        <p:nvSpPr>
-          <p:cNvPr id="6" name="Text 4"/>
-          <p:cNvSpPr/>
-          <p:nvPr/>
-        </p:nvSpPr>
-        <p:spPr>
-          <a:xfrm>
-            <a:off x="6501384" y="1984248"/>
-            <a:ext cx="4846320" cy="274320"/>
-          </a:xfrm>
-          <a:prstGeom prst="rect">
-            <a:avLst/>
-          </a:prstGeom>
-          <a:noFill/>
-          <a:ln/>
-        </p:spPr>
-        <p:txBody>
-          <a:bodyPr wrap="square" rtlCol="0" anchor="ctr"/>
-          <a:lstStyle/>
-          <a:p>
-            <a:pPr algn="r" indent="0" marL="0">
-              <a:buNone/>
-            </a:pPr>
-            <a:r>
-              <a:rPr lang="en-US" sz="1100" dirty="0">
+              <a:rPr lang="en-US" sz="1400" b="1" dirty="0">
+                <a:solidFill>
+                  <a:srgbClr val="2563EB"/>
+                </a:solidFill>
+                <a:latin typeface="Calibri" pitchFamily="34" charset="0"/>
+                <a:ea typeface="Calibri" pitchFamily="34" charset="-122"/>
+                <a:cs typeface="Calibri" pitchFamily="34" charset="-120"/>
+              </a:rPr>
+              <a:t>→   </a:t>
+            </a:r>
+            <a:pPr indent="0" marL="0">
+              <a:buNone/>
+            </a:pPr>
+            <a:r>
+              <a:rPr lang="en-US" sz="1400" dirty="0">
                 <a:solidFill>
                   <a:srgbClr val="5B6B85"/>
                 </a:solidFill>
@@ -6177,2918 +5002,7 @@
                 <a:ea typeface="Calibri" pitchFamily="34" charset="-122"/>
                 <a:cs typeface="Calibri" pitchFamily="34" charset="-120"/>
               </a:rPr>
-              <a:t>Mighty  ·  release 9.18  ·  SG  ·  5 modules</a:t>
-            </a:r>
-            <a:endParaRPr lang="en-US" sz="1100" dirty="0"/>
-          </a:p>
-        </p:txBody>
-      </p:sp>
-      <p:sp>
-        <p:nvSpPr>
-          <p:cNvPr id="7" name="Shape 5"/>
-          <p:cNvSpPr/>
-          <p:nvPr/>
-        </p:nvSpPr>
-        <p:spPr>
-          <a:xfrm>
-            <a:off x="877824" y="2377440"/>
-            <a:ext cx="1417320" cy="658368"/>
-          </a:xfrm>
-          <a:prstGeom prst="roundRect">
-            <a:avLst>
-              <a:gd name="adj" fmla="val 8333"/>
-            </a:avLst>
-          </a:prstGeom>
-          <a:solidFill>
-            <a:srgbClr val="F5F8FD"/>
-          </a:solidFill>
-          <a:ln/>
-        </p:spPr>
-      </p:sp>
-      <p:sp>
-        <p:nvSpPr>
-          <p:cNvPr id="8" name="Text 6"/>
-          <p:cNvSpPr/>
-          <p:nvPr/>
-        </p:nvSpPr>
-        <p:spPr>
-          <a:xfrm>
-            <a:off x="1024128" y="2432304"/>
-            <a:ext cx="1188720" cy="384048"/>
-          </a:xfrm>
-          <a:prstGeom prst="rect">
-            <a:avLst/>
-          </a:prstGeom>
-          <a:noFill/>
-          <a:ln/>
-        </p:spPr>
-        <p:txBody>
-          <a:bodyPr wrap="square" rtlCol="0" anchor="ctr"/>
-          <a:lstStyle/>
-          <a:p>
-            <a:pPr indent="0" marL="0">
-              <a:buNone/>
-            </a:pPr>
-            <a:r>
-              <a:rPr lang="en-US" sz="1900" b="1" dirty="0">
-                <a:solidFill>
-                  <a:srgbClr val="64748B"/>
-                </a:solidFill>
-                <a:latin typeface="Calibri" pitchFamily="34" charset="0"/>
-                <a:ea typeface="Calibri" pitchFamily="34" charset="-122"/>
-                <a:cs typeface="Calibri" pitchFamily="34" charset="-120"/>
-              </a:rPr>
-              <a:t>62</a:t>
-            </a:r>
-            <a:endParaRPr lang="en-US" sz="1900" dirty="0"/>
-          </a:p>
-        </p:txBody>
-      </p:sp>
-      <p:sp>
-        <p:nvSpPr>
-          <p:cNvPr id="9" name="Text 7"/>
-          <p:cNvSpPr/>
-          <p:nvPr/>
-        </p:nvSpPr>
-        <p:spPr>
-          <a:xfrm>
-            <a:off x="1024128" y="2779776"/>
-            <a:ext cx="1234440" cy="219456"/>
-          </a:xfrm>
-          <a:prstGeom prst="rect">
-            <a:avLst/>
-          </a:prstGeom>
-          <a:noFill/>
-          <a:ln/>
-        </p:spPr>
-        <p:txBody>
-          <a:bodyPr wrap="square" rtlCol="0" anchor="ctr"/>
-          <a:lstStyle/>
-          <a:p>
-            <a:pPr indent="0" marL="0">
-              <a:buNone/>
-            </a:pPr>
-            <a:r>
-              <a:rPr lang="en-US" sz="950" dirty="0">
-                <a:solidFill>
-                  <a:srgbClr val="5B6B85"/>
-                </a:solidFill>
-                <a:latin typeface="Calibri" pitchFamily="34" charset="0"/>
-                <a:ea typeface="Calibri" pitchFamily="34" charset="-122"/>
-                <a:cs typeface="Calibri" pitchFamily="34" charset="-120"/>
-              </a:rPr>
-              <a:t>Total APIs</a:t>
-            </a:r>
-            <a:endParaRPr lang="en-US" sz="950" dirty="0"/>
-          </a:p>
-        </p:txBody>
-      </p:sp>
-      <p:sp>
-        <p:nvSpPr>
-          <p:cNvPr id="10" name="Shape 8"/>
-          <p:cNvSpPr/>
-          <p:nvPr/>
-        </p:nvSpPr>
-        <p:spPr>
-          <a:xfrm>
-            <a:off x="2450592" y="2377440"/>
-            <a:ext cx="1417320" cy="658368"/>
-          </a:xfrm>
-          <a:prstGeom prst="roundRect">
-            <a:avLst>
-              <a:gd name="adj" fmla="val 8333"/>
-            </a:avLst>
-          </a:prstGeom>
-          <a:solidFill>
-            <a:srgbClr val="F5F8FD"/>
-          </a:solidFill>
-          <a:ln/>
-        </p:spPr>
-      </p:sp>
-      <p:sp>
-        <p:nvSpPr>
-          <p:cNvPr id="11" name="Text 9"/>
-          <p:cNvSpPr/>
-          <p:nvPr/>
-        </p:nvSpPr>
-        <p:spPr>
-          <a:xfrm>
-            <a:off x="2596896" y="2432304"/>
-            <a:ext cx="1188720" cy="384048"/>
-          </a:xfrm>
-          <a:prstGeom prst="rect">
-            <a:avLst/>
-          </a:prstGeom>
-          <a:noFill/>
-          <a:ln/>
-        </p:spPr>
-        <p:txBody>
-          <a:bodyPr wrap="square" rtlCol="0" anchor="ctr"/>
-          <a:lstStyle/>
-          <a:p>
-            <a:pPr indent="0" marL="0">
-              <a:buNone/>
-            </a:pPr>
-            <a:r>
-              <a:rPr lang="en-US" sz="1900" b="1" dirty="0">
-                <a:solidFill>
-                  <a:srgbClr val="16A34A"/>
-                </a:solidFill>
-                <a:latin typeface="Calibri" pitchFamily="34" charset="0"/>
-                <a:ea typeface="Calibri" pitchFamily="34" charset="-122"/>
-                <a:cs typeface="Calibri" pitchFamily="34" charset="-120"/>
-              </a:rPr>
-              <a:t>41</a:t>
-            </a:r>
-            <a:endParaRPr lang="en-US" sz="1900" dirty="0"/>
-          </a:p>
-        </p:txBody>
-      </p:sp>
-      <p:sp>
-        <p:nvSpPr>
-          <p:cNvPr id="12" name="Text 10"/>
-          <p:cNvSpPr/>
-          <p:nvPr/>
-        </p:nvSpPr>
-        <p:spPr>
-          <a:xfrm>
-            <a:off x="2596896" y="2779776"/>
-            <a:ext cx="1234440" cy="219456"/>
-          </a:xfrm>
-          <a:prstGeom prst="rect">
-            <a:avLst/>
-          </a:prstGeom>
-          <a:noFill/>
-          <a:ln/>
-        </p:spPr>
-        <p:txBody>
-          <a:bodyPr wrap="square" rtlCol="0" anchor="ctr"/>
-          <a:lstStyle/>
-          <a:p>
-            <a:pPr indent="0" marL="0">
-              <a:buNone/>
-            </a:pPr>
-            <a:r>
-              <a:rPr lang="en-US" sz="950" dirty="0">
-                <a:solidFill>
-                  <a:srgbClr val="5B6B85"/>
-                </a:solidFill>
-                <a:latin typeface="Calibri" pitchFamily="34" charset="0"/>
-                <a:ea typeface="Calibri" pitchFamily="34" charset="-122"/>
-                <a:cs typeface="Calibri" pitchFamily="34" charset="-120"/>
-              </a:rPr>
-              <a:t>Passed</a:t>
-            </a:r>
-            <a:endParaRPr lang="en-US" sz="950" dirty="0"/>
-          </a:p>
-        </p:txBody>
-      </p:sp>
-      <p:sp>
-        <p:nvSpPr>
-          <p:cNvPr id="13" name="Shape 11"/>
-          <p:cNvSpPr/>
-          <p:nvPr/>
-        </p:nvSpPr>
-        <p:spPr>
-          <a:xfrm>
-            <a:off x="4023360" y="2377440"/>
-            <a:ext cx="1417320" cy="658368"/>
-          </a:xfrm>
-          <a:prstGeom prst="roundRect">
-            <a:avLst>
-              <a:gd name="adj" fmla="val 8333"/>
-            </a:avLst>
-          </a:prstGeom>
-          <a:solidFill>
-            <a:srgbClr val="F5F8FD"/>
-          </a:solidFill>
-          <a:ln/>
-        </p:spPr>
-      </p:sp>
-      <p:sp>
-        <p:nvSpPr>
-          <p:cNvPr id="14" name="Text 12"/>
-          <p:cNvSpPr/>
-          <p:nvPr/>
-        </p:nvSpPr>
-        <p:spPr>
-          <a:xfrm>
-            <a:off x="4169664" y="2432304"/>
-            <a:ext cx="1188720" cy="384048"/>
-          </a:xfrm>
-          <a:prstGeom prst="rect">
-            <a:avLst/>
-          </a:prstGeom>
-          <a:noFill/>
-          <a:ln/>
-        </p:spPr>
-        <p:txBody>
-          <a:bodyPr wrap="square" rtlCol="0" anchor="ctr"/>
-          <a:lstStyle/>
-          <a:p>
-            <a:pPr indent="0" marL="0">
-              <a:buNone/>
-            </a:pPr>
-            <a:r>
-              <a:rPr lang="en-US" sz="1900" b="1" dirty="0">
-                <a:solidFill>
-                  <a:srgbClr val="B91C1C"/>
-                </a:solidFill>
-                <a:latin typeface="Calibri" pitchFamily="34" charset="0"/>
-                <a:ea typeface="Calibri" pitchFamily="34" charset="-122"/>
-                <a:cs typeface="Calibri" pitchFamily="34" charset="-120"/>
-              </a:rPr>
-              <a:t>21</a:t>
-            </a:r>
-            <a:endParaRPr lang="en-US" sz="1900" dirty="0"/>
-          </a:p>
-        </p:txBody>
-      </p:sp>
-      <p:sp>
-        <p:nvSpPr>
-          <p:cNvPr id="15" name="Text 13"/>
-          <p:cNvSpPr/>
-          <p:nvPr/>
-        </p:nvSpPr>
-        <p:spPr>
-          <a:xfrm>
-            <a:off x="4169664" y="2779776"/>
-            <a:ext cx="1234440" cy="219456"/>
-          </a:xfrm>
-          <a:prstGeom prst="rect">
-            <a:avLst/>
-          </a:prstGeom>
-          <a:noFill/>
-          <a:ln/>
-        </p:spPr>
-        <p:txBody>
-          <a:bodyPr wrap="square" rtlCol="0" anchor="ctr"/>
-          <a:lstStyle/>
-          <a:p>
-            <a:pPr indent="0" marL="0">
-              <a:buNone/>
-            </a:pPr>
-            <a:r>
-              <a:rPr lang="en-US" sz="950" dirty="0">
-                <a:solidFill>
-                  <a:srgbClr val="5B6B85"/>
-                </a:solidFill>
-                <a:latin typeface="Calibri" pitchFamily="34" charset="0"/>
-                <a:ea typeface="Calibri" pitchFamily="34" charset="-122"/>
-                <a:cs typeface="Calibri" pitchFamily="34" charset="-120"/>
-              </a:rPr>
-              <a:t>Not tested</a:t>
-            </a:r>
-            <a:endParaRPr lang="en-US" sz="950" dirty="0"/>
-          </a:p>
-        </p:txBody>
-      </p:sp>
-      <p:sp>
-        <p:nvSpPr>
-          <p:cNvPr id="16" name="Shape 14"/>
-          <p:cNvSpPr/>
-          <p:nvPr/>
-        </p:nvSpPr>
-        <p:spPr>
-          <a:xfrm>
-            <a:off x="5596128" y="2377440"/>
-            <a:ext cx="1417320" cy="658368"/>
-          </a:xfrm>
-          <a:prstGeom prst="roundRect">
-            <a:avLst>
-              <a:gd name="adj" fmla="val 8333"/>
-            </a:avLst>
-          </a:prstGeom>
-          <a:solidFill>
-            <a:srgbClr val="F5F8FD"/>
-          </a:solidFill>
-          <a:ln/>
-        </p:spPr>
-      </p:sp>
-      <p:sp>
-        <p:nvSpPr>
-          <p:cNvPr id="17" name="Text 15"/>
-          <p:cNvSpPr/>
-          <p:nvPr/>
-        </p:nvSpPr>
-        <p:spPr>
-          <a:xfrm>
-            <a:off x="5742432" y="2432304"/>
-            <a:ext cx="1188720" cy="384048"/>
-          </a:xfrm>
-          <a:prstGeom prst="rect">
-            <a:avLst/>
-          </a:prstGeom>
-          <a:noFill/>
-          <a:ln/>
-        </p:spPr>
-        <p:txBody>
-          <a:bodyPr wrap="square" rtlCol="0" anchor="ctr"/>
-          <a:lstStyle/>
-          <a:p>
-            <a:pPr indent="0" marL="0">
-              <a:buNone/>
-            </a:pPr>
-            <a:r>
-              <a:rPr lang="en-US" sz="1900" b="1" dirty="0">
-                <a:solidFill>
-                  <a:srgbClr val="B45309"/>
-                </a:solidFill>
-                <a:latin typeface="Calibri" pitchFamily="34" charset="0"/>
-                <a:ea typeface="Calibri" pitchFamily="34" charset="-122"/>
-                <a:cs typeface="Calibri" pitchFamily="34" charset="-120"/>
-              </a:rPr>
-              <a:t>2</a:t>
-            </a:r>
-            <a:endParaRPr lang="en-US" sz="1900" dirty="0"/>
-          </a:p>
-        </p:txBody>
-      </p:sp>
-      <p:sp>
-        <p:nvSpPr>
-          <p:cNvPr id="18" name="Text 16"/>
-          <p:cNvSpPr/>
-          <p:nvPr/>
-        </p:nvSpPr>
-        <p:spPr>
-          <a:xfrm>
-            <a:off x="5742432" y="2779776"/>
-            <a:ext cx="1234440" cy="219456"/>
-          </a:xfrm>
-          <a:prstGeom prst="rect">
-            <a:avLst/>
-          </a:prstGeom>
-          <a:noFill/>
-          <a:ln/>
-        </p:spPr>
-        <p:txBody>
-          <a:bodyPr wrap="square" rtlCol="0" anchor="ctr"/>
-          <a:lstStyle/>
-          <a:p>
-            <a:pPr indent="0" marL="0">
-              <a:buNone/>
-            </a:pPr>
-            <a:r>
-              <a:rPr lang="en-US" sz="950" dirty="0">
-                <a:solidFill>
-                  <a:srgbClr val="5B6B85"/>
-                </a:solidFill>
-                <a:latin typeface="Calibri" pitchFamily="34" charset="0"/>
-                <a:ea typeface="Calibri" pitchFamily="34" charset="-122"/>
-                <a:cs typeface="Calibri" pitchFamily="34" charset="-120"/>
-              </a:rPr>
-              <a:t>Issues</a:t>
-            </a:r>
-            <a:endParaRPr lang="en-US" sz="950" dirty="0"/>
-          </a:p>
-        </p:txBody>
-      </p:sp>
-      <p:graphicFrame>
-        <p:nvGraphicFramePr>
-          <p:cNvPr id="9" name="Table 0"/>
-          <p:cNvGraphicFramePr>
-            <a:graphicFrameLocks noGrp="1"/>
-          </p:cNvGraphicFramePr>
-          <p:nvPr>
-            <p:extLst>
-              <p:ext uri="{D42A27DB-BD31-4B8C-83A1-F6EECF244321}">
-                <p14:modId xmlns:p14="http://schemas.microsoft.com/office/powerpoint/2010/main" val="1579011935"/>
-              </p:ext>
-            </p:extLst>
-          </p:nvPr>
-        </p:nvGraphicFramePr>
-        <p:xfrm>
-          <a:off x="877824" y="3218688"/>
-          <a:ext cx="10433304" cy="914400"/>
-        </p:xfrm>
-        <a:graphic>
-          <a:graphicData uri="http://schemas.openxmlformats.org/drawingml/2006/table">
-            <a:tbl>
-              <a:tblPr/>
-              <a:tblGrid>
-                <a:gridCol w="3108960"/>
-                <a:gridCol w="1051560"/>
-                <a:gridCol w="1234440"/>
-                <a:gridCol w="1417320"/>
-                <a:gridCol w="1097280"/>
-                <a:gridCol w="2523744"/>
-              </a:tblGrid>
-              <a:tr h="329184">
-                <a:tc>
-                  <a:txBody>
-                    <a:bodyPr/>
-                    <a:lstStyle/>
-                    <a:p>
-                      <a:pPr algn="l" indent="0" marL="0">
-                        <a:buNone/>
-                      </a:pPr>
-                      <a:r>
-                        <a:rPr lang="en-US" sz="1050" b="1" dirty="0">
-                          <a:solidFill>
-                            <a:srgbClr val="475569"/>
-                          </a:solidFill>
-                          <a:latin typeface="Calibri" pitchFamily="34" charset="0"/>
-                          <a:ea typeface="Calibri" pitchFamily="34" charset="-122"/>
-                          <a:cs typeface="Calibri" pitchFamily="34" charset="-120"/>
-                        </a:rPr>
-                        <a:t>Module</a:t>
-                      </a:r>
-                      <a:endParaRPr lang="en-US" sz="1050" dirty="0">
-                        <a:latin typeface="Calibri" charset="0"/>
-                        <a:ea typeface="Calibri" charset="0"/>
-                        <a:cs typeface="Calibri" charset="0"/>
-                      </a:endParaRPr>
-                    </a:p>
-                  </a:txBody>
-                  <a:tcPr marL="91440" marR="91440" marT="45720" marB="45720" anchor="ctr">
-                    <a:lnL w="6350" cap="flat" cmpd="sng" algn="ctr">
-                      <a:solidFill>
-                        <a:srgbClr val="E9EEF5"/>
-                      </a:solidFill>
-                      <a:prstDash val="solid"/>
-                      <a:round/>
-                      <a:headEnd type="none" w="med" len="med"/>
-                      <a:tailEnd type="none" w="med" len="med"/>
-                    </a:lnL>
-                    <a:lnR w="6350" cap="flat" cmpd="sng" algn="ctr">
-                      <a:solidFill>
-                        <a:srgbClr val="E9EEF5"/>
-                      </a:solidFill>
-                      <a:prstDash val="solid"/>
-                      <a:round/>
-                      <a:headEnd type="none" w="med" len="med"/>
-                      <a:tailEnd type="none" w="med" len="med"/>
-                    </a:lnR>
-                    <a:lnT w="6350" cap="flat" cmpd="sng" algn="ctr">
-                      <a:solidFill>
-                        <a:srgbClr val="E9EEF5"/>
-                      </a:solidFill>
-                      <a:prstDash val="solid"/>
-                      <a:round/>
-                      <a:headEnd type="none" w="med" len="med"/>
-                      <a:tailEnd type="none" w="med" len="med"/>
-                    </a:lnT>
-                    <a:lnB w="6350" cap="flat" cmpd="sng" algn="ctr">
-                      <a:solidFill>
-                        <a:srgbClr val="E9EEF5"/>
-                      </a:solidFill>
-                      <a:prstDash val="solid"/>
-                      <a:round/>
-                      <a:headEnd type="none" w="med" len="med"/>
-                      <a:tailEnd type="none" w="med" len="med"/>
-                    </a:lnB>
-                    <a:solidFill>
-                      <a:srgbClr val="F1F5FB"/>
-                    </a:solidFill>
-                  </a:tcPr>
-                </a:tc>
-                <a:tc>
-                  <a:txBody>
-                    <a:bodyPr/>
-                    <a:lstStyle/>
-                    <a:p>
-                      <a:pPr algn="ctr" indent="0" marL="0">
-                        <a:buNone/>
-                      </a:pPr>
-                      <a:r>
-                        <a:rPr lang="en-US" sz="1050" b="1" dirty="0">
-                          <a:solidFill>
-                            <a:srgbClr val="475569"/>
-                          </a:solidFill>
-                          <a:latin typeface="Calibri" pitchFamily="34" charset="0"/>
-                          <a:ea typeface="Calibri" pitchFamily="34" charset="-122"/>
-                          <a:cs typeface="Calibri" pitchFamily="34" charset="-120"/>
-                        </a:rPr>
-                        <a:t>APIs</a:t>
-                      </a:r>
-                      <a:endParaRPr lang="en-US" sz="1050" dirty="0">
-                        <a:latin typeface="Calibri" charset="0"/>
-                        <a:ea typeface="Calibri" charset="0"/>
-                        <a:cs typeface="Calibri" charset="0"/>
-                      </a:endParaRPr>
-                    </a:p>
-                  </a:txBody>
-                  <a:tcPr marL="91440" marR="91440" marT="45720" marB="45720" anchor="ctr">
-                    <a:lnL w="6350" cap="flat" cmpd="sng" algn="ctr">
-                      <a:solidFill>
-                        <a:srgbClr val="E9EEF5"/>
-                      </a:solidFill>
-                      <a:prstDash val="solid"/>
-                      <a:round/>
-                      <a:headEnd type="none" w="med" len="med"/>
-                      <a:tailEnd type="none" w="med" len="med"/>
-                    </a:lnL>
-                    <a:lnR w="6350" cap="flat" cmpd="sng" algn="ctr">
-                      <a:solidFill>
-                        <a:srgbClr val="E9EEF5"/>
-                      </a:solidFill>
-                      <a:prstDash val="solid"/>
-                      <a:round/>
-                      <a:headEnd type="none" w="med" len="med"/>
-                      <a:tailEnd type="none" w="med" len="med"/>
-                    </a:lnR>
-                    <a:lnT w="6350" cap="flat" cmpd="sng" algn="ctr">
-                      <a:solidFill>
-                        <a:srgbClr val="E9EEF5"/>
-                      </a:solidFill>
-                      <a:prstDash val="solid"/>
-                      <a:round/>
-                      <a:headEnd type="none" w="med" len="med"/>
-                      <a:tailEnd type="none" w="med" len="med"/>
-                    </a:lnT>
-                    <a:lnB w="6350" cap="flat" cmpd="sng" algn="ctr">
-                      <a:solidFill>
-                        <a:srgbClr val="E9EEF5"/>
-                      </a:solidFill>
-                      <a:prstDash val="solid"/>
-                      <a:round/>
-                      <a:headEnd type="none" w="med" len="med"/>
-                      <a:tailEnd type="none" w="med" len="med"/>
-                    </a:lnB>
-                    <a:solidFill>
-                      <a:srgbClr val="F1F5FB"/>
-                    </a:solidFill>
-                  </a:tcPr>
-                </a:tc>
-                <a:tc>
-                  <a:txBody>
-                    <a:bodyPr/>
-                    <a:lstStyle/>
-                    <a:p>
-                      <a:pPr algn="ctr" indent="0" marL="0">
-                        <a:buNone/>
-                      </a:pPr>
-                      <a:r>
-                        <a:rPr lang="en-US" sz="1050" b="1" dirty="0">
-                          <a:solidFill>
-                            <a:srgbClr val="475569"/>
-                          </a:solidFill>
-                          <a:latin typeface="Calibri" pitchFamily="34" charset="0"/>
-                          <a:ea typeface="Calibri" pitchFamily="34" charset="-122"/>
-                          <a:cs typeface="Calibri" pitchFamily="34" charset="-120"/>
-                        </a:rPr>
-                        <a:t>Passed</a:t>
-                      </a:r>
-                      <a:endParaRPr lang="en-US" sz="1050" dirty="0">
-                        <a:latin typeface="Calibri" charset="0"/>
-                        <a:ea typeface="Calibri" charset="0"/>
-                        <a:cs typeface="Calibri" charset="0"/>
-                      </a:endParaRPr>
-                    </a:p>
-                  </a:txBody>
-                  <a:tcPr marL="91440" marR="91440" marT="45720" marB="45720" anchor="ctr">
-                    <a:lnL w="6350" cap="flat" cmpd="sng" algn="ctr">
-                      <a:solidFill>
-                        <a:srgbClr val="E9EEF5"/>
-                      </a:solidFill>
-                      <a:prstDash val="solid"/>
-                      <a:round/>
-                      <a:headEnd type="none" w="med" len="med"/>
-                      <a:tailEnd type="none" w="med" len="med"/>
-                    </a:lnL>
-                    <a:lnR w="6350" cap="flat" cmpd="sng" algn="ctr">
-                      <a:solidFill>
-                        <a:srgbClr val="E9EEF5"/>
-                      </a:solidFill>
-                      <a:prstDash val="solid"/>
-                      <a:round/>
-                      <a:headEnd type="none" w="med" len="med"/>
-                      <a:tailEnd type="none" w="med" len="med"/>
-                    </a:lnR>
-                    <a:lnT w="6350" cap="flat" cmpd="sng" algn="ctr">
-                      <a:solidFill>
-                        <a:srgbClr val="E9EEF5"/>
-                      </a:solidFill>
-                      <a:prstDash val="solid"/>
-                      <a:round/>
-                      <a:headEnd type="none" w="med" len="med"/>
-                      <a:tailEnd type="none" w="med" len="med"/>
-                    </a:lnT>
-                    <a:lnB w="6350" cap="flat" cmpd="sng" algn="ctr">
-                      <a:solidFill>
-                        <a:srgbClr val="E9EEF5"/>
-                      </a:solidFill>
-                      <a:prstDash val="solid"/>
-                      <a:round/>
-                      <a:headEnd type="none" w="med" len="med"/>
-                      <a:tailEnd type="none" w="med" len="med"/>
-                    </a:lnB>
-                    <a:solidFill>
-                      <a:srgbClr val="F1F5FB"/>
-                    </a:solidFill>
-                  </a:tcPr>
-                </a:tc>
-                <a:tc>
-                  <a:txBody>
-                    <a:bodyPr/>
-                    <a:lstStyle/>
-                    <a:p>
-                      <a:pPr algn="ctr" indent="0" marL="0">
-                        <a:buNone/>
-                      </a:pPr>
-                      <a:r>
-                        <a:rPr lang="en-US" sz="1050" b="1" dirty="0">
-                          <a:solidFill>
-                            <a:srgbClr val="475569"/>
-                          </a:solidFill>
-                          <a:latin typeface="Calibri" pitchFamily="34" charset="0"/>
-                          <a:ea typeface="Calibri" pitchFamily="34" charset="-122"/>
-                          <a:cs typeface="Calibri" pitchFamily="34" charset="-120"/>
-                        </a:rPr>
-                        <a:t>Not tested</a:t>
-                      </a:r>
-                      <a:endParaRPr lang="en-US" sz="1050" dirty="0">
-                        <a:latin typeface="Calibri" charset="0"/>
-                        <a:ea typeface="Calibri" charset="0"/>
-                        <a:cs typeface="Calibri" charset="0"/>
-                      </a:endParaRPr>
-                    </a:p>
-                  </a:txBody>
-                  <a:tcPr marL="91440" marR="91440" marT="45720" marB="45720" anchor="ctr">
-                    <a:lnL w="6350" cap="flat" cmpd="sng" algn="ctr">
-                      <a:solidFill>
-                        <a:srgbClr val="E9EEF5"/>
-                      </a:solidFill>
-                      <a:prstDash val="solid"/>
-                      <a:round/>
-                      <a:headEnd type="none" w="med" len="med"/>
-                      <a:tailEnd type="none" w="med" len="med"/>
-                    </a:lnL>
-                    <a:lnR w="6350" cap="flat" cmpd="sng" algn="ctr">
-                      <a:solidFill>
-                        <a:srgbClr val="E9EEF5"/>
-                      </a:solidFill>
-                      <a:prstDash val="solid"/>
-                      <a:round/>
-                      <a:headEnd type="none" w="med" len="med"/>
-                      <a:tailEnd type="none" w="med" len="med"/>
-                    </a:lnR>
-                    <a:lnT w="6350" cap="flat" cmpd="sng" algn="ctr">
-                      <a:solidFill>
-                        <a:srgbClr val="E9EEF5"/>
-                      </a:solidFill>
-                      <a:prstDash val="solid"/>
-                      <a:round/>
-                      <a:headEnd type="none" w="med" len="med"/>
-                      <a:tailEnd type="none" w="med" len="med"/>
-                    </a:lnT>
-                    <a:lnB w="6350" cap="flat" cmpd="sng" algn="ctr">
-                      <a:solidFill>
-                        <a:srgbClr val="E9EEF5"/>
-                      </a:solidFill>
-                      <a:prstDash val="solid"/>
-                      <a:round/>
-                      <a:headEnd type="none" w="med" len="med"/>
-                      <a:tailEnd type="none" w="med" len="med"/>
-                    </a:lnB>
-                    <a:solidFill>
-                      <a:srgbClr val="F1F5FB"/>
-                    </a:solidFill>
-                  </a:tcPr>
-                </a:tc>
-                <a:tc>
-                  <a:txBody>
-                    <a:bodyPr/>
-                    <a:lstStyle/>
-                    <a:p>
-                      <a:pPr algn="ctr" indent="0" marL="0">
-                        <a:buNone/>
-                      </a:pPr>
-                      <a:r>
-                        <a:rPr lang="en-US" sz="1050" b="1" dirty="0">
-                          <a:solidFill>
-                            <a:srgbClr val="475569"/>
-                          </a:solidFill>
-                          <a:latin typeface="Calibri" pitchFamily="34" charset="0"/>
-                          <a:ea typeface="Calibri" pitchFamily="34" charset="-122"/>
-                          <a:cs typeface="Calibri" pitchFamily="34" charset="-120"/>
-                        </a:rPr>
-                        <a:t>Issues</a:t>
-                      </a:r>
-                      <a:endParaRPr lang="en-US" sz="1050" dirty="0">
-                        <a:latin typeface="Calibri" charset="0"/>
-                        <a:ea typeface="Calibri" charset="0"/>
-                        <a:cs typeface="Calibri" charset="0"/>
-                      </a:endParaRPr>
-                    </a:p>
-                  </a:txBody>
-                  <a:tcPr marL="91440" marR="91440" marT="45720" marB="45720" anchor="ctr">
-                    <a:lnL w="6350" cap="flat" cmpd="sng" algn="ctr">
-                      <a:solidFill>
-                        <a:srgbClr val="E9EEF5"/>
-                      </a:solidFill>
-                      <a:prstDash val="solid"/>
-                      <a:round/>
-                      <a:headEnd type="none" w="med" len="med"/>
-                      <a:tailEnd type="none" w="med" len="med"/>
-                    </a:lnL>
-                    <a:lnR w="6350" cap="flat" cmpd="sng" algn="ctr">
-                      <a:solidFill>
-                        <a:srgbClr val="E9EEF5"/>
-                      </a:solidFill>
-                      <a:prstDash val="solid"/>
-                      <a:round/>
-                      <a:headEnd type="none" w="med" len="med"/>
-                      <a:tailEnd type="none" w="med" len="med"/>
-                    </a:lnR>
-                    <a:lnT w="6350" cap="flat" cmpd="sng" algn="ctr">
-                      <a:solidFill>
-                        <a:srgbClr val="E9EEF5"/>
-                      </a:solidFill>
-                      <a:prstDash val="solid"/>
-                      <a:round/>
-                      <a:headEnd type="none" w="med" len="med"/>
-                      <a:tailEnd type="none" w="med" len="med"/>
-                    </a:lnT>
-                    <a:lnB w="6350" cap="flat" cmpd="sng" algn="ctr">
-                      <a:solidFill>
-                        <a:srgbClr val="E9EEF5"/>
-                      </a:solidFill>
-                      <a:prstDash val="solid"/>
-                      <a:round/>
-                      <a:headEnd type="none" w="med" len="med"/>
-                      <a:tailEnd type="none" w="med" len="med"/>
-                    </a:lnB>
-                    <a:solidFill>
-                      <a:srgbClr val="F1F5FB"/>
-                    </a:solidFill>
-                  </a:tcPr>
-                </a:tc>
-                <a:tc>
-                  <a:txBody>
-                    <a:bodyPr/>
-                    <a:lstStyle/>
-                    <a:p>
-                      <a:pPr algn="ctr" indent="0" marL="0">
-                        <a:buNone/>
-                      </a:pPr>
-                      <a:r>
-                        <a:rPr lang="en-US" sz="1050" b="1" dirty="0">
-                          <a:solidFill>
-                            <a:srgbClr val="475569"/>
-                          </a:solidFill>
-                          <a:latin typeface="Calibri" pitchFamily="34" charset="0"/>
-                          <a:ea typeface="Calibri" pitchFamily="34" charset="-122"/>
-                          <a:cs typeface="Calibri" pitchFamily="34" charset="-120"/>
-                        </a:rPr>
-                        <a:t>Status</a:t>
-                      </a:r>
-                      <a:endParaRPr lang="en-US" sz="1050" dirty="0">
-                        <a:latin typeface="Calibri" charset="0"/>
-                        <a:ea typeface="Calibri" charset="0"/>
-                        <a:cs typeface="Calibri" charset="0"/>
-                      </a:endParaRPr>
-                    </a:p>
-                  </a:txBody>
-                  <a:tcPr marL="91440" marR="91440" marT="45720" marB="45720" anchor="ctr">
-                    <a:lnL w="6350" cap="flat" cmpd="sng" algn="ctr">
-                      <a:solidFill>
-                        <a:srgbClr val="E9EEF5"/>
-                      </a:solidFill>
-                      <a:prstDash val="solid"/>
-                      <a:round/>
-                      <a:headEnd type="none" w="med" len="med"/>
-                      <a:tailEnd type="none" w="med" len="med"/>
-                    </a:lnL>
-                    <a:lnR w="6350" cap="flat" cmpd="sng" algn="ctr">
-                      <a:solidFill>
-                        <a:srgbClr val="E9EEF5"/>
-                      </a:solidFill>
-                      <a:prstDash val="solid"/>
-                      <a:round/>
-                      <a:headEnd type="none" w="med" len="med"/>
-                      <a:tailEnd type="none" w="med" len="med"/>
-                    </a:lnR>
-                    <a:lnT w="6350" cap="flat" cmpd="sng" algn="ctr">
-                      <a:solidFill>
-                        <a:srgbClr val="E9EEF5"/>
-                      </a:solidFill>
-                      <a:prstDash val="solid"/>
-                      <a:round/>
-                      <a:headEnd type="none" w="med" len="med"/>
-                      <a:tailEnd type="none" w="med" len="med"/>
-                    </a:lnT>
-                    <a:lnB w="6350" cap="flat" cmpd="sng" algn="ctr">
-                      <a:solidFill>
-                        <a:srgbClr val="E9EEF5"/>
-                      </a:solidFill>
-                      <a:prstDash val="solid"/>
-                      <a:round/>
-                      <a:headEnd type="none" w="med" len="med"/>
-                      <a:tailEnd type="none" w="med" len="med"/>
-                    </a:lnB>
-                    <a:solidFill>
-                      <a:srgbClr val="F1F5FB"/>
-                    </a:solidFill>
-                  </a:tcPr>
-                </a:tc>
-              </a:tr>
-              <a:tr h="329184">
-                <a:tc>
-                  <a:txBody>
-                    <a:bodyPr/>
-                    <a:lstStyle/>
-                    <a:p>
-                      <a:pPr algn="l" indent="0" marL="0">
-                        <a:buNone/>
-                      </a:pPr>
-                      <a:r>
-                        <a:rPr lang="en-US" sz="1100" dirty="0">
-                          <a:solidFill>
-                            <a:srgbClr val="17233B"/>
-                          </a:solidFill>
-                          <a:latin typeface="Calibri" pitchFamily="34" charset="0"/>
-                          <a:ea typeface="Calibri" pitchFamily="34" charset="-122"/>
-                          <a:cs typeface="Calibri" pitchFamily="34" charset="-120"/>
-                        </a:rPr>
-                        <a:t>wpl-wealth</a:t>
-                      </a:r>
-                      <a:endParaRPr lang="en-US" sz="1100" dirty="0">
-                        <a:latin typeface="Calibri" charset="0"/>
-                        <a:ea typeface="Calibri" charset="0"/>
-                        <a:cs typeface="Calibri" charset="0"/>
-                      </a:endParaRPr>
-                    </a:p>
-                  </a:txBody>
-                  <a:tcPr marL="91440" marR="91440" marT="45720" marB="45720" anchor="ctr">
-                    <a:lnL w="6350" cap="flat" cmpd="sng" algn="ctr">
-                      <a:solidFill>
-                        <a:srgbClr val="E9EEF5"/>
-                      </a:solidFill>
-                      <a:prstDash val="solid"/>
-                      <a:round/>
-                      <a:headEnd type="none" w="med" len="med"/>
-                      <a:tailEnd type="none" w="med" len="med"/>
-                    </a:lnL>
-                    <a:lnR w="6350" cap="flat" cmpd="sng" algn="ctr">
-                      <a:solidFill>
-                        <a:srgbClr val="E9EEF5"/>
-                      </a:solidFill>
-                      <a:prstDash val="solid"/>
-                      <a:round/>
-                      <a:headEnd type="none" w="med" len="med"/>
-                      <a:tailEnd type="none" w="med" len="med"/>
-                    </a:lnR>
-                    <a:lnT w="6350" cap="flat" cmpd="sng" algn="ctr">
-                      <a:solidFill>
-                        <a:srgbClr val="E9EEF5"/>
-                      </a:solidFill>
-                      <a:prstDash val="solid"/>
-                      <a:round/>
-                      <a:headEnd type="none" w="med" len="med"/>
-                      <a:tailEnd type="none" w="med" len="med"/>
-                    </a:lnT>
-                    <a:lnB w="6350" cap="flat" cmpd="sng" algn="ctr">
-                      <a:solidFill>
-                        <a:srgbClr val="E9EEF5"/>
-                      </a:solidFill>
-                      <a:prstDash val="solid"/>
-                      <a:round/>
-                      <a:headEnd type="none" w="med" len="med"/>
-                      <a:tailEnd type="none" w="med" len="med"/>
-                    </a:lnB>
-                  </a:tcPr>
-                </a:tc>
-                <a:tc>
-                  <a:txBody>
-                    <a:bodyPr/>
-                    <a:lstStyle/>
-                    <a:p>
-                      <a:pPr algn="ctr" indent="0" marL="0">
-                        <a:buNone/>
-                      </a:pPr>
-                      <a:r>
-                        <a:rPr lang="en-US" sz="1100" dirty="0">
-                          <a:solidFill>
-                            <a:srgbClr val="17233B"/>
-                          </a:solidFill>
-                          <a:latin typeface="Calibri" pitchFamily="34" charset="0"/>
-                          <a:ea typeface="Calibri" pitchFamily="34" charset="-122"/>
-                          <a:cs typeface="Calibri" pitchFamily="34" charset="-120"/>
-                        </a:rPr>
-                        <a:t>18</a:t>
-                      </a:r>
-                      <a:endParaRPr lang="en-US" sz="1100" dirty="0">
-                        <a:latin typeface="Calibri" charset="0"/>
-                        <a:ea typeface="Calibri" charset="0"/>
-                        <a:cs typeface="Calibri" charset="0"/>
-                      </a:endParaRPr>
-                    </a:p>
-                  </a:txBody>
-                  <a:tcPr marL="91440" marR="91440" marT="45720" marB="45720" anchor="ctr">
-                    <a:lnL w="6350" cap="flat" cmpd="sng" algn="ctr">
-                      <a:solidFill>
-                        <a:srgbClr val="E9EEF5"/>
-                      </a:solidFill>
-                      <a:prstDash val="solid"/>
-                      <a:round/>
-                      <a:headEnd type="none" w="med" len="med"/>
-                      <a:tailEnd type="none" w="med" len="med"/>
-                    </a:lnL>
-                    <a:lnR w="6350" cap="flat" cmpd="sng" algn="ctr">
-                      <a:solidFill>
-                        <a:srgbClr val="E9EEF5"/>
-                      </a:solidFill>
-                      <a:prstDash val="solid"/>
-                      <a:round/>
-                      <a:headEnd type="none" w="med" len="med"/>
-                      <a:tailEnd type="none" w="med" len="med"/>
-                    </a:lnR>
-                    <a:lnT w="6350" cap="flat" cmpd="sng" algn="ctr">
-                      <a:solidFill>
-                        <a:srgbClr val="E9EEF5"/>
-                      </a:solidFill>
-                      <a:prstDash val="solid"/>
-                      <a:round/>
-                      <a:headEnd type="none" w="med" len="med"/>
-                      <a:tailEnd type="none" w="med" len="med"/>
-                    </a:lnT>
-                    <a:lnB w="6350" cap="flat" cmpd="sng" algn="ctr">
-                      <a:solidFill>
-                        <a:srgbClr val="E9EEF5"/>
-                      </a:solidFill>
-                      <a:prstDash val="solid"/>
-                      <a:round/>
-                      <a:headEnd type="none" w="med" len="med"/>
-                      <a:tailEnd type="none" w="med" len="med"/>
-                    </a:lnB>
-                  </a:tcPr>
-                </a:tc>
-                <a:tc>
-                  <a:txBody>
-                    <a:bodyPr/>
-                    <a:lstStyle/>
-                    <a:p>
-                      <a:pPr algn="ctr" indent="0" marL="0">
-                        <a:buNone/>
-                      </a:pPr>
-                      <a:r>
-                        <a:rPr lang="en-US" sz="1100" dirty="0">
-                          <a:solidFill>
-                            <a:srgbClr val="17233B"/>
-                          </a:solidFill>
-                          <a:latin typeface="Calibri" pitchFamily="34" charset="0"/>
-                          <a:ea typeface="Calibri" pitchFamily="34" charset="-122"/>
-                          <a:cs typeface="Calibri" pitchFamily="34" charset="-120"/>
-                        </a:rPr>
-                        <a:t>5</a:t>
-                      </a:r>
-                      <a:endParaRPr lang="en-US" sz="1100" dirty="0">
-                        <a:latin typeface="Calibri" charset="0"/>
-                        <a:ea typeface="Calibri" charset="0"/>
-                        <a:cs typeface="Calibri" charset="0"/>
-                      </a:endParaRPr>
-                    </a:p>
-                  </a:txBody>
-                  <a:tcPr marL="91440" marR="91440" marT="45720" marB="45720" anchor="ctr">
-                    <a:lnL w="6350" cap="flat" cmpd="sng" algn="ctr">
-                      <a:solidFill>
-                        <a:srgbClr val="E9EEF5"/>
-                      </a:solidFill>
-                      <a:prstDash val="solid"/>
-                      <a:round/>
-                      <a:headEnd type="none" w="med" len="med"/>
-                      <a:tailEnd type="none" w="med" len="med"/>
-                    </a:lnL>
-                    <a:lnR w="6350" cap="flat" cmpd="sng" algn="ctr">
-                      <a:solidFill>
-                        <a:srgbClr val="E9EEF5"/>
-                      </a:solidFill>
-                      <a:prstDash val="solid"/>
-                      <a:round/>
-                      <a:headEnd type="none" w="med" len="med"/>
-                      <a:tailEnd type="none" w="med" len="med"/>
-                    </a:lnR>
-                    <a:lnT w="6350" cap="flat" cmpd="sng" algn="ctr">
-                      <a:solidFill>
-                        <a:srgbClr val="E9EEF5"/>
-                      </a:solidFill>
-                      <a:prstDash val="solid"/>
-                      <a:round/>
-                      <a:headEnd type="none" w="med" len="med"/>
-                      <a:tailEnd type="none" w="med" len="med"/>
-                    </a:lnT>
-                    <a:lnB w="6350" cap="flat" cmpd="sng" algn="ctr">
-                      <a:solidFill>
-                        <a:srgbClr val="E9EEF5"/>
-                      </a:solidFill>
-                      <a:prstDash val="solid"/>
-                      <a:round/>
-                      <a:headEnd type="none" w="med" len="med"/>
-                      <a:tailEnd type="none" w="med" len="med"/>
-                    </a:lnB>
-                  </a:tcPr>
-                </a:tc>
-                <a:tc>
-                  <a:txBody>
-                    <a:bodyPr/>
-                    <a:lstStyle/>
-                    <a:p>
-                      <a:pPr algn="ctr" indent="0" marL="0">
-                        <a:buNone/>
-                      </a:pPr>
-                      <a:r>
-                        <a:rPr lang="en-US" sz="1100" dirty="0">
-                          <a:solidFill>
-                            <a:srgbClr val="17233B"/>
-                          </a:solidFill>
-                          <a:latin typeface="Calibri" pitchFamily="34" charset="0"/>
-                          <a:ea typeface="Calibri" pitchFamily="34" charset="-122"/>
-                          <a:cs typeface="Calibri" pitchFamily="34" charset="-120"/>
-                        </a:rPr>
-                        <a:t>13</a:t>
-                      </a:r>
-                      <a:endParaRPr lang="en-US" sz="1100" dirty="0">
-                        <a:latin typeface="Calibri" charset="0"/>
-                        <a:ea typeface="Calibri" charset="0"/>
-                        <a:cs typeface="Calibri" charset="0"/>
-                      </a:endParaRPr>
-                    </a:p>
-                  </a:txBody>
-                  <a:tcPr marL="91440" marR="91440" marT="45720" marB="45720" anchor="ctr">
-                    <a:lnL w="6350" cap="flat" cmpd="sng" algn="ctr">
-                      <a:solidFill>
-                        <a:srgbClr val="E9EEF5"/>
-                      </a:solidFill>
-                      <a:prstDash val="solid"/>
-                      <a:round/>
-                      <a:headEnd type="none" w="med" len="med"/>
-                      <a:tailEnd type="none" w="med" len="med"/>
-                    </a:lnL>
-                    <a:lnR w="6350" cap="flat" cmpd="sng" algn="ctr">
-                      <a:solidFill>
-                        <a:srgbClr val="E9EEF5"/>
-                      </a:solidFill>
-                      <a:prstDash val="solid"/>
-                      <a:round/>
-                      <a:headEnd type="none" w="med" len="med"/>
-                      <a:tailEnd type="none" w="med" len="med"/>
-                    </a:lnR>
-                    <a:lnT w="6350" cap="flat" cmpd="sng" algn="ctr">
-                      <a:solidFill>
-                        <a:srgbClr val="E9EEF5"/>
-                      </a:solidFill>
-                      <a:prstDash val="solid"/>
-                      <a:round/>
-                      <a:headEnd type="none" w="med" len="med"/>
-                      <a:tailEnd type="none" w="med" len="med"/>
-                    </a:lnT>
-                    <a:lnB w="6350" cap="flat" cmpd="sng" algn="ctr">
-                      <a:solidFill>
-                        <a:srgbClr val="E9EEF5"/>
-                      </a:solidFill>
-                      <a:prstDash val="solid"/>
-                      <a:round/>
-                      <a:headEnd type="none" w="med" len="med"/>
-                      <a:tailEnd type="none" w="med" len="med"/>
-                    </a:lnB>
-                  </a:tcPr>
-                </a:tc>
-                <a:tc>
-                  <a:txBody>
-                    <a:bodyPr/>
-                    <a:lstStyle/>
-                    <a:p>
-                      <a:pPr algn="ctr" indent="0" marL="0">
-                        <a:buNone/>
-                      </a:pPr>
-                      <a:r>
-                        <a:rPr lang="en-US" sz="1100" dirty="0">
-                          <a:solidFill>
-                            <a:srgbClr val="17233B"/>
-                          </a:solidFill>
-                          <a:latin typeface="Calibri" pitchFamily="34" charset="0"/>
-                          <a:ea typeface="Calibri" pitchFamily="34" charset="-122"/>
-                          <a:cs typeface="Calibri" pitchFamily="34" charset="-120"/>
-                        </a:rPr>
-                        <a:t>2</a:t>
-                      </a:r>
-                      <a:endParaRPr lang="en-US" sz="1100" dirty="0">
-                        <a:latin typeface="Calibri" charset="0"/>
-                        <a:ea typeface="Calibri" charset="0"/>
-                        <a:cs typeface="Calibri" charset="0"/>
-                      </a:endParaRPr>
-                    </a:p>
-                  </a:txBody>
-                  <a:tcPr marL="91440" marR="91440" marT="45720" marB="45720" anchor="ctr">
-                    <a:lnL w="6350" cap="flat" cmpd="sng" algn="ctr">
-                      <a:solidFill>
-                        <a:srgbClr val="E9EEF5"/>
-                      </a:solidFill>
-                      <a:prstDash val="solid"/>
-                      <a:round/>
-                      <a:headEnd type="none" w="med" len="med"/>
-                      <a:tailEnd type="none" w="med" len="med"/>
-                    </a:lnL>
-                    <a:lnR w="6350" cap="flat" cmpd="sng" algn="ctr">
-                      <a:solidFill>
-                        <a:srgbClr val="E9EEF5"/>
-                      </a:solidFill>
-                      <a:prstDash val="solid"/>
-                      <a:round/>
-                      <a:headEnd type="none" w="med" len="med"/>
-                      <a:tailEnd type="none" w="med" len="med"/>
-                    </a:lnR>
-                    <a:lnT w="6350" cap="flat" cmpd="sng" algn="ctr">
-                      <a:solidFill>
-                        <a:srgbClr val="E9EEF5"/>
-                      </a:solidFill>
-                      <a:prstDash val="solid"/>
-                      <a:round/>
-                      <a:headEnd type="none" w="med" len="med"/>
-                      <a:tailEnd type="none" w="med" len="med"/>
-                    </a:lnT>
-                    <a:lnB w="6350" cap="flat" cmpd="sng" algn="ctr">
-                      <a:solidFill>
-                        <a:srgbClr val="E9EEF5"/>
-                      </a:solidFill>
-                      <a:prstDash val="solid"/>
-                      <a:round/>
-                      <a:headEnd type="none" w="med" len="med"/>
-                      <a:tailEnd type="none" w="med" len="med"/>
-                    </a:lnB>
-                  </a:tcPr>
-                </a:tc>
-                <a:tc>
-                  <a:txBody>
-                    <a:bodyPr/>
-                    <a:lstStyle/>
-                    <a:p>
-                      <a:pPr algn="ctr" indent="0" marL="0">
-                        <a:buNone/>
-                      </a:pPr>
-                      <a:r>
-                        <a:rPr lang="en-US" sz="1050" b="1" dirty="0">
-                          <a:solidFill>
-                            <a:srgbClr val="B91C1C"/>
-                          </a:solidFill>
-                          <a:latin typeface="Calibri" pitchFamily="34" charset="0"/>
-                          <a:ea typeface="Calibri" pitchFamily="34" charset="-122"/>
-                          <a:cs typeface="Calibri" pitchFamily="34" charset="-120"/>
-                        </a:rPr>
-                        <a:t>At risk</a:t>
-                      </a:r>
-                      <a:endParaRPr lang="en-US" sz="1050" dirty="0">
-                        <a:latin typeface="Calibri" charset="0"/>
-                        <a:ea typeface="Calibri" charset="0"/>
-                        <a:cs typeface="Calibri" charset="0"/>
-                      </a:endParaRPr>
-                    </a:p>
-                  </a:txBody>
-                  <a:tcPr marL="91440" marR="91440" marT="45720" marB="45720" anchor="ctr">
-                    <a:lnL w="6350" cap="flat" cmpd="sng" algn="ctr">
-                      <a:solidFill>
-                        <a:srgbClr val="E9EEF5"/>
-                      </a:solidFill>
-                      <a:prstDash val="solid"/>
-                      <a:round/>
-                      <a:headEnd type="none" w="med" len="med"/>
-                      <a:tailEnd type="none" w="med" len="med"/>
-                    </a:lnL>
-                    <a:lnR w="6350" cap="flat" cmpd="sng" algn="ctr">
-                      <a:solidFill>
-                        <a:srgbClr val="E9EEF5"/>
-                      </a:solidFill>
-                      <a:prstDash val="solid"/>
-                      <a:round/>
-                      <a:headEnd type="none" w="med" len="med"/>
-                      <a:tailEnd type="none" w="med" len="med"/>
-                    </a:lnR>
-                    <a:lnT w="6350" cap="flat" cmpd="sng" algn="ctr">
-                      <a:solidFill>
-                        <a:srgbClr val="E9EEF5"/>
-                      </a:solidFill>
-                      <a:prstDash val="solid"/>
-                      <a:round/>
-                      <a:headEnd type="none" w="med" len="med"/>
-                      <a:tailEnd type="none" w="med" len="med"/>
-                    </a:lnT>
-                    <a:lnB w="6350" cap="flat" cmpd="sng" algn="ctr">
-                      <a:solidFill>
-                        <a:srgbClr val="E9EEF5"/>
-                      </a:solidFill>
-                      <a:prstDash val="solid"/>
-                      <a:round/>
-                      <a:headEnd type="none" w="med" len="med"/>
-                      <a:tailEnd type="none" w="med" len="med"/>
-                    </a:lnB>
-                    <a:solidFill>
-                      <a:srgbClr val="FEE2E2"/>
-                    </a:solidFill>
-                  </a:tcPr>
-                </a:tc>
-              </a:tr>
-              <a:tr h="329184">
-                <a:tc>
-                  <a:txBody>
-                    <a:bodyPr/>
-                    <a:lstStyle/>
-                    <a:p>
-                      <a:pPr algn="l" indent="0" marL="0">
-                        <a:buNone/>
-                      </a:pPr>
-                      <a:r>
-                        <a:rPr lang="en-US" sz="1100" dirty="0">
-                          <a:solidFill>
-                            <a:srgbClr val="17233B"/>
-                          </a:solidFill>
-                          <a:latin typeface="Calibri" pitchFamily="34" charset="0"/>
-                          <a:ea typeface="Calibri" pitchFamily="34" charset="-122"/>
-                          <a:cs typeface="Calibri" pitchFamily="34" charset="-120"/>
-                        </a:rPr>
-                        <a:t>mighty</a:t>
-                      </a:r>
-                      <a:endParaRPr lang="en-US" sz="1100" dirty="0">
-                        <a:latin typeface="Calibri" charset="0"/>
-                        <a:ea typeface="Calibri" charset="0"/>
-                        <a:cs typeface="Calibri" charset="0"/>
-                      </a:endParaRPr>
-                    </a:p>
-                  </a:txBody>
-                  <a:tcPr marL="91440" marR="91440" marT="45720" marB="45720" anchor="ctr">
-                    <a:lnL w="6350" cap="flat" cmpd="sng" algn="ctr">
-                      <a:solidFill>
-                        <a:srgbClr val="E9EEF5"/>
-                      </a:solidFill>
-                      <a:prstDash val="solid"/>
-                      <a:round/>
-                      <a:headEnd type="none" w="med" len="med"/>
-                      <a:tailEnd type="none" w="med" len="med"/>
-                    </a:lnL>
-                    <a:lnR w="6350" cap="flat" cmpd="sng" algn="ctr">
-                      <a:solidFill>
-                        <a:srgbClr val="E9EEF5"/>
-                      </a:solidFill>
-                      <a:prstDash val="solid"/>
-                      <a:round/>
-                      <a:headEnd type="none" w="med" len="med"/>
-                      <a:tailEnd type="none" w="med" len="med"/>
-                    </a:lnR>
-                    <a:lnT w="6350" cap="flat" cmpd="sng" algn="ctr">
-                      <a:solidFill>
-                        <a:srgbClr val="E9EEF5"/>
-                      </a:solidFill>
-                      <a:prstDash val="solid"/>
-                      <a:round/>
-                      <a:headEnd type="none" w="med" len="med"/>
-                      <a:tailEnd type="none" w="med" len="med"/>
-                    </a:lnT>
-                    <a:lnB w="6350" cap="flat" cmpd="sng" algn="ctr">
-                      <a:solidFill>
-                        <a:srgbClr val="E9EEF5"/>
-                      </a:solidFill>
-                      <a:prstDash val="solid"/>
-                      <a:round/>
-                      <a:headEnd type="none" w="med" len="med"/>
-                      <a:tailEnd type="none" w="med" len="med"/>
-                    </a:lnB>
-                  </a:tcPr>
-                </a:tc>
-                <a:tc>
-                  <a:txBody>
-                    <a:bodyPr/>
-                    <a:lstStyle/>
-                    <a:p>
-                      <a:pPr algn="ctr" indent="0" marL="0">
-                        <a:buNone/>
-                      </a:pPr>
-                      <a:r>
-                        <a:rPr lang="en-US" sz="1100" dirty="0">
-                          <a:solidFill>
-                            <a:srgbClr val="17233B"/>
-                          </a:solidFill>
-                          <a:latin typeface="Calibri" pitchFamily="34" charset="0"/>
-                          <a:ea typeface="Calibri" pitchFamily="34" charset="-122"/>
-                          <a:cs typeface="Calibri" pitchFamily="34" charset="-120"/>
-                        </a:rPr>
-                        <a:t>12</a:t>
-                      </a:r>
-                      <a:endParaRPr lang="en-US" sz="1100" dirty="0">
-                        <a:latin typeface="Calibri" charset="0"/>
-                        <a:ea typeface="Calibri" charset="0"/>
-                        <a:cs typeface="Calibri" charset="0"/>
-                      </a:endParaRPr>
-                    </a:p>
-                  </a:txBody>
-                  <a:tcPr marL="91440" marR="91440" marT="45720" marB="45720" anchor="ctr">
-                    <a:lnL w="6350" cap="flat" cmpd="sng" algn="ctr">
-                      <a:solidFill>
-                        <a:srgbClr val="E9EEF5"/>
-                      </a:solidFill>
-                      <a:prstDash val="solid"/>
-                      <a:round/>
-                      <a:headEnd type="none" w="med" len="med"/>
-                      <a:tailEnd type="none" w="med" len="med"/>
-                    </a:lnL>
-                    <a:lnR w="6350" cap="flat" cmpd="sng" algn="ctr">
-                      <a:solidFill>
-                        <a:srgbClr val="E9EEF5"/>
-                      </a:solidFill>
-                      <a:prstDash val="solid"/>
-                      <a:round/>
-                      <a:headEnd type="none" w="med" len="med"/>
-                      <a:tailEnd type="none" w="med" len="med"/>
-                    </a:lnR>
-                    <a:lnT w="6350" cap="flat" cmpd="sng" algn="ctr">
-                      <a:solidFill>
-                        <a:srgbClr val="E9EEF5"/>
-                      </a:solidFill>
-                      <a:prstDash val="solid"/>
-                      <a:round/>
-                      <a:headEnd type="none" w="med" len="med"/>
-                      <a:tailEnd type="none" w="med" len="med"/>
-                    </a:lnT>
-                    <a:lnB w="6350" cap="flat" cmpd="sng" algn="ctr">
-                      <a:solidFill>
-                        <a:srgbClr val="E9EEF5"/>
-                      </a:solidFill>
-                      <a:prstDash val="solid"/>
-                      <a:round/>
-                      <a:headEnd type="none" w="med" len="med"/>
-                      <a:tailEnd type="none" w="med" len="med"/>
-                    </a:lnB>
-                  </a:tcPr>
-                </a:tc>
-                <a:tc>
-                  <a:txBody>
-                    <a:bodyPr/>
-                    <a:lstStyle/>
-                    <a:p>
-                      <a:pPr algn="ctr" indent="0" marL="0">
-                        <a:buNone/>
-                      </a:pPr>
-                      <a:r>
-                        <a:rPr lang="en-US" sz="1100" dirty="0">
-                          <a:solidFill>
-                            <a:srgbClr val="17233B"/>
-                          </a:solidFill>
-                          <a:latin typeface="Calibri" pitchFamily="34" charset="0"/>
-                          <a:ea typeface="Calibri" pitchFamily="34" charset="-122"/>
-                          <a:cs typeface="Calibri" pitchFamily="34" charset="-120"/>
-                        </a:rPr>
-                        <a:t>11</a:t>
-                      </a:r>
-                      <a:endParaRPr lang="en-US" sz="1100" dirty="0">
-                        <a:latin typeface="Calibri" charset="0"/>
-                        <a:ea typeface="Calibri" charset="0"/>
-                        <a:cs typeface="Calibri" charset="0"/>
-                      </a:endParaRPr>
-                    </a:p>
-                  </a:txBody>
-                  <a:tcPr marL="91440" marR="91440" marT="45720" marB="45720" anchor="ctr">
-                    <a:lnL w="6350" cap="flat" cmpd="sng" algn="ctr">
-                      <a:solidFill>
-                        <a:srgbClr val="E9EEF5"/>
-                      </a:solidFill>
-                      <a:prstDash val="solid"/>
-                      <a:round/>
-                      <a:headEnd type="none" w="med" len="med"/>
-                      <a:tailEnd type="none" w="med" len="med"/>
-                    </a:lnL>
-                    <a:lnR w="6350" cap="flat" cmpd="sng" algn="ctr">
-                      <a:solidFill>
-                        <a:srgbClr val="E9EEF5"/>
-                      </a:solidFill>
-                      <a:prstDash val="solid"/>
-                      <a:round/>
-                      <a:headEnd type="none" w="med" len="med"/>
-                      <a:tailEnd type="none" w="med" len="med"/>
-                    </a:lnR>
-                    <a:lnT w="6350" cap="flat" cmpd="sng" algn="ctr">
-                      <a:solidFill>
-                        <a:srgbClr val="E9EEF5"/>
-                      </a:solidFill>
-                      <a:prstDash val="solid"/>
-                      <a:round/>
-                      <a:headEnd type="none" w="med" len="med"/>
-                      <a:tailEnd type="none" w="med" len="med"/>
-                    </a:lnT>
-                    <a:lnB w="6350" cap="flat" cmpd="sng" algn="ctr">
-                      <a:solidFill>
-                        <a:srgbClr val="E9EEF5"/>
-                      </a:solidFill>
-                      <a:prstDash val="solid"/>
-                      <a:round/>
-                      <a:headEnd type="none" w="med" len="med"/>
-                      <a:tailEnd type="none" w="med" len="med"/>
-                    </a:lnB>
-                  </a:tcPr>
-                </a:tc>
-                <a:tc>
-                  <a:txBody>
-                    <a:bodyPr/>
-                    <a:lstStyle/>
-                    <a:p>
-                      <a:pPr algn="ctr" indent="0" marL="0">
-                        <a:buNone/>
-                      </a:pPr>
-                      <a:r>
-                        <a:rPr lang="en-US" sz="1100" dirty="0">
-                          <a:solidFill>
-                            <a:srgbClr val="17233B"/>
-                          </a:solidFill>
-                          <a:latin typeface="Calibri" pitchFamily="34" charset="0"/>
-                          <a:ea typeface="Calibri" pitchFamily="34" charset="-122"/>
-                          <a:cs typeface="Calibri" pitchFamily="34" charset="-120"/>
-                        </a:rPr>
-                        <a:t>1</a:t>
-                      </a:r>
-                      <a:endParaRPr lang="en-US" sz="1100" dirty="0">
-                        <a:latin typeface="Calibri" charset="0"/>
-                        <a:ea typeface="Calibri" charset="0"/>
-                        <a:cs typeface="Calibri" charset="0"/>
-                      </a:endParaRPr>
-                    </a:p>
-                  </a:txBody>
-                  <a:tcPr marL="91440" marR="91440" marT="45720" marB="45720" anchor="ctr">
-                    <a:lnL w="6350" cap="flat" cmpd="sng" algn="ctr">
-                      <a:solidFill>
-                        <a:srgbClr val="E9EEF5"/>
-                      </a:solidFill>
-                      <a:prstDash val="solid"/>
-                      <a:round/>
-                      <a:headEnd type="none" w="med" len="med"/>
-                      <a:tailEnd type="none" w="med" len="med"/>
-                    </a:lnL>
-                    <a:lnR w="6350" cap="flat" cmpd="sng" algn="ctr">
-                      <a:solidFill>
-                        <a:srgbClr val="E9EEF5"/>
-                      </a:solidFill>
-                      <a:prstDash val="solid"/>
-                      <a:round/>
-                      <a:headEnd type="none" w="med" len="med"/>
-                      <a:tailEnd type="none" w="med" len="med"/>
-                    </a:lnR>
-                    <a:lnT w="6350" cap="flat" cmpd="sng" algn="ctr">
-                      <a:solidFill>
-                        <a:srgbClr val="E9EEF5"/>
-                      </a:solidFill>
-                      <a:prstDash val="solid"/>
-                      <a:round/>
-                      <a:headEnd type="none" w="med" len="med"/>
-                      <a:tailEnd type="none" w="med" len="med"/>
-                    </a:lnT>
-                    <a:lnB w="6350" cap="flat" cmpd="sng" algn="ctr">
-                      <a:solidFill>
-                        <a:srgbClr val="E9EEF5"/>
-                      </a:solidFill>
-                      <a:prstDash val="solid"/>
-                      <a:round/>
-                      <a:headEnd type="none" w="med" len="med"/>
-                      <a:tailEnd type="none" w="med" len="med"/>
-                    </a:lnB>
-                  </a:tcPr>
-                </a:tc>
-                <a:tc>
-                  <a:txBody>
-                    <a:bodyPr/>
-                    <a:lstStyle/>
-                    <a:p>
-                      <a:pPr algn="ctr" indent="0" marL="0">
-                        <a:buNone/>
-                      </a:pPr>
-                      <a:r>
-                        <a:rPr lang="en-US" sz="1100" dirty="0">
-                          <a:solidFill>
-                            <a:srgbClr val="17233B"/>
-                          </a:solidFill>
-                          <a:latin typeface="Calibri" pitchFamily="34" charset="0"/>
-                          <a:ea typeface="Calibri" pitchFamily="34" charset="-122"/>
-                          <a:cs typeface="Calibri" pitchFamily="34" charset="-120"/>
-                        </a:rPr>
-                        <a:t>—</a:t>
-                      </a:r>
-                      <a:endParaRPr lang="en-US" sz="1100" dirty="0">
-                        <a:latin typeface="Calibri" charset="0"/>
-                        <a:ea typeface="Calibri" charset="0"/>
-                        <a:cs typeface="Calibri" charset="0"/>
-                      </a:endParaRPr>
-                    </a:p>
-                  </a:txBody>
-                  <a:tcPr marL="91440" marR="91440" marT="45720" marB="45720" anchor="ctr">
-                    <a:lnL w="6350" cap="flat" cmpd="sng" algn="ctr">
-                      <a:solidFill>
-                        <a:srgbClr val="E9EEF5"/>
-                      </a:solidFill>
-                      <a:prstDash val="solid"/>
-                      <a:round/>
-                      <a:headEnd type="none" w="med" len="med"/>
-                      <a:tailEnd type="none" w="med" len="med"/>
-                    </a:lnL>
-                    <a:lnR w="6350" cap="flat" cmpd="sng" algn="ctr">
-                      <a:solidFill>
-                        <a:srgbClr val="E9EEF5"/>
-                      </a:solidFill>
-                      <a:prstDash val="solid"/>
-                      <a:round/>
-                      <a:headEnd type="none" w="med" len="med"/>
-                      <a:tailEnd type="none" w="med" len="med"/>
-                    </a:lnR>
-                    <a:lnT w="6350" cap="flat" cmpd="sng" algn="ctr">
-                      <a:solidFill>
-                        <a:srgbClr val="E9EEF5"/>
-                      </a:solidFill>
-                      <a:prstDash val="solid"/>
-                      <a:round/>
-                      <a:headEnd type="none" w="med" len="med"/>
-                      <a:tailEnd type="none" w="med" len="med"/>
-                    </a:lnT>
-                    <a:lnB w="6350" cap="flat" cmpd="sng" algn="ctr">
-                      <a:solidFill>
-                        <a:srgbClr val="E9EEF5"/>
-                      </a:solidFill>
-                      <a:prstDash val="solid"/>
-                      <a:round/>
-                      <a:headEnd type="none" w="med" len="med"/>
-                      <a:tailEnd type="none" w="med" len="med"/>
-                    </a:lnB>
-                  </a:tcPr>
-                </a:tc>
-                <a:tc>
-                  <a:txBody>
-                    <a:bodyPr/>
-                    <a:lstStyle/>
-                    <a:p>
-                      <a:pPr algn="ctr" indent="0" marL="0">
-                        <a:buNone/>
-                      </a:pPr>
-                      <a:r>
-                        <a:rPr lang="en-US" sz="1050" b="1" dirty="0">
-                          <a:solidFill>
-                            <a:srgbClr val="B45309"/>
-                          </a:solidFill>
-                          <a:latin typeface="Calibri" pitchFamily="34" charset="0"/>
-                          <a:ea typeface="Calibri" pitchFamily="34" charset="-122"/>
-                          <a:cs typeface="Calibri" pitchFamily="34" charset="-120"/>
-                        </a:rPr>
-                        <a:t>Review</a:t>
-                      </a:r>
-                      <a:endParaRPr lang="en-US" sz="1050" dirty="0">
-                        <a:latin typeface="Calibri" charset="0"/>
-                        <a:ea typeface="Calibri" charset="0"/>
-                        <a:cs typeface="Calibri" charset="0"/>
-                      </a:endParaRPr>
-                    </a:p>
-                  </a:txBody>
-                  <a:tcPr marL="91440" marR="91440" marT="45720" marB="45720" anchor="ctr">
-                    <a:lnL w="6350" cap="flat" cmpd="sng" algn="ctr">
-                      <a:solidFill>
-                        <a:srgbClr val="E9EEF5"/>
-                      </a:solidFill>
-                      <a:prstDash val="solid"/>
-                      <a:round/>
-                      <a:headEnd type="none" w="med" len="med"/>
-                      <a:tailEnd type="none" w="med" len="med"/>
-                    </a:lnL>
-                    <a:lnR w="6350" cap="flat" cmpd="sng" algn="ctr">
-                      <a:solidFill>
-                        <a:srgbClr val="E9EEF5"/>
-                      </a:solidFill>
-                      <a:prstDash val="solid"/>
-                      <a:round/>
-                      <a:headEnd type="none" w="med" len="med"/>
-                      <a:tailEnd type="none" w="med" len="med"/>
-                    </a:lnR>
-                    <a:lnT w="6350" cap="flat" cmpd="sng" algn="ctr">
-                      <a:solidFill>
-                        <a:srgbClr val="E9EEF5"/>
-                      </a:solidFill>
-                      <a:prstDash val="solid"/>
-                      <a:round/>
-                      <a:headEnd type="none" w="med" len="med"/>
-                      <a:tailEnd type="none" w="med" len="med"/>
-                    </a:lnT>
-                    <a:lnB w="6350" cap="flat" cmpd="sng" algn="ctr">
-                      <a:solidFill>
-                        <a:srgbClr val="E9EEF5"/>
-                      </a:solidFill>
-                      <a:prstDash val="solid"/>
-                      <a:round/>
-                      <a:headEnd type="none" w="med" len="med"/>
-                      <a:tailEnd type="none" w="med" len="med"/>
-                    </a:lnB>
-                    <a:solidFill>
-                      <a:srgbClr val="FEF3C7"/>
-                    </a:solidFill>
-                  </a:tcPr>
-                </a:tc>
-              </a:tr>
-              <a:tr h="329184">
-                <a:tc>
-                  <a:txBody>
-                    <a:bodyPr/>
-                    <a:lstStyle/>
-                    <a:p>
-                      <a:pPr algn="l" indent="0" marL="0">
-                        <a:buNone/>
-                      </a:pPr>
-                      <a:r>
-                        <a:rPr lang="en-US" sz="1100" dirty="0">
-                          <a:solidFill>
-                            <a:srgbClr val="17233B"/>
-                          </a:solidFill>
-                          <a:latin typeface="Calibri" pitchFamily="34" charset="0"/>
-                          <a:ea typeface="Calibri" pitchFamily="34" charset="-122"/>
-                          <a:cs typeface="Calibri" pitchFamily="34" charset="-120"/>
-                        </a:rPr>
-                        <a:t>spl-onboarding</a:t>
-                      </a:r>
-                      <a:endParaRPr lang="en-US" sz="1100" dirty="0">
-                        <a:latin typeface="Calibri" charset="0"/>
-                        <a:ea typeface="Calibri" charset="0"/>
-                        <a:cs typeface="Calibri" charset="0"/>
-                      </a:endParaRPr>
-                    </a:p>
-                  </a:txBody>
-                  <a:tcPr marL="91440" marR="91440" marT="45720" marB="45720" anchor="ctr">
-                    <a:lnL w="6350" cap="flat" cmpd="sng" algn="ctr">
-                      <a:solidFill>
-                        <a:srgbClr val="E9EEF5"/>
-                      </a:solidFill>
-                      <a:prstDash val="solid"/>
-                      <a:round/>
-                      <a:headEnd type="none" w="med" len="med"/>
-                      <a:tailEnd type="none" w="med" len="med"/>
-                    </a:lnL>
-                    <a:lnR w="6350" cap="flat" cmpd="sng" algn="ctr">
-                      <a:solidFill>
-                        <a:srgbClr val="E9EEF5"/>
-                      </a:solidFill>
-                      <a:prstDash val="solid"/>
-                      <a:round/>
-                      <a:headEnd type="none" w="med" len="med"/>
-                      <a:tailEnd type="none" w="med" len="med"/>
-                    </a:lnR>
-                    <a:lnT w="6350" cap="flat" cmpd="sng" algn="ctr">
-                      <a:solidFill>
-                        <a:srgbClr val="E9EEF5"/>
-                      </a:solidFill>
-                      <a:prstDash val="solid"/>
-                      <a:round/>
-                      <a:headEnd type="none" w="med" len="med"/>
-                      <a:tailEnd type="none" w="med" len="med"/>
-                    </a:lnT>
-                    <a:lnB w="6350" cap="flat" cmpd="sng" algn="ctr">
-                      <a:solidFill>
-                        <a:srgbClr val="E9EEF5"/>
-                      </a:solidFill>
-                      <a:prstDash val="solid"/>
-                      <a:round/>
-                      <a:headEnd type="none" w="med" len="med"/>
-                      <a:tailEnd type="none" w="med" len="med"/>
-                    </a:lnB>
-                  </a:tcPr>
-                </a:tc>
-                <a:tc>
-                  <a:txBody>
-                    <a:bodyPr/>
-                    <a:lstStyle/>
-                    <a:p>
-                      <a:pPr algn="ctr" indent="0" marL="0">
-                        <a:buNone/>
-                      </a:pPr>
-                      <a:r>
-                        <a:rPr lang="en-US" sz="1100" dirty="0">
-                          <a:solidFill>
-                            <a:srgbClr val="17233B"/>
-                          </a:solidFill>
-                          <a:latin typeface="Calibri" pitchFamily="34" charset="0"/>
-                          <a:ea typeface="Calibri" pitchFamily="34" charset="-122"/>
-                          <a:cs typeface="Calibri" pitchFamily="34" charset="-120"/>
-                        </a:rPr>
-                        <a:t>10</a:t>
-                      </a:r>
-                      <a:endParaRPr lang="en-US" sz="1100" dirty="0">
-                        <a:latin typeface="Calibri" charset="0"/>
-                        <a:ea typeface="Calibri" charset="0"/>
-                        <a:cs typeface="Calibri" charset="0"/>
-                      </a:endParaRPr>
-                    </a:p>
-                  </a:txBody>
-                  <a:tcPr marL="91440" marR="91440" marT="45720" marB="45720" anchor="ctr">
-                    <a:lnL w="6350" cap="flat" cmpd="sng" algn="ctr">
-                      <a:solidFill>
-                        <a:srgbClr val="E9EEF5"/>
-                      </a:solidFill>
-                      <a:prstDash val="solid"/>
-                      <a:round/>
-                      <a:headEnd type="none" w="med" len="med"/>
-                      <a:tailEnd type="none" w="med" len="med"/>
-                    </a:lnL>
-                    <a:lnR w="6350" cap="flat" cmpd="sng" algn="ctr">
-                      <a:solidFill>
-                        <a:srgbClr val="E9EEF5"/>
-                      </a:solidFill>
-                      <a:prstDash val="solid"/>
-                      <a:round/>
-                      <a:headEnd type="none" w="med" len="med"/>
-                      <a:tailEnd type="none" w="med" len="med"/>
-                    </a:lnR>
-                    <a:lnT w="6350" cap="flat" cmpd="sng" algn="ctr">
-                      <a:solidFill>
-                        <a:srgbClr val="E9EEF5"/>
-                      </a:solidFill>
-                      <a:prstDash val="solid"/>
-                      <a:round/>
-                      <a:headEnd type="none" w="med" len="med"/>
-                      <a:tailEnd type="none" w="med" len="med"/>
-                    </a:lnT>
-                    <a:lnB w="6350" cap="flat" cmpd="sng" algn="ctr">
-                      <a:solidFill>
-                        <a:srgbClr val="E9EEF5"/>
-                      </a:solidFill>
-                      <a:prstDash val="solid"/>
-                      <a:round/>
-                      <a:headEnd type="none" w="med" len="med"/>
-                      <a:tailEnd type="none" w="med" len="med"/>
-                    </a:lnB>
-                  </a:tcPr>
-                </a:tc>
-                <a:tc>
-                  <a:txBody>
-                    <a:bodyPr/>
-                    <a:lstStyle/>
-                    <a:p>
-                      <a:pPr algn="ctr" indent="0" marL="0">
-                        <a:buNone/>
-                      </a:pPr>
-                      <a:r>
-                        <a:rPr lang="en-US" sz="1100" dirty="0">
-                          <a:solidFill>
-                            <a:srgbClr val="17233B"/>
-                          </a:solidFill>
-                          <a:latin typeface="Calibri" pitchFamily="34" charset="0"/>
-                          <a:ea typeface="Calibri" pitchFamily="34" charset="-122"/>
-                          <a:cs typeface="Calibri" pitchFamily="34" charset="-120"/>
-                        </a:rPr>
-                        <a:t>8</a:t>
-                      </a:r>
-                      <a:endParaRPr lang="en-US" sz="1100" dirty="0">
-                        <a:latin typeface="Calibri" charset="0"/>
-                        <a:ea typeface="Calibri" charset="0"/>
-                        <a:cs typeface="Calibri" charset="0"/>
-                      </a:endParaRPr>
-                    </a:p>
-                  </a:txBody>
-                  <a:tcPr marL="91440" marR="91440" marT="45720" marB="45720" anchor="ctr">
-                    <a:lnL w="6350" cap="flat" cmpd="sng" algn="ctr">
-                      <a:solidFill>
-                        <a:srgbClr val="E9EEF5"/>
-                      </a:solidFill>
-                      <a:prstDash val="solid"/>
-                      <a:round/>
-                      <a:headEnd type="none" w="med" len="med"/>
-                      <a:tailEnd type="none" w="med" len="med"/>
-                    </a:lnL>
-                    <a:lnR w="6350" cap="flat" cmpd="sng" algn="ctr">
-                      <a:solidFill>
-                        <a:srgbClr val="E9EEF5"/>
-                      </a:solidFill>
-                      <a:prstDash val="solid"/>
-                      <a:round/>
-                      <a:headEnd type="none" w="med" len="med"/>
-                      <a:tailEnd type="none" w="med" len="med"/>
-                    </a:lnR>
-                    <a:lnT w="6350" cap="flat" cmpd="sng" algn="ctr">
-                      <a:solidFill>
-                        <a:srgbClr val="E9EEF5"/>
-                      </a:solidFill>
-                      <a:prstDash val="solid"/>
-                      <a:round/>
-                      <a:headEnd type="none" w="med" len="med"/>
-                      <a:tailEnd type="none" w="med" len="med"/>
-                    </a:lnT>
-                    <a:lnB w="6350" cap="flat" cmpd="sng" algn="ctr">
-                      <a:solidFill>
-                        <a:srgbClr val="E9EEF5"/>
-                      </a:solidFill>
-                      <a:prstDash val="solid"/>
-                      <a:round/>
-                      <a:headEnd type="none" w="med" len="med"/>
-                      <a:tailEnd type="none" w="med" len="med"/>
-                    </a:lnB>
-                  </a:tcPr>
-                </a:tc>
-                <a:tc>
-                  <a:txBody>
-                    <a:bodyPr/>
-                    <a:lstStyle/>
-                    <a:p>
-                      <a:pPr algn="ctr" indent="0" marL="0">
-                        <a:buNone/>
-                      </a:pPr>
-                      <a:r>
-                        <a:rPr lang="en-US" sz="1100" dirty="0">
-                          <a:solidFill>
-                            <a:srgbClr val="17233B"/>
-                          </a:solidFill>
-                          <a:latin typeface="Calibri" pitchFamily="34" charset="0"/>
-                          <a:ea typeface="Calibri" pitchFamily="34" charset="-122"/>
-                          <a:cs typeface="Calibri" pitchFamily="34" charset="-120"/>
-                        </a:rPr>
-                        <a:t>2</a:t>
-                      </a:r>
-                      <a:endParaRPr lang="en-US" sz="1100" dirty="0">
-                        <a:latin typeface="Calibri" charset="0"/>
-                        <a:ea typeface="Calibri" charset="0"/>
-                        <a:cs typeface="Calibri" charset="0"/>
-                      </a:endParaRPr>
-                    </a:p>
-                  </a:txBody>
-                  <a:tcPr marL="91440" marR="91440" marT="45720" marB="45720" anchor="ctr">
-                    <a:lnL w="6350" cap="flat" cmpd="sng" algn="ctr">
-                      <a:solidFill>
-                        <a:srgbClr val="E9EEF5"/>
-                      </a:solidFill>
-                      <a:prstDash val="solid"/>
-                      <a:round/>
-                      <a:headEnd type="none" w="med" len="med"/>
-                      <a:tailEnd type="none" w="med" len="med"/>
-                    </a:lnL>
-                    <a:lnR w="6350" cap="flat" cmpd="sng" algn="ctr">
-                      <a:solidFill>
-                        <a:srgbClr val="E9EEF5"/>
-                      </a:solidFill>
-                      <a:prstDash val="solid"/>
-                      <a:round/>
-                      <a:headEnd type="none" w="med" len="med"/>
-                      <a:tailEnd type="none" w="med" len="med"/>
-                    </a:lnR>
-                    <a:lnT w="6350" cap="flat" cmpd="sng" algn="ctr">
-                      <a:solidFill>
-                        <a:srgbClr val="E9EEF5"/>
-                      </a:solidFill>
-                      <a:prstDash val="solid"/>
-                      <a:round/>
-                      <a:headEnd type="none" w="med" len="med"/>
-                      <a:tailEnd type="none" w="med" len="med"/>
-                    </a:lnT>
-                    <a:lnB w="6350" cap="flat" cmpd="sng" algn="ctr">
-                      <a:solidFill>
-                        <a:srgbClr val="E9EEF5"/>
-                      </a:solidFill>
-                      <a:prstDash val="solid"/>
-                      <a:round/>
-                      <a:headEnd type="none" w="med" len="med"/>
-                      <a:tailEnd type="none" w="med" len="med"/>
-                    </a:lnB>
-                  </a:tcPr>
-                </a:tc>
-                <a:tc>
-                  <a:txBody>
-                    <a:bodyPr/>
-                    <a:lstStyle/>
-                    <a:p>
-                      <a:pPr algn="ctr" indent="0" marL="0">
-                        <a:buNone/>
-                      </a:pPr>
-                      <a:r>
-                        <a:rPr lang="en-US" sz="1100" dirty="0">
-                          <a:solidFill>
-                            <a:srgbClr val="17233B"/>
-                          </a:solidFill>
-                          <a:latin typeface="Calibri" pitchFamily="34" charset="0"/>
-                          <a:ea typeface="Calibri" pitchFamily="34" charset="-122"/>
-                          <a:cs typeface="Calibri" pitchFamily="34" charset="-120"/>
-                        </a:rPr>
-                        <a:t>—</a:t>
-                      </a:r>
-                      <a:endParaRPr lang="en-US" sz="1100" dirty="0">
-                        <a:latin typeface="Calibri" charset="0"/>
-                        <a:ea typeface="Calibri" charset="0"/>
-                        <a:cs typeface="Calibri" charset="0"/>
-                      </a:endParaRPr>
-                    </a:p>
-                  </a:txBody>
-                  <a:tcPr marL="91440" marR="91440" marT="45720" marB="45720" anchor="ctr">
-                    <a:lnL w="6350" cap="flat" cmpd="sng" algn="ctr">
-                      <a:solidFill>
-                        <a:srgbClr val="E9EEF5"/>
-                      </a:solidFill>
-                      <a:prstDash val="solid"/>
-                      <a:round/>
-                      <a:headEnd type="none" w="med" len="med"/>
-                      <a:tailEnd type="none" w="med" len="med"/>
-                    </a:lnL>
-                    <a:lnR w="6350" cap="flat" cmpd="sng" algn="ctr">
-                      <a:solidFill>
-                        <a:srgbClr val="E9EEF5"/>
-                      </a:solidFill>
-                      <a:prstDash val="solid"/>
-                      <a:round/>
-                      <a:headEnd type="none" w="med" len="med"/>
-                      <a:tailEnd type="none" w="med" len="med"/>
-                    </a:lnR>
-                    <a:lnT w="6350" cap="flat" cmpd="sng" algn="ctr">
-                      <a:solidFill>
-                        <a:srgbClr val="E9EEF5"/>
-                      </a:solidFill>
-                      <a:prstDash val="solid"/>
-                      <a:round/>
-                      <a:headEnd type="none" w="med" len="med"/>
-                      <a:tailEnd type="none" w="med" len="med"/>
-                    </a:lnT>
-                    <a:lnB w="6350" cap="flat" cmpd="sng" algn="ctr">
-                      <a:solidFill>
-                        <a:srgbClr val="E9EEF5"/>
-                      </a:solidFill>
-                      <a:prstDash val="solid"/>
-                      <a:round/>
-                      <a:headEnd type="none" w="med" len="med"/>
-                      <a:tailEnd type="none" w="med" len="med"/>
-                    </a:lnB>
-                  </a:tcPr>
-                </a:tc>
-                <a:tc>
-                  <a:txBody>
-                    <a:bodyPr/>
-                    <a:lstStyle/>
-                    <a:p>
-                      <a:pPr algn="ctr" indent="0" marL="0">
-                        <a:buNone/>
-                      </a:pPr>
-                      <a:r>
-                        <a:rPr lang="en-US" sz="1050" b="1" dirty="0">
-                          <a:solidFill>
-                            <a:srgbClr val="B45309"/>
-                          </a:solidFill>
-                          <a:latin typeface="Calibri" pitchFamily="34" charset="0"/>
-                          <a:ea typeface="Calibri" pitchFamily="34" charset="-122"/>
-                          <a:cs typeface="Calibri" pitchFamily="34" charset="-120"/>
-                        </a:rPr>
-                        <a:t>Review</a:t>
-                      </a:r>
-                      <a:endParaRPr lang="en-US" sz="1050" dirty="0">
-                        <a:latin typeface="Calibri" charset="0"/>
-                        <a:ea typeface="Calibri" charset="0"/>
-                        <a:cs typeface="Calibri" charset="0"/>
-                      </a:endParaRPr>
-                    </a:p>
-                  </a:txBody>
-                  <a:tcPr marL="91440" marR="91440" marT="45720" marB="45720" anchor="ctr">
-                    <a:lnL w="6350" cap="flat" cmpd="sng" algn="ctr">
-                      <a:solidFill>
-                        <a:srgbClr val="E9EEF5"/>
-                      </a:solidFill>
-                      <a:prstDash val="solid"/>
-                      <a:round/>
-                      <a:headEnd type="none" w="med" len="med"/>
-                      <a:tailEnd type="none" w="med" len="med"/>
-                    </a:lnL>
-                    <a:lnR w="6350" cap="flat" cmpd="sng" algn="ctr">
-                      <a:solidFill>
-                        <a:srgbClr val="E9EEF5"/>
-                      </a:solidFill>
-                      <a:prstDash val="solid"/>
-                      <a:round/>
-                      <a:headEnd type="none" w="med" len="med"/>
-                      <a:tailEnd type="none" w="med" len="med"/>
-                    </a:lnR>
-                    <a:lnT w="6350" cap="flat" cmpd="sng" algn="ctr">
-                      <a:solidFill>
-                        <a:srgbClr val="E9EEF5"/>
-                      </a:solidFill>
-                      <a:prstDash val="solid"/>
-                      <a:round/>
-                      <a:headEnd type="none" w="med" len="med"/>
-                      <a:tailEnd type="none" w="med" len="med"/>
-                    </a:lnT>
-                    <a:lnB w="6350" cap="flat" cmpd="sng" algn="ctr">
-                      <a:solidFill>
-                        <a:srgbClr val="E9EEF5"/>
-                      </a:solidFill>
-                      <a:prstDash val="solid"/>
-                      <a:round/>
-                      <a:headEnd type="none" w="med" len="med"/>
-                      <a:tailEnd type="none" w="med" len="med"/>
-                    </a:lnB>
-                    <a:solidFill>
-                      <a:srgbClr val="FEF3C7"/>
-                    </a:solidFill>
-                  </a:tcPr>
-                </a:tc>
-              </a:tr>
-              <a:tr h="329184">
-                <a:tc>
-                  <a:txBody>
-                    <a:bodyPr/>
-                    <a:lstStyle/>
-                    <a:p>
-                      <a:pPr algn="l" indent="0" marL="0">
-                        <a:buNone/>
-                      </a:pPr>
-                      <a:r>
-                        <a:rPr lang="en-US" sz="1100" dirty="0">
-                          <a:solidFill>
-                            <a:srgbClr val="17233B"/>
-                          </a:solidFill>
-                          <a:latin typeface="Calibri" pitchFamily="34" charset="0"/>
-                          <a:ea typeface="Calibri" pitchFamily="34" charset="-122"/>
-                          <a:cs typeface="Calibri" pitchFamily="34" charset="-120"/>
-                        </a:rPr>
-                        <a:t>spl-secure</a:t>
-                      </a:r>
-                      <a:endParaRPr lang="en-US" sz="1100" dirty="0">
-                        <a:latin typeface="Calibri" charset="0"/>
-                        <a:ea typeface="Calibri" charset="0"/>
-                        <a:cs typeface="Calibri" charset="0"/>
-                      </a:endParaRPr>
-                    </a:p>
-                  </a:txBody>
-                  <a:tcPr marL="91440" marR="91440" marT="45720" marB="45720" anchor="ctr">
-                    <a:lnL w="6350" cap="flat" cmpd="sng" algn="ctr">
-                      <a:solidFill>
-                        <a:srgbClr val="E9EEF5"/>
-                      </a:solidFill>
-                      <a:prstDash val="solid"/>
-                      <a:round/>
-                      <a:headEnd type="none" w="med" len="med"/>
-                      <a:tailEnd type="none" w="med" len="med"/>
-                    </a:lnL>
-                    <a:lnR w="6350" cap="flat" cmpd="sng" algn="ctr">
-                      <a:solidFill>
-                        <a:srgbClr val="E9EEF5"/>
-                      </a:solidFill>
-                      <a:prstDash val="solid"/>
-                      <a:round/>
-                      <a:headEnd type="none" w="med" len="med"/>
-                      <a:tailEnd type="none" w="med" len="med"/>
-                    </a:lnR>
-                    <a:lnT w="6350" cap="flat" cmpd="sng" algn="ctr">
-                      <a:solidFill>
-                        <a:srgbClr val="E9EEF5"/>
-                      </a:solidFill>
-                      <a:prstDash val="solid"/>
-                      <a:round/>
-                      <a:headEnd type="none" w="med" len="med"/>
-                      <a:tailEnd type="none" w="med" len="med"/>
-                    </a:lnT>
-                    <a:lnB w="6350" cap="flat" cmpd="sng" algn="ctr">
-                      <a:solidFill>
-                        <a:srgbClr val="E9EEF5"/>
-                      </a:solidFill>
-                      <a:prstDash val="solid"/>
-                      <a:round/>
-                      <a:headEnd type="none" w="med" len="med"/>
-                      <a:tailEnd type="none" w="med" len="med"/>
-                    </a:lnB>
-                  </a:tcPr>
-                </a:tc>
-                <a:tc>
-                  <a:txBody>
-                    <a:bodyPr/>
-                    <a:lstStyle/>
-                    <a:p>
-                      <a:pPr algn="ctr" indent="0" marL="0">
-                        <a:buNone/>
-                      </a:pPr>
-                      <a:r>
-                        <a:rPr lang="en-US" sz="1100" dirty="0">
-                          <a:solidFill>
-                            <a:srgbClr val="17233B"/>
-                          </a:solidFill>
-                          <a:latin typeface="Calibri" pitchFamily="34" charset="0"/>
-                          <a:ea typeface="Calibri" pitchFamily="34" charset="-122"/>
-                          <a:cs typeface="Calibri" pitchFamily="34" charset="-120"/>
-                        </a:rPr>
-                        <a:t>8</a:t>
-                      </a:r>
-                      <a:endParaRPr lang="en-US" sz="1100" dirty="0">
-                        <a:latin typeface="Calibri" charset="0"/>
-                        <a:ea typeface="Calibri" charset="0"/>
-                        <a:cs typeface="Calibri" charset="0"/>
-                      </a:endParaRPr>
-                    </a:p>
-                  </a:txBody>
-                  <a:tcPr marL="91440" marR="91440" marT="45720" marB="45720" anchor="ctr">
-                    <a:lnL w="6350" cap="flat" cmpd="sng" algn="ctr">
-                      <a:solidFill>
-                        <a:srgbClr val="E9EEF5"/>
-                      </a:solidFill>
-                      <a:prstDash val="solid"/>
-                      <a:round/>
-                      <a:headEnd type="none" w="med" len="med"/>
-                      <a:tailEnd type="none" w="med" len="med"/>
-                    </a:lnL>
-                    <a:lnR w="6350" cap="flat" cmpd="sng" algn="ctr">
-                      <a:solidFill>
-                        <a:srgbClr val="E9EEF5"/>
-                      </a:solidFill>
-                      <a:prstDash val="solid"/>
-                      <a:round/>
-                      <a:headEnd type="none" w="med" len="med"/>
-                      <a:tailEnd type="none" w="med" len="med"/>
-                    </a:lnR>
-                    <a:lnT w="6350" cap="flat" cmpd="sng" algn="ctr">
-                      <a:solidFill>
-                        <a:srgbClr val="E9EEF5"/>
-                      </a:solidFill>
-                      <a:prstDash val="solid"/>
-                      <a:round/>
-                      <a:headEnd type="none" w="med" len="med"/>
-                      <a:tailEnd type="none" w="med" len="med"/>
-                    </a:lnT>
-                    <a:lnB w="6350" cap="flat" cmpd="sng" algn="ctr">
-                      <a:solidFill>
-                        <a:srgbClr val="E9EEF5"/>
-                      </a:solidFill>
-                      <a:prstDash val="solid"/>
-                      <a:round/>
-                      <a:headEnd type="none" w="med" len="med"/>
-                      <a:tailEnd type="none" w="med" len="med"/>
-                    </a:lnB>
-                  </a:tcPr>
-                </a:tc>
-                <a:tc>
-                  <a:txBody>
-                    <a:bodyPr/>
-                    <a:lstStyle/>
-                    <a:p>
-                      <a:pPr algn="ctr" indent="0" marL="0">
-                        <a:buNone/>
-                      </a:pPr>
-                      <a:r>
-                        <a:rPr lang="en-US" sz="1100" dirty="0">
-                          <a:solidFill>
-                            <a:srgbClr val="17233B"/>
-                          </a:solidFill>
-                          <a:latin typeface="Calibri" pitchFamily="34" charset="0"/>
-                          <a:ea typeface="Calibri" pitchFamily="34" charset="-122"/>
-                          <a:cs typeface="Calibri" pitchFamily="34" charset="-120"/>
-                        </a:rPr>
-                        <a:t>3</a:t>
-                      </a:r>
-                      <a:endParaRPr lang="en-US" sz="1100" dirty="0">
-                        <a:latin typeface="Calibri" charset="0"/>
-                        <a:ea typeface="Calibri" charset="0"/>
-                        <a:cs typeface="Calibri" charset="0"/>
-                      </a:endParaRPr>
-                    </a:p>
-                  </a:txBody>
-                  <a:tcPr marL="91440" marR="91440" marT="45720" marB="45720" anchor="ctr">
-                    <a:lnL w="6350" cap="flat" cmpd="sng" algn="ctr">
-                      <a:solidFill>
-                        <a:srgbClr val="E9EEF5"/>
-                      </a:solidFill>
-                      <a:prstDash val="solid"/>
-                      <a:round/>
-                      <a:headEnd type="none" w="med" len="med"/>
-                      <a:tailEnd type="none" w="med" len="med"/>
-                    </a:lnL>
-                    <a:lnR w="6350" cap="flat" cmpd="sng" algn="ctr">
-                      <a:solidFill>
-                        <a:srgbClr val="E9EEF5"/>
-                      </a:solidFill>
-                      <a:prstDash val="solid"/>
-                      <a:round/>
-                      <a:headEnd type="none" w="med" len="med"/>
-                      <a:tailEnd type="none" w="med" len="med"/>
-                    </a:lnR>
-                    <a:lnT w="6350" cap="flat" cmpd="sng" algn="ctr">
-                      <a:solidFill>
-                        <a:srgbClr val="E9EEF5"/>
-                      </a:solidFill>
-                      <a:prstDash val="solid"/>
-                      <a:round/>
-                      <a:headEnd type="none" w="med" len="med"/>
-                      <a:tailEnd type="none" w="med" len="med"/>
-                    </a:lnT>
-                    <a:lnB w="6350" cap="flat" cmpd="sng" algn="ctr">
-                      <a:solidFill>
-                        <a:srgbClr val="E9EEF5"/>
-                      </a:solidFill>
-                      <a:prstDash val="solid"/>
-                      <a:round/>
-                      <a:headEnd type="none" w="med" len="med"/>
-                      <a:tailEnd type="none" w="med" len="med"/>
-                    </a:lnB>
-                  </a:tcPr>
-                </a:tc>
-                <a:tc>
-                  <a:txBody>
-                    <a:bodyPr/>
-                    <a:lstStyle/>
-                    <a:p>
-                      <a:pPr algn="ctr" indent="0" marL="0">
-                        <a:buNone/>
-                      </a:pPr>
-                      <a:r>
-                        <a:rPr lang="en-US" sz="1100" dirty="0">
-                          <a:solidFill>
-                            <a:srgbClr val="17233B"/>
-                          </a:solidFill>
-                          <a:latin typeface="Calibri" pitchFamily="34" charset="0"/>
-                          <a:ea typeface="Calibri" pitchFamily="34" charset="-122"/>
-                          <a:cs typeface="Calibri" pitchFamily="34" charset="-120"/>
-                        </a:rPr>
-                        <a:t>5</a:t>
-                      </a:r>
-                      <a:endParaRPr lang="en-US" sz="1100" dirty="0">
-                        <a:latin typeface="Calibri" charset="0"/>
-                        <a:ea typeface="Calibri" charset="0"/>
-                        <a:cs typeface="Calibri" charset="0"/>
-                      </a:endParaRPr>
-                    </a:p>
-                  </a:txBody>
-                  <a:tcPr marL="91440" marR="91440" marT="45720" marB="45720" anchor="ctr">
-                    <a:lnL w="6350" cap="flat" cmpd="sng" algn="ctr">
-                      <a:solidFill>
-                        <a:srgbClr val="E9EEF5"/>
-                      </a:solidFill>
-                      <a:prstDash val="solid"/>
-                      <a:round/>
-                      <a:headEnd type="none" w="med" len="med"/>
-                      <a:tailEnd type="none" w="med" len="med"/>
-                    </a:lnL>
-                    <a:lnR w="6350" cap="flat" cmpd="sng" algn="ctr">
-                      <a:solidFill>
-                        <a:srgbClr val="E9EEF5"/>
-                      </a:solidFill>
-                      <a:prstDash val="solid"/>
-                      <a:round/>
-                      <a:headEnd type="none" w="med" len="med"/>
-                      <a:tailEnd type="none" w="med" len="med"/>
-                    </a:lnR>
-                    <a:lnT w="6350" cap="flat" cmpd="sng" algn="ctr">
-                      <a:solidFill>
-                        <a:srgbClr val="E9EEF5"/>
-                      </a:solidFill>
-                      <a:prstDash val="solid"/>
-                      <a:round/>
-                      <a:headEnd type="none" w="med" len="med"/>
-                      <a:tailEnd type="none" w="med" len="med"/>
-                    </a:lnT>
-                    <a:lnB w="6350" cap="flat" cmpd="sng" algn="ctr">
-                      <a:solidFill>
-                        <a:srgbClr val="E9EEF5"/>
-                      </a:solidFill>
-                      <a:prstDash val="solid"/>
-                      <a:round/>
-                      <a:headEnd type="none" w="med" len="med"/>
-                      <a:tailEnd type="none" w="med" len="med"/>
-                    </a:lnB>
-                  </a:tcPr>
-                </a:tc>
-                <a:tc>
-                  <a:txBody>
-                    <a:bodyPr/>
-                    <a:lstStyle/>
-                    <a:p>
-                      <a:pPr algn="ctr" indent="0" marL="0">
-                        <a:buNone/>
-                      </a:pPr>
-                      <a:r>
-                        <a:rPr lang="en-US" sz="1100" dirty="0">
-                          <a:solidFill>
-                            <a:srgbClr val="17233B"/>
-                          </a:solidFill>
-                          <a:latin typeface="Calibri" pitchFamily="34" charset="0"/>
-                          <a:ea typeface="Calibri" pitchFamily="34" charset="-122"/>
-                          <a:cs typeface="Calibri" pitchFamily="34" charset="-120"/>
-                        </a:rPr>
-                        <a:t>—</a:t>
-                      </a:r>
-                      <a:endParaRPr lang="en-US" sz="1100" dirty="0">
-                        <a:latin typeface="Calibri" charset="0"/>
-                        <a:ea typeface="Calibri" charset="0"/>
-                        <a:cs typeface="Calibri" charset="0"/>
-                      </a:endParaRPr>
-                    </a:p>
-                  </a:txBody>
-                  <a:tcPr marL="91440" marR="91440" marT="45720" marB="45720" anchor="ctr">
-                    <a:lnL w="6350" cap="flat" cmpd="sng" algn="ctr">
-                      <a:solidFill>
-                        <a:srgbClr val="E9EEF5"/>
-                      </a:solidFill>
-                      <a:prstDash val="solid"/>
-                      <a:round/>
-                      <a:headEnd type="none" w="med" len="med"/>
-                      <a:tailEnd type="none" w="med" len="med"/>
-                    </a:lnL>
-                    <a:lnR w="6350" cap="flat" cmpd="sng" algn="ctr">
-                      <a:solidFill>
-                        <a:srgbClr val="E9EEF5"/>
-                      </a:solidFill>
-                      <a:prstDash val="solid"/>
-                      <a:round/>
-                      <a:headEnd type="none" w="med" len="med"/>
-                      <a:tailEnd type="none" w="med" len="med"/>
-                    </a:lnR>
-                    <a:lnT w="6350" cap="flat" cmpd="sng" algn="ctr">
-                      <a:solidFill>
-                        <a:srgbClr val="E9EEF5"/>
-                      </a:solidFill>
-                      <a:prstDash val="solid"/>
-                      <a:round/>
-                      <a:headEnd type="none" w="med" len="med"/>
-                      <a:tailEnd type="none" w="med" len="med"/>
-                    </a:lnT>
-                    <a:lnB w="6350" cap="flat" cmpd="sng" algn="ctr">
-                      <a:solidFill>
-                        <a:srgbClr val="E9EEF5"/>
-                      </a:solidFill>
-                      <a:prstDash val="solid"/>
-                      <a:round/>
-                      <a:headEnd type="none" w="med" len="med"/>
-                      <a:tailEnd type="none" w="med" len="med"/>
-                    </a:lnB>
-                  </a:tcPr>
-                </a:tc>
-                <a:tc>
-                  <a:txBody>
-                    <a:bodyPr/>
-                    <a:lstStyle/>
-                    <a:p>
-                      <a:pPr algn="ctr" indent="0" marL="0">
-                        <a:buNone/>
-                      </a:pPr>
-                      <a:r>
-                        <a:rPr lang="en-US" sz="1050" b="1" dirty="0">
-                          <a:solidFill>
-                            <a:srgbClr val="B45309"/>
-                          </a:solidFill>
-                          <a:latin typeface="Calibri" pitchFamily="34" charset="0"/>
-                          <a:ea typeface="Calibri" pitchFamily="34" charset="-122"/>
-                          <a:cs typeface="Calibri" pitchFamily="34" charset="-120"/>
-                        </a:rPr>
-                        <a:t>Review</a:t>
-                      </a:r>
-                      <a:endParaRPr lang="en-US" sz="1050" dirty="0">
-                        <a:latin typeface="Calibri" charset="0"/>
-                        <a:ea typeface="Calibri" charset="0"/>
-                        <a:cs typeface="Calibri" charset="0"/>
-                      </a:endParaRPr>
-                    </a:p>
-                  </a:txBody>
-                  <a:tcPr marL="91440" marR="91440" marT="45720" marB="45720" anchor="ctr">
-                    <a:lnL w="6350" cap="flat" cmpd="sng" algn="ctr">
-                      <a:solidFill>
-                        <a:srgbClr val="E9EEF5"/>
-                      </a:solidFill>
-                      <a:prstDash val="solid"/>
-                      <a:round/>
-                      <a:headEnd type="none" w="med" len="med"/>
-                      <a:tailEnd type="none" w="med" len="med"/>
-                    </a:lnL>
-                    <a:lnR w="6350" cap="flat" cmpd="sng" algn="ctr">
-                      <a:solidFill>
-                        <a:srgbClr val="E9EEF5"/>
-                      </a:solidFill>
-                      <a:prstDash val="solid"/>
-                      <a:round/>
-                      <a:headEnd type="none" w="med" len="med"/>
-                      <a:tailEnd type="none" w="med" len="med"/>
-                    </a:lnR>
-                    <a:lnT w="6350" cap="flat" cmpd="sng" algn="ctr">
-                      <a:solidFill>
-                        <a:srgbClr val="E9EEF5"/>
-                      </a:solidFill>
-                      <a:prstDash val="solid"/>
-                      <a:round/>
-                      <a:headEnd type="none" w="med" len="med"/>
-                      <a:tailEnd type="none" w="med" len="med"/>
-                    </a:lnT>
-                    <a:lnB w="6350" cap="flat" cmpd="sng" algn="ctr">
-                      <a:solidFill>
-                        <a:srgbClr val="E9EEF5"/>
-                      </a:solidFill>
-                      <a:prstDash val="solid"/>
-                      <a:round/>
-                      <a:headEnd type="none" w="med" len="med"/>
-                      <a:tailEnd type="none" w="med" len="med"/>
-                    </a:lnB>
-                    <a:solidFill>
-                      <a:srgbClr val="FEF3C7"/>
-                    </a:solidFill>
-                  </a:tcPr>
-                </a:tc>
-              </a:tr>
-              <a:tr h="329184">
-                <a:tc>
-                  <a:txBody>
-                    <a:bodyPr/>
-                    <a:lstStyle/>
-                    <a:p>
-                      <a:pPr algn="l" indent="0" marL="0">
-                        <a:buNone/>
-                      </a:pPr>
-                      <a:r>
-                        <a:rPr lang="en-US" sz="1100" dirty="0">
-                          <a:solidFill>
-                            <a:srgbClr val="17233B"/>
-                          </a:solidFill>
-                          <a:latin typeface="Calibri" pitchFamily="34" charset="0"/>
-                          <a:ea typeface="Calibri" pitchFamily="34" charset="-122"/>
-                          <a:cs typeface="Calibri" pitchFamily="34" charset="-120"/>
-                        </a:rPr>
-                        <a:t>spl-edp</a:t>
-                      </a:r>
-                      <a:endParaRPr lang="en-US" sz="1100" dirty="0">
-                        <a:latin typeface="Calibri" charset="0"/>
-                        <a:ea typeface="Calibri" charset="0"/>
-                        <a:cs typeface="Calibri" charset="0"/>
-                      </a:endParaRPr>
-                    </a:p>
-                  </a:txBody>
-                  <a:tcPr marL="91440" marR="91440" marT="45720" marB="45720" anchor="ctr">
-                    <a:lnL w="6350" cap="flat" cmpd="sng" algn="ctr">
-                      <a:solidFill>
-                        <a:srgbClr val="E9EEF5"/>
-                      </a:solidFill>
-                      <a:prstDash val="solid"/>
-                      <a:round/>
-                      <a:headEnd type="none" w="med" len="med"/>
-                      <a:tailEnd type="none" w="med" len="med"/>
-                    </a:lnL>
-                    <a:lnR w="6350" cap="flat" cmpd="sng" algn="ctr">
-                      <a:solidFill>
-                        <a:srgbClr val="E9EEF5"/>
-                      </a:solidFill>
-                      <a:prstDash val="solid"/>
-                      <a:round/>
-                      <a:headEnd type="none" w="med" len="med"/>
-                      <a:tailEnd type="none" w="med" len="med"/>
-                    </a:lnR>
-                    <a:lnT w="6350" cap="flat" cmpd="sng" algn="ctr">
-                      <a:solidFill>
-                        <a:srgbClr val="E9EEF5"/>
-                      </a:solidFill>
-                      <a:prstDash val="solid"/>
-                      <a:round/>
-                      <a:headEnd type="none" w="med" len="med"/>
-                      <a:tailEnd type="none" w="med" len="med"/>
-                    </a:lnT>
-                    <a:lnB w="6350" cap="flat" cmpd="sng" algn="ctr">
-                      <a:solidFill>
-                        <a:srgbClr val="E9EEF5"/>
-                      </a:solidFill>
-                      <a:prstDash val="solid"/>
-                      <a:round/>
-                      <a:headEnd type="none" w="med" len="med"/>
-                      <a:tailEnd type="none" w="med" len="med"/>
-                    </a:lnB>
-                  </a:tcPr>
-                </a:tc>
-                <a:tc>
-                  <a:txBody>
-                    <a:bodyPr/>
-                    <a:lstStyle/>
-                    <a:p>
-                      <a:pPr algn="ctr" indent="0" marL="0">
-                        <a:buNone/>
-                      </a:pPr>
-                      <a:r>
-                        <a:rPr lang="en-US" sz="1100" dirty="0">
-                          <a:solidFill>
-                            <a:srgbClr val="17233B"/>
-                          </a:solidFill>
-                          <a:latin typeface="Calibri" pitchFamily="34" charset="0"/>
-                          <a:ea typeface="Calibri" pitchFamily="34" charset="-122"/>
-                          <a:cs typeface="Calibri" pitchFamily="34" charset="-120"/>
-                        </a:rPr>
-                        <a:t>14</a:t>
-                      </a:r>
-                      <a:endParaRPr lang="en-US" sz="1100" dirty="0">
-                        <a:latin typeface="Calibri" charset="0"/>
-                        <a:ea typeface="Calibri" charset="0"/>
-                        <a:cs typeface="Calibri" charset="0"/>
-                      </a:endParaRPr>
-                    </a:p>
-                  </a:txBody>
-                  <a:tcPr marL="91440" marR="91440" marT="45720" marB="45720" anchor="ctr">
-                    <a:lnL w="6350" cap="flat" cmpd="sng" algn="ctr">
-                      <a:solidFill>
-                        <a:srgbClr val="E9EEF5"/>
-                      </a:solidFill>
-                      <a:prstDash val="solid"/>
-                      <a:round/>
-                      <a:headEnd type="none" w="med" len="med"/>
-                      <a:tailEnd type="none" w="med" len="med"/>
-                    </a:lnL>
-                    <a:lnR w="6350" cap="flat" cmpd="sng" algn="ctr">
-                      <a:solidFill>
-                        <a:srgbClr val="E9EEF5"/>
-                      </a:solidFill>
-                      <a:prstDash val="solid"/>
-                      <a:round/>
-                      <a:headEnd type="none" w="med" len="med"/>
-                      <a:tailEnd type="none" w="med" len="med"/>
-                    </a:lnR>
-                    <a:lnT w="6350" cap="flat" cmpd="sng" algn="ctr">
-                      <a:solidFill>
-                        <a:srgbClr val="E9EEF5"/>
-                      </a:solidFill>
-                      <a:prstDash val="solid"/>
-                      <a:round/>
-                      <a:headEnd type="none" w="med" len="med"/>
-                      <a:tailEnd type="none" w="med" len="med"/>
-                    </a:lnT>
-                    <a:lnB w="6350" cap="flat" cmpd="sng" algn="ctr">
-                      <a:solidFill>
-                        <a:srgbClr val="E9EEF5"/>
-                      </a:solidFill>
-                      <a:prstDash val="solid"/>
-                      <a:round/>
-                      <a:headEnd type="none" w="med" len="med"/>
-                      <a:tailEnd type="none" w="med" len="med"/>
-                    </a:lnB>
-                  </a:tcPr>
-                </a:tc>
-                <a:tc>
-                  <a:txBody>
-                    <a:bodyPr/>
-                    <a:lstStyle/>
-                    <a:p>
-                      <a:pPr algn="ctr" indent="0" marL="0">
-                        <a:buNone/>
-                      </a:pPr>
-                      <a:r>
-                        <a:rPr lang="en-US" sz="1100" dirty="0">
-                          <a:solidFill>
-                            <a:srgbClr val="17233B"/>
-                          </a:solidFill>
-                          <a:latin typeface="Calibri" pitchFamily="34" charset="0"/>
-                          <a:ea typeface="Calibri" pitchFamily="34" charset="-122"/>
-                          <a:cs typeface="Calibri" pitchFamily="34" charset="-120"/>
-                        </a:rPr>
-                        <a:t>14</a:t>
-                      </a:r>
-                      <a:endParaRPr lang="en-US" sz="1100" dirty="0">
-                        <a:latin typeface="Calibri" charset="0"/>
-                        <a:ea typeface="Calibri" charset="0"/>
-                        <a:cs typeface="Calibri" charset="0"/>
-                      </a:endParaRPr>
-                    </a:p>
-                  </a:txBody>
-                  <a:tcPr marL="91440" marR="91440" marT="45720" marB="45720" anchor="ctr">
-                    <a:lnL w="6350" cap="flat" cmpd="sng" algn="ctr">
-                      <a:solidFill>
-                        <a:srgbClr val="E9EEF5"/>
-                      </a:solidFill>
-                      <a:prstDash val="solid"/>
-                      <a:round/>
-                      <a:headEnd type="none" w="med" len="med"/>
-                      <a:tailEnd type="none" w="med" len="med"/>
-                    </a:lnL>
-                    <a:lnR w="6350" cap="flat" cmpd="sng" algn="ctr">
-                      <a:solidFill>
-                        <a:srgbClr val="E9EEF5"/>
-                      </a:solidFill>
-                      <a:prstDash val="solid"/>
-                      <a:round/>
-                      <a:headEnd type="none" w="med" len="med"/>
-                      <a:tailEnd type="none" w="med" len="med"/>
-                    </a:lnR>
-                    <a:lnT w="6350" cap="flat" cmpd="sng" algn="ctr">
-                      <a:solidFill>
-                        <a:srgbClr val="E9EEF5"/>
-                      </a:solidFill>
-                      <a:prstDash val="solid"/>
-                      <a:round/>
-                      <a:headEnd type="none" w="med" len="med"/>
-                      <a:tailEnd type="none" w="med" len="med"/>
-                    </a:lnT>
-                    <a:lnB w="6350" cap="flat" cmpd="sng" algn="ctr">
-                      <a:solidFill>
-                        <a:srgbClr val="E9EEF5"/>
-                      </a:solidFill>
-                      <a:prstDash val="solid"/>
-                      <a:round/>
-                      <a:headEnd type="none" w="med" len="med"/>
-                      <a:tailEnd type="none" w="med" len="med"/>
-                    </a:lnB>
-                  </a:tcPr>
-                </a:tc>
-                <a:tc>
-                  <a:txBody>
-                    <a:bodyPr/>
-                    <a:lstStyle/>
-                    <a:p>
-                      <a:pPr algn="ctr" indent="0" marL="0">
-                        <a:buNone/>
-                      </a:pPr>
-                      <a:r>
-                        <a:rPr lang="en-US" sz="1100" dirty="0">
-                          <a:solidFill>
-                            <a:srgbClr val="17233B"/>
-                          </a:solidFill>
-                          <a:latin typeface="Calibri" pitchFamily="34" charset="0"/>
-                          <a:ea typeface="Calibri" pitchFamily="34" charset="-122"/>
-                          <a:cs typeface="Calibri" pitchFamily="34" charset="-120"/>
-                        </a:rPr>
-                        <a:t>—</a:t>
-                      </a:r>
-                      <a:endParaRPr lang="en-US" sz="1100" dirty="0">
-                        <a:latin typeface="Calibri" charset="0"/>
-                        <a:ea typeface="Calibri" charset="0"/>
-                        <a:cs typeface="Calibri" charset="0"/>
-                      </a:endParaRPr>
-                    </a:p>
-                  </a:txBody>
-                  <a:tcPr marL="91440" marR="91440" marT="45720" marB="45720" anchor="ctr">
-                    <a:lnL w="6350" cap="flat" cmpd="sng" algn="ctr">
-                      <a:solidFill>
-                        <a:srgbClr val="E9EEF5"/>
-                      </a:solidFill>
-                      <a:prstDash val="solid"/>
-                      <a:round/>
-                      <a:headEnd type="none" w="med" len="med"/>
-                      <a:tailEnd type="none" w="med" len="med"/>
-                    </a:lnL>
-                    <a:lnR w="6350" cap="flat" cmpd="sng" algn="ctr">
-                      <a:solidFill>
-                        <a:srgbClr val="E9EEF5"/>
-                      </a:solidFill>
-                      <a:prstDash val="solid"/>
-                      <a:round/>
-                      <a:headEnd type="none" w="med" len="med"/>
-                      <a:tailEnd type="none" w="med" len="med"/>
-                    </a:lnR>
-                    <a:lnT w="6350" cap="flat" cmpd="sng" algn="ctr">
-                      <a:solidFill>
-                        <a:srgbClr val="E9EEF5"/>
-                      </a:solidFill>
-                      <a:prstDash val="solid"/>
-                      <a:round/>
-                      <a:headEnd type="none" w="med" len="med"/>
-                      <a:tailEnd type="none" w="med" len="med"/>
-                    </a:lnT>
-                    <a:lnB w="6350" cap="flat" cmpd="sng" algn="ctr">
-                      <a:solidFill>
-                        <a:srgbClr val="E9EEF5"/>
-                      </a:solidFill>
-                      <a:prstDash val="solid"/>
-                      <a:round/>
-                      <a:headEnd type="none" w="med" len="med"/>
-                      <a:tailEnd type="none" w="med" len="med"/>
-                    </a:lnB>
-                  </a:tcPr>
-                </a:tc>
-                <a:tc>
-                  <a:txBody>
-                    <a:bodyPr/>
-                    <a:lstStyle/>
-                    <a:p>
-                      <a:pPr algn="ctr" indent="0" marL="0">
-                        <a:buNone/>
-                      </a:pPr>
-                      <a:r>
-                        <a:rPr lang="en-US" sz="1100" dirty="0">
-                          <a:solidFill>
-                            <a:srgbClr val="17233B"/>
-                          </a:solidFill>
-                          <a:latin typeface="Calibri" pitchFamily="34" charset="0"/>
-                          <a:ea typeface="Calibri" pitchFamily="34" charset="-122"/>
-                          <a:cs typeface="Calibri" pitchFamily="34" charset="-120"/>
-                        </a:rPr>
-                        <a:t>—</a:t>
-                      </a:r>
-                      <a:endParaRPr lang="en-US" sz="1100" dirty="0">
-                        <a:latin typeface="Calibri" charset="0"/>
-                        <a:ea typeface="Calibri" charset="0"/>
-                        <a:cs typeface="Calibri" charset="0"/>
-                      </a:endParaRPr>
-                    </a:p>
-                  </a:txBody>
-                  <a:tcPr marL="91440" marR="91440" marT="45720" marB="45720" anchor="ctr">
-                    <a:lnL w="6350" cap="flat" cmpd="sng" algn="ctr">
-                      <a:solidFill>
-                        <a:srgbClr val="E9EEF5"/>
-                      </a:solidFill>
-                      <a:prstDash val="solid"/>
-                      <a:round/>
-                      <a:headEnd type="none" w="med" len="med"/>
-                      <a:tailEnd type="none" w="med" len="med"/>
-                    </a:lnL>
-                    <a:lnR w="6350" cap="flat" cmpd="sng" algn="ctr">
-                      <a:solidFill>
-                        <a:srgbClr val="E9EEF5"/>
-                      </a:solidFill>
-                      <a:prstDash val="solid"/>
-                      <a:round/>
-                      <a:headEnd type="none" w="med" len="med"/>
-                      <a:tailEnd type="none" w="med" len="med"/>
-                    </a:lnR>
-                    <a:lnT w="6350" cap="flat" cmpd="sng" algn="ctr">
-                      <a:solidFill>
-                        <a:srgbClr val="E9EEF5"/>
-                      </a:solidFill>
-                      <a:prstDash val="solid"/>
-                      <a:round/>
-                      <a:headEnd type="none" w="med" len="med"/>
-                      <a:tailEnd type="none" w="med" len="med"/>
-                    </a:lnT>
-                    <a:lnB w="6350" cap="flat" cmpd="sng" algn="ctr">
-                      <a:solidFill>
-                        <a:srgbClr val="E9EEF5"/>
-                      </a:solidFill>
-                      <a:prstDash val="solid"/>
-                      <a:round/>
-                      <a:headEnd type="none" w="med" len="med"/>
-                      <a:tailEnd type="none" w="med" len="med"/>
-                    </a:lnB>
-                  </a:tcPr>
-                </a:tc>
-                <a:tc>
-                  <a:txBody>
-                    <a:bodyPr/>
-                    <a:lstStyle/>
-                    <a:p>
-                      <a:pPr algn="ctr" indent="0" marL="0">
-                        <a:buNone/>
-                      </a:pPr>
-                      <a:r>
-                        <a:rPr lang="en-US" sz="1050" b="1" dirty="0">
-                          <a:solidFill>
-                            <a:srgbClr val="16A34A"/>
-                          </a:solidFill>
-                          <a:latin typeface="Calibri" pitchFamily="34" charset="0"/>
-                          <a:ea typeface="Calibri" pitchFamily="34" charset="-122"/>
-                          <a:cs typeface="Calibri" pitchFamily="34" charset="-120"/>
-                        </a:rPr>
-                        <a:t>Ready</a:t>
-                      </a:r>
-                      <a:endParaRPr lang="en-US" sz="1050" dirty="0">
-                        <a:latin typeface="Calibri" charset="0"/>
-                        <a:ea typeface="Calibri" charset="0"/>
-                        <a:cs typeface="Calibri" charset="0"/>
-                      </a:endParaRPr>
-                    </a:p>
-                  </a:txBody>
-                  <a:tcPr marL="91440" marR="91440" marT="45720" marB="45720" anchor="ctr">
-                    <a:lnL w="6350" cap="flat" cmpd="sng" algn="ctr">
-                      <a:solidFill>
-                        <a:srgbClr val="E9EEF5"/>
-                      </a:solidFill>
-                      <a:prstDash val="solid"/>
-                      <a:round/>
-                      <a:headEnd type="none" w="med" len="med"/>
-                      <a:tailEnd type="none" w="med" len="med"/>
-                    </a:lnL>
-                    <a:lnR w="6350" cap="flat" cmpd="sng" algn="ctr">
-                      <a:solidFill>
-                        <a:srgbClr val="E9EEF5"/>
-                      </a:solidFill>
-                      <a:prstDash val="solid"/>
-                      <a:round/>
-                      <a:headEnd type="none" w="med" len="med"/>
-                      <a:tailEnd type="none" w="med" len="med"/>
-                    </a:lnR>
-                    <a:lnT w="6350" cap="flat" cmpd="sng" algn="ctr">
-                      <a:solidFill>
-                        <a:srgbClr val="E9EEF5"/>
-                      </a:solidFill>
-                      <a:prstDash val="solid"/>
-                      <a:round/>
-                      <a:headEnd type="none" w="med" len="med"/>
-                      <a:tailEnd type="none" w="med" len="med"/>
-                    </a:lnT>
-                    <a:lnB w="6350" cap="flat" cmpd="sng" algn="ctr">
-                      <a:solidFill>
-                        <a:srgbClr val="E9EEF5"/>
-                      </a:solidFill>
-                      <a:prstDash val="solid"/>
-                      <a:round/>
-                      <a:headEnd type="none" w="med" len="med"/>
-                      <a:tailEnd type="none" w="med" len="med"/>
-                    </a:lnB>
-                    <a:solidFill>
-                      <a:srgbClr val="DCFCE7"/>
-                    </a:solidFill>
-                  </a:tcPr>
-                </a:tc>
-              </a:tr>
-            </a:tbl>
-          </a:graphicData>
-        </a:graphic>
-      </p:graphicFrame>
-      <p:sp>
-        <p:nvSpPr>
-          <p:cNvPr id="20" name="Text 17"/>
-          <p:cNvSpPr/>
-          <p:nvPr/>
-        </p:nvSpPr>
-        <p:spPr>
-          <a:xfrm>
-            <a:off x="10067544" y="5148072"/>
-            <a:ext cx="1280160" cy="228600"/>
-          </a:xfrm>
-          <a:prstGeom prst="rect">
-            <a:avLst/>
-          </a:prstGeom>
-          <a:noFill/>
-          <a:ln/>
-        </p:spPr>
-        <p:txBody>
-          <a:bodyPr wrap="square" rtlCol="0" anchor="ctr"/>
-          <a:lstStyle/>
-          <a:p>
-            <a:pPr algn="r" indent="0" marL="0">
-              <a:buNone/>
-            </a:pPr>
-            <a:r>
-              <a:rPr lang="en-US" sz="900" i="1" dirty="0">
-                <a:solidFill>
-                  <a:srgbClr val="9AA5B5"/>
-                </a:solidFill>
-                <a:latin typeface="Calibri" pitchFamily="34" charset="0"/>
-                <a:ea typeface="Calibri" pitchFamily="34" charset="-122"/>
-                <a:cs typeface="Calibri" pitchFamily="34" charset="-120"/>
-              </a:rPr>
-              <a:t>Sample report</a:t>
-            </a:r>
-            <a:endParaRPr lang="en-US" sz="900" dirty="0"/>
-          </a:p>
-        </p:txBody>
-      </p:sp>
-      <p:sp>
-        <p:nvSpPr>
-          <p:cNvPr id="21" name="Text 18"/>
-          <p:cNvSpPr/>
-          <p:nvPr/>
-        </p:nvSpPr>
-        <p:spPr>
-          <a:xfrm>
-            <a:off x="566928" y="5586984"/>
-            <a:ext cx="11064240" cy="457200"/>
-          </a:xfrm>
-          <a:prstGeom prst="rect">
-            <a:avLst/>
-          </a:prstGeom>
-          <a:noFill/>
-          <a:ln/>
-        </p:spPr>
-        <p:txBody>
-          <a:bodyPr wrap="square" rtlCol="0" anchor="ctr"/>
-          <a:lstStyle/>
-          <a:p>
-            <a:pPr indent="0" marL="0">
-              <a:buNone/>
-            </a:pPr>
-            <a:r>
-              <a:rPr lang="en-US" sz="1400" b="1" dirty="0">
-                <a:solidFill>
-                  <a:srgbClr val="2563EB"/>
-                </a:solidFill>
-                <a:latin typeface="Calibri" pitchFamily="34" charset="0"/>
-                <a:ea typeface="Calibri" pitchFamily="34" charset="-122"/>
-                <a:cs typeface="Calibri" pitchFamily="34" charset="-120"/>
-              </a:rPr>
-              <a:t>→   </a:t>
-            </a:r>
-            <a:pPr indent="0" marL="0">
-              <a:buNone/>
-            </a:pPr>
-            <a:r>
-              <a:rPr lang="en-US" sz="1400" dirty="0">
-                <a:solidFill>
-                  <a:srgbClr val="5B6B85"/>
-                </a:solidFill>
-                <a:latin typeface="Calibri" pitchFamily="34" charset="0"/>
-                <a:ea typeface="Calibri" pitchFamily="34" charset="-122"/>
-                <a:cs typeface="Calibri" pitchFamily="34" charset="-120"/>
-              </a:rPr>
-              <a:t>One shareable PDF — modules worst-first, each with tested / not-tested / issues and a Ready · Review · At-risk status.</a:t>
+              <a:t>One shareable PDF — the whole release, grouped by module, in a single sign-off document.</a:t>
             </a:r>
             <a:endParaRPr lang="en-US" sz="1400" dirty="0"/>
           </a:p>
